--- a/docs/plan2graph_중간발표.pptx
+++ b/docs/plan2graph_중간발표.pptx
@@ -23,6 +23,8 @@
     <p:sldId id="271" r:id="rId22"/>
     <p:sldId id="272" r:id="rId23"/>
     <p:sldId id="273" r:id="rId24"/>
+    <p:sldId id="274" r:id="rId25"/>
+    <p:sldId id="275" r:id="rId26"/>
   </p:sldIdLst>
   <p:sldSz cx="12191695" cy="6858000" type="screen4x3"/>
   <p:notesSz cx="6858000" cy="9144000"/>
@@ -4777,7 +4779,7 @@
                 </a:solidFill>
                 <a:latin typeface="맑은 고딕"/>
               </a:rPr>
-              <a:t>AI MODEL</a:t>
+              <a:t>AI MODEL · REFERENCE</a:t>
             </a:r>
           </a:p>
         </p:txBody>
@@ -4819,7 +4821,7 @@
                 </a:solidFill>
                 <a:latin typeface="맑은 고딕"/>
               </a:rPr>
-              <a:t>AI 모델 ② — 소버린 엔진(SOTA 부품 조립 + 한국형 확장)</a:t>
+              <a:t>AI 모델 ② — 엔진: 논문 4편에서 무엇을 빌렸나</a:t>
             </a:r>
           </a:p>
         </p:txBody>
@@ -5017,7 +5019,7 @@
                 </a:solidFill>
                 <a:latin typeface="맑은 고딕"/>
               </a:rPr>
-              <a:t>단일 생성 엔진 — SOTA의 ‘기법(부품)’만 인용·조립 + 우리 novelty</a:t>
+              <a:t>단일 생성 엔진 — SOTA의 ‘기법(부품)’만 인용·조립, contribution은 한국형·완전성·법규</a:t>
             </a:r>
           </a:p>
         </p:txBody>
@@ -5031,8 +5033,8 @@
           <p:nvPr/>
         </p:nvGraphicFramePr>
         <p:xfrm>
-          <a:off x="731520" y="2194560"/>
-          <a:ext cx="10698480" cy="2103120"/>
+          <a:off x="731520" y="2240280"/>
+          <a:ext cx="10698479" cy="2103120"/>
         </p:xfrm>
         <a:graphic>
           <a:graphicData uri="http://schemas.openxmlformats.org/drawingml/2006/table">
@@ -5041,8 +5043,9 @@
                 <a:tableStyleId>{5C22544A-7EE6-4342-B048-85BDC9FD1C3A}</a:tableStyleId>
               </a:tblPr>
               <a:tblGrid>
-                <a:gridCol w="3566160"/>
-                <a:gridCol w="7132320"/>
+                <a:gridCol w="2926080"/>
+                <a:gridCol w="3749039"/>
+                <a:gridCol w="4023360"/>
               </a:tblGrid>
               <a:tr h="420624">
                 <a:tc>
@@ -5058,7 +5061,7 @@
                           </a:solidFill>
                           <a:latin typeface="맑은 고딕"/>
                         </a:rPr>
-                        <a:t>빌린 부품 (인용 base)</a:t>
+                        <a:t>논문 (인용 base)</a:t>
                       </a:r>
                     </a:p>
                   </a:txBody>
@@ -5081,7 +5084,30 @@
                           </a:solidFill>
                           <a:latin typeface="맑은 고딕"/>
                         </a:rPr>
-                        <a:t>역할</a:t>
+                        <a:t>빌린 기법</a:t>
+                      </a:r>
+                    </a:p>
+                  </a:txBody>
+                  <a:tcPr marT="38100" marB="38100" marL="114300" marR="114300" anchor="ctr">
+                    <a:solidFill>
+                      <a:srgbClr val="10141C"/>
+                    </a:solidFill>
+                  </a:tcPr>
+                </a:tc>
+                <a:tc>
+                  <a:txBody>
+                    <a:bodyPr/>
+                    <a:lstStyle/>
+                    <a:p>
+                      <a:pPr algn="ctr"/>
+                      <a:r>
+                        <a:rPr sz="1250" b="1" i="0">
+                          <a:solidFill>
+                            <a:srgbClr val="E6D6A6"/>
+                          </a:solidFill>
+                          <a:latin typeface="맑은 고딕"/>
+                        </a:rPr>
+                        <a:t>엔진에서의 역할</a:t>
                       </a:r>
                     </a:p>
                   </a:txBody>
@@ -5129,7 +5155,30 @@
                           </a:solidFill>
                           <a:latin typeface="맑은 고딕"/>
                         </a:rPr>
-                        <a:t>벡터 직접 diffusion 골격 · 경계조건 (코드 보유·검증)</a:t>
+                        <a:t>벡터 직접 diffusion · 경계조건</a:t>
+                      </a:r>
+                    </a:p>
+                  </a:txBody>
+                  <a:tcPr marT="38100" marB="38100" marL="114300" marR="114300" anchor="ctr">
+                    <a:solidFill>
+                      <a:srgbClr val="FFFFFF"/>
+                    </a:solidFill>
+                  </a:tcPr>
+                </a:tc>
+                <a:tc>
+                  <a:txBody>
+                    <a:bodyPr/>
+                    <a:lstStyle/>
+                    <a:p>
+                      <a:pPr algn="ctr"/>
+                      <a:r>
+                        <a:rPr sz="1250" b="0" i="0">
+                          <a:solidFill>
+                            <a:srgbClr val="212733"/>
+                          </a:solidFill>
+                          <a:latin typeface="맑은 고딕"/>
+                        </a:rPr>
+                        <a:t>골격 — 코드 보유·검증 (FID 1.23)</a:t>
                       </a:r>
                     </a:p>
                   </a:txBody>
@@ -5177,7 +5226,30 @@
                           </a:solidFill>
                           <a:latin typeface="맑은 고딕"/>
                         </a:rPr>
-                        <a:t>정렬 손실 · 자기지도(연결 포인트)</a:t>
+                        <a:t>정렬 손실 · 자기지도</a:t>
+                      </a:r>
+                    </a:p>
+                  </a:txBody>
+                  <a:tcPr marT="38100" marB="38100" marL="114300" marR="114300" anchor="ctr">
+                    <a:solidFill>
+                      <a:srgbClr val="FBFAF6"/>
+                    </a:solidFill>
+                  </a:tcPr>
+                </a:tc>
+                <a:tc>
+                  <a:txBody>
+                    <a:bodyPr/>
+                    <a:lstStyle/>
+                    <a:p>
+                      <a:pPr algn="ctr"/>
+                      <a:r>
+                        <a:rPr sz="1250" b="0" i="0">
+                          <a:solidFill>
+                            <a:srgbClr val="212733"/>
+                          </a:solidFill>
+                          <a:latin typeface="맑은 고딕"/>
+                        </a:rPr>
+                        <a:t>벽·코너 정렬 품질</a:t>
                       </a:r>
                     </a:p>
                   </a:txBody>
@@ -5235,6 +5307,29 @@
                     </a:solidFill>
                   </a:tcPr>
                 </a:tc>
+                <a:tc>
+                  <a:txBody>
+                    <a:bodyPr/>
+                    <a:lstStyle/>
+                    <a:p>
+                      <a:pPr algn="ctr"/>
+                      <a:r>
+                        <a:rPr sz="1250" b="0" i="0">
+                          <a:solidFill>
+                            <a:srgbClr val="212733"/>
+                          </a:solidFill>
+                          <a:latin typeface="맑은 고딕"/>
+                        </a:rPr>
+                        <a:t>방 표현 디노이즈</a:t>
+                      </a:r>
+                    </a:p>
+                  </a:txBody>
+                  <a:tcPr marT="38100" marB="38100" marL="114300" marR="114300" anchor="ctr">
+                    <a:solidFill>
+                      <a:srgbClr val="FFFFFF"/>
+                    </a:solidFill>
+                  </a:tcPr>
+                </a:tc>
               </a:tr>
               <a:tr h="420624">
                 <a:tc>
@@ -5273,7 +5368,30 @@
                           </a:solidFill>
                           <a:latin typeface="맑은 고딕"/>
                         </a:rPr>
-                        <a:t>유효성 제약(markup)</a:t>
+                        <a:t>markup 유효성 제약</a:t>
+                      </a:r>
+                    </a:p>
+                  </a:txBody>
+                  <a:tcPr marT="38100" marB="38100" marL="114300" marR="114300" anchor="ctr">
+                    <a:solidFill>
+                      <a:srgbClr val="FBFAF6"/>
+                    </a:solidFill>
+                  </a:tcPr>
+                </a:tc>
+                <a:tc>
+                  <a:txBody>
+                    <a:bodyPr/>
+                    <a:lstStyle/>
+                    <a:p>
+                      <a:pPr algn="ctr"/>
+                      <a:r>
+                        <a:rPr sz="1250" b="0" i="0">
+                          <a:solidFill>
+                            <a:srgbClr val="212733"/>
+                          </a:solidFill>
+                          <a:latin typeface="맑은 고딕"/>
+                        </a:rPr>
+                        <a:t>출력 유효성</a:t>
                       </a:r>
                     </a:p>
                   </a:txBody>
@@ -5296,8 +5414,8 @@
         </p:nvSpPr>
         <p:spPr>
           <a:xfrm>
-            <a:off x="731520" y="4480560"/>
-            <a:ext cx="10698480" cy="1645920"/>
+            <a:off x="731520" y="4937760"/>
+            <a:ext cx="10698480" cy="1097280"/>
           </a:xfrm>
           <a:prstGeom prst="rect">
             <a:avLst/>
@@ -5315,73 +5433,17 @@
                 <a:spcPts val="0"/>
               </a:spcBef>
               <a:spcAft>
-                <a:spcPts val="700"/>
+                <a:spcPts val="500"/>
               </a:spcAft>
             </a:pPr>
             <a:r>
-              <a:rPr sz="1400" b="1" i="0" spc="100">
-                <a:solidFill>
-                  <a:srgbClr val="C2A14D"/>
-                </a:solidFill>
-                <a:latin typeface="맑은 고딕"/>
-              </a:rPr>
-              <a:t>한국형 확장 — 구현 완료·검증</a:t>
-            </a:r>
-          </a:p>
-          <a:p>
-            <a:pPr algn="l">
-              <a:spcBef>
-                <a:spcPts val="0"/>
-              </a:spcBef>
-              <a:spcAft>
-                <a:spcPts val="700"/>
-              </a:spcAft>
-            </a:pPr>
-            <a:r>
-              <a:rPr sz="1400" b="1" i="0">
-                <a:solidFill>
-                  <a:srgbClr val="C2A14D"/>
-                </a:solidFill>
-                <a:latin typeface="맑은 고딕"/>
-              </a:rPr>
-              <a:t>—  </a:t>
-            </a:r>
-            <a:r>
-              <a:rPr sz="1400" b="0" i="0">
-                <a:solidFill>
-                  <a:srgbClr val="212733"/>
-                </a:solidFill>
-                <a:latin typeface="맑은 고딕"/>
-              </a:rPr>
-              <a:t>3-stage(node→adjacency→partitioning): num_category 6→13(한국 역할) · max_rooms 8→18</a:t>
-            </a:r>
-          </a:p>
-          <a:p>
-            <a:pPr algn="l">
-              <a:spcBef>
-                <a:spcPts val="0"/>
-              </a:spcBef>
-              <a:spcAft>
-                <a:spcPts val="700"/>
-              </a:spcAft>
-            </a:pPr>
-            <a:r>
-              <a:rPr sz="1400" b="1" i="0">
-                <a:solidFill>
-                  <a:srgbClr val="C2A14D"/>
-                </a:solidFill>
-                <a:latin typeface="맑은 고딕"/>
-              </a:rPr>
-              <a:t>—  </a:t>
-            </a:r>
-            <a:r>
-              <a:rPr sz="1400" b="0" i="0">
-                <a:solidFill>
-                  <a:srgbClr val="212733"/>
-                </a:solidFill>
-                <a:latin typeface="맑은 고딕"/>
-              </a:rPr>
-              <a:t>RPLAN 사전학습 → 한국 파인튜닝(전이학습) · 학습→샘플→도면+DXF 파이프라인 E2E 검증</a:t>
+              <a:rPr sz="1300" b="0" i="0">
+                <a:solidFill>
+                  <a:srgbClr val="8C919C"/>
+                </a:solidFill>
+                <a:latin typeface="맑은 고딕"/>
+              </a:rPr>
+              <a:t>빌린 골격은 인용 base — 논문 contribution이 아님. 우리 기여 = 한국 소버린 층 · 완전 도면 · 법규-인식 생성</a:t>
             </a:r>
           </a:p>
         </p:txBody>
@@ -5529,7 +5591,7 @@
                 </a:solidFill>
                 <a:latin typeface="맑은 고딕"/>
               </a:rPr>
-              <a:t>AI MODEL</a:t>
+              <a:t>AI MODEL · ARCHITECTURE</a:t>
             </a:r>
           </a:p>
         </p:txBody>
@@ -5571,7 +5633,7 @@
                 </a:solidFill>
                 <a:latin typeface="맑은 고딕"/>
               </a:rPr>
-              <a:t>AI 모델 ③ — neuro-symbolic 완성</a:t>
+              <a:t>AI 모델 ② — 한국형 아키텍처 변경 (DiffPlanner → 우리)</a:t>
             </a:r>
           </a:p>
         </p:txBody>
@@ -5728,6 +5790,2164 @@
                 <a:latin typeface="맑은 고딕"/>
               </a:rPr>
               <a:t>12</a:t>
+            </a:r>
+          </a:p>
+        </p:txBody>
+      </p:sp>
+      <p:sp>
+        <p:nvSpPr>
+          <p:cNvPr id="10" name="TextBox 9"/>
+          <p:cNvSpPr txBox="1"/>
+          <p:nvPr/>
+        </p:nvSpPr>
+        <p:spPr>
+          <a:xfrm>
+            <a:off x="731520" y="1600200"/>
+            <a:ext cx="10698480" cy="365760"/>
+          </a:xfrm>
+          <a:prstGeom prst="rect">
+            <a:avLst/>
+          </a:prstGeom>
+          <a:noFill/>
+        </p:spPr>
+        <p:txBody>
+          <a:bodyPr wrap="square" anchor="t">
+            <a:spAutoFit/>
+          </a:bodyPr>
+          <a:lstStyle/>
+          <a:p>
+            <a:pPr algn="l">
+              <a:spcBef>
+                <a:spcPts val="0"/>
+              </a:spcBef>
+              <a:spcAft>
+                <a:spcPts val="500"/>
+              </a:spcAft>
+            </a:pPr>
+            <a:r>
+              <a:rPr sz="1600" b="1" i="0">
+                <a:solidFill>
+                  <a:srgbClr val="212733"/>
+                </a:solidFill>
+                <a:latin typeface="맑은 고딕"/>
+              </a:rPr>
+              <a:t>3-stage(node→adjacency→partitioning) 골격 유지 · 영향 레이어만 한국 규격으로 확장</a:t>
+            </a:r>
+          </a:p>
+        </p:txBody>
+      </p:sp>
+      <p:graphicFrame>
+        <p:nvGraphicFramePr>
+          <p:cNvPr id="11" name="Table 10"/>
+          <p:cNvGraphicFramePr>
+            <a:graphicFrameLocks noGrp="1"/>
+          </p:cNvGraphicFramePr>
+          <p:nvPr/>
+        </p:nvGraphicFramePr>
+        <p:xfrm>
+          <a:off x="731520" y="2240280"/>
+          <a:ext cx="10698480" cy="2103120"/>
+        </p:xfrm>
+        <a:graphic>
+          <a:graphicData uri="http://schemas.openxmlformats.org/drawingml/2006/table">
+            <a:tbl>
+              <a:tblPr>
+                <a:tableStyleId>{5C22544A-7EE6-4342-B048-85BDC9FD1C3A}</a:tableStyleId>
+              </a:tblPr>
+              <a:tblGrid>
+                <a:gridCol w="2103120"/>
+                <a:gridCol w="1828800"/>
+                <a:gridCol w="1737360"/>
+                <a:gridCol w="5029200"/>
+              </a:tblGrid>
+              <a:tr h="420624">
+                <a:tc>
+                  <a:txBody>
+                    <a:bodyPr/>
+                    <a:lstStyle/>
+                    <a:p>
+                      <a:pPr algn="l"/>
+                      <a:r>
+                        <a:rPr sz="1150" b="1" i="0">
+                          <a:solidFill>
+                            <a:srgbClr val="E6D6A6"/>
+                          </a:solidFill>
+                          <a:latin typeface="맑은 고딕"/>
+                        </a:rPr>
+                        <a:t>항목</a:t>
+                      </a:r>
+                    </a:p>
+                  </a:txBody>
+                  <a:tcPr marT="38100" marB="38100" marL="114300" marR="114300" anchor="ctr">
+                    <a:solidFill>
+                      <a:srgbClr val="10141C"/>
+                    </a:solidFill>
+                  </a:tcPr>
+                </a:tc>
+                <a:tc>
+                  <a:txBody>
+                    <a:bodyPr/>
+                    <a:lstStyle/>
+                    <a:p>
+                      <a:pPr algn="ctr"/>
+                      <a:r>
+                        <a:rPr sz="1150" b="1" i="0">
+                          <a:solidFill>
+                            <a:srgbClr val="E6D6A6"/>
+                          </a:solidFill>
+                          <a:latin typeface="맑은 고딕"/>
+                        </a:rPr>
+                        <a:t>DiffPlanner</a:t>
+                      </a:r>
+                    </a:p>
+                  </a:txBody>
+                  <a:tcPr marT="38100" marB="38100" marL="114300" marR="114300" anchor="ctr">
+                    <a:solidFill>
+                      <a:srgbClr val="10141C"/>
+                    </a:solidFill>
+                  </a:tcPr>
+                </a:tc>
+                <a:tc>
+                  <a:txBody>
+                    <a:bodyPr/>
+                    <a:lstStyle/>
+                    <a:p>
+                      <a:pPr algn="ctr"/>
+                      <a:r>
+                        <a:rPr sz="1150" b="1" i="0">
+                          <a:solidFill>
+                            <a:srgbClr val="E6D6A6"/>
+                          </a:solidFill>
+                          <a:latin typeface="맑은 고딕"/>
+                        </a:rPr>
+                        <a:t>우리</a:t>
+                      </a:r>
+                    </a:p>
+                  </a:txBody>
+                  <a:tcPr marT="38100" marB="38100" marL="114300" marR="114300" anchor="ctr">
+                    <a:solidFill>
+                      <a:srgbClr val="10141C"/>
+                    </a:solidFill>
+                  </a:tcPr>
+                </a:tc>
+                <a:tc>
+                  <a:txBody>
+                    <a:bodyPr/>
+                    <a:lstStyle/>
+                    <a:p>
+                      <a:pPr algn="ctr"/>
+                      <a:r>
+                        <a:rPr sz="1150" b="1" i="0">
+                          <a:solidFill>
+                            <a:srgbClr val="E6D6A6"/>
+                          </a:solidFill>
+                          <a:latin typeface="맑은 고딕"/>
+                        </a:rPr>
+                        <a:t>이유</a:t>
+                      </a:r>
+                    </a:p>
+                  </a:txBody>
+                  <a:tcPr marT="38100" marB="38100" marL="114300" marR="114300" anchor="ctr">
+                    <a:solidFill>
+                      <a:srgbClr val="10141C"/>
+                    </a:solidFill>
+                  </a:tcPr>
+                </a:tc>
+              </a:tr>
+              <a:tr h="420624">
+                <a:tc>
+                  <a:txBody>
+                    <a:bodyPr/>
+                    <a:lstStyle/>
+                    <a:p>
+                      <a:pPr algn="l"/>
+                      <a:r>
+                        <a:rPr sz="1150" b="1" i="0">
+                          <a:solidFill>
+                            <a:srgbClr val="212733"/>
+                          </a:solidFill>
+                          <a:latin typeface="맑은 고딕"/>
+                        </a:rPr>
+                        <a:t>역할 카테고리</a:t>
+                      </a:r>
+                    </a:p>
+                  </a:txBody>
+                  <a:tcPr marT="38100" marB="38100" marL="114300" marR="114300" anchor="ctr">
+                    <a:solidFill>
+                      <a:srgbClr val="FFFFFF"/>
+                    </a:solidFill>
+                  </a:tcPr>
+                </a:tc>
+                <a:tc>
+                  <a:txBody>
+                    <a:bodyPr/>
+                    <a:lstStyle/>
+                    <a:p>
+                      <a:pPr algn="ctr"/>
+                      <a:r>
+                        <a:rPr sz="1150" b="0" i="0">
+                          <a:solidFill>
+                            <a:srgbClr val="212733"/>
+                          </a:solidFill>
+                          <a:latin typeface="맑은 고딕"/>
+                        </a:rPr>
+                        <a:t>6</a:t>
+                      </a:r>
+                    </a:p>
+                  </a:txBody>
+                  <a:tcPr marT="38100" marB="38100" marL="114300" marR="114300" anchor="ctr">
+                    <a:solidFill>
+                      <a:srgbClr val="FFFFFF"/>
+                    </a:solidFill>
+                  </a:tcPr>
+                </a:tc>
+                <a:tc>
+                  <a:txBody>
+                    <a:bodyPr/>
+                    <a:lstStyle/>
+                    <a:p>
+                      <a:pPr algn="ctr"/>
+                      <a:r>
+                        <a:rPr sz="1150" b="0" i="0">
+                          <a:solidFill>
+                            <a:srgbClr val="212733"/>
+                          </a:solidFill>
+                          <a:latin typeface="맑은 고딕"/>
+                        </a:rPr>
+                        <a:t>13</a:t>
+                      </a:r>
+                    </a:p>
+                  </a:txBody>
+                  <a:tcPr marT="38100" marB="38100" marL="114300" marR="114300" anchor="ctr">
+                    <a:solidFill>
+                      <a:srgbClr val="FFFFFF"/>
+                    </a:solidFill>
+                  </a:tcPr>
+                </a:tc>
+                <a:tc>
+                  <a:txBody>
+                    <a:bodyPr/>
+                    <a:lstStyle/>
+                    <a:p>
+                      <a:pPr algn="ctr"/>
+                      <a:r>
+                        <a:rPr sz="1150" b="0" i="0">
+                          <a:solidFill>
+                            <a:srgbClr val="212733"/>
+                          </a:solidFill>
+                          <a:latin typeface="맑은 고딕"/>
+                        </a:rPr>
+                        <a:t>한국 13역할(거실·침실·주방·욕실·발코니·드레스룸·복도·전실·실외기실 등)</a:t>
+                      </a:r>
+                    </a:p>
+                  </a:txBody>
+                  <a:tcPr marT="38100" marB="38100" marL="114300" marR="114300" anchor="ctr">
+                    <a:solidFill>
+                      <a:srgbClr val="FFFFFF"/>
+                    </a:solidFill>
+                  </a:tcPr>
+                </a:tc>
+              </a:tr>
+              <a:tr h="420624">
+                <a:tc>
+                  <a:txBody>
+                    <a:bodyPr/>
+                    <a:lstStyle/>
+                    <a:p>
+                      <a:pPr algn="l"/>
+                      <a:r>
+                        <a:rPr sz="1150" b="1" i="0">
+                          <a:solidFill>
+                            <a:srgbClr val="212733"/>
+                          </a:solidFill>
+                          <a:latin typeface="맑은 고딕"/>
+                        </a:rPr>
+                        <a:t>최대 방 수</a:t>
+                      </a:r>
+                    </a:p>
+                  </a:txBody>
+                  <a:tcPr marT="38100" marB="38100" marL="114300" marR="114300" anchor="ctr">
+                    <a:solidFill>
+                      <a:srgbClr val="FBFAF6"/>
+                    </a:solidFill>
+                  </a:tcPr>
+                </a:tc>
+                <a:tc>
+                  <a:txBody>
+                    <a:bodyPr/>
+                    <a:lstStyle/>
+                    <a:p>
+                      <a:pPr algn="ctr"/>
+                      <a:r>
+                        <a:rPr sz="1150" b="0" i="0">
+                          <a:solidFill>
+                            <a:srgbClr val="212733"/>
+                          </a:solidFill>
+                          <a:latin typeface="맑은 고딕"/>
+                        </a:rPr>
+                        <a:t>8</a:t>
+                      </a:r>
+                    </a:p>
+                  </a:txBody>
+                  <a:tcPr marT="38100" marB="38100" marL="114300" marR="114300" anchor="ctr">
+                    <a:solidFill>
+                      <a:srgbClr val="FBFAF6"/>
+                    </a:solidFill>
+                  </a:tcPr>
+                </a:tc>
+                <a:tc>
+                  <a:txBody>
+                    <a:bodyPr/>
+                    <a:lstStyle/>
+                    <a:p>
+                      <a:pPr algn="ctr"/>
+                      <a:r>
+                        <a:rPr sz="1150" b="0" i="0">
+                          <a:solidFill>
+                            <a:srgbClr val="212733"/>
+                          </a:solidFill>
+                          <a:latin typeface="맑은 고딕"/>
+                        </a:rPr>
+                        <a:t>18</a:t>
+                      </a:r>
+                    </a:p>
+                  </a:txBody>
+                  <a:tcPr marT="38100" marB="38100" marL="114300" marR="114300" anchor="ctr">
+                    <a:solidFill>
+                      <a:srgbClr val="FBFAF6"/>
+                    </a:solidFill>
+                  </a:tcPr>
+                </a:tc>
+                <a:tc>
+                  <a:txBody>
+                    <a:bodyPr/>
+                    <a:lstStyle/>
+                    <a:p>
+                      <a:pPr algn="ctr"/>
+                      <a:r>
+                        <a:rPr sz="1150" b="0" i="0">
+                          <a:solidFill>
+                            <a:srgbClr val="212733"/>
+                          </a:solidFill>
+                          <a:latin typeface="맑은 고딕"/>
+                        </a:rPr>
+                        <a:t>RPLAN 8 한도는 한국 부적합 (온전 p95 = 17)</a:t>
+                      </a:r>
+                    </a:p>
+                  </a:txBody>
+                  <a:tcPr marT="38100" marB="38100" marL="114300" marR="114300" anchor="ctr">
+                    <a:solidFill>
+                      <a:srgbClr val="FBFAF6"/>
+                    </a:solidFill>
+                  </a:tcPr>
+                </a:tc>
+              </a:tr>
+              <a:tr h="420624">
+                <a:tc>
+                  <a:txBody>
+                    <a:bodyPr/>
+                    <a:lstStyle/>
+                    <a:p>
+                      <a:pPr algn="l"/>
+                      <a:r>
+                        <a:rPr sz="1150" b="1" i="0">
+                          <a:solidFill>
+                            <a:srgbClr val="212733"/>
+                          </a:solidFill>
+                          <a:latin typeface="맑은 고딕"/>
+                        </a:rPr>
+                        <a:t>인접 생성 타깃</a:t>
+                      </a:r>
+                    </a:p>
+                  </a:txBody>
+                  <a:tcPr marT="38100" marB="38100" marL="114300" marR="114300" anchor="ctr">
+                    <a:solidFill>
+                      <a:srgbClr val="FFFFFF"/>
+                    </a:solidFill>
+                  </a:tcPr>
+                </a:tc>
+                <a:tc>
+                  <a:txBody>
+                    <a:bodyPr/>
+                    <a:lstStyle/>
+                    <a:p>
+                      <a:pPr algn="ctr"/>
+                      <a:r>
+                        <a:rPr sz="1150" b="0" i="0">
+                          <a:solidFill>
+                            <a:srgbClr val="212733"/>
+                          </a:solidFill>
+                          <a:latin typeface="맑은 고딕"/>
+                        </a:rPr>
+                        <a:t>8×8</a:t>
+                      </a:r>
+                    </a:p>
+                  </a:txBody>
+                  <a:tcPr marT="38100" marB="38100" marL="114300" marR="114300" anchor="ctr">
+                    <a:solidFill>
+                      <a:srgbClr val="FFFFFF"/>
+                    </a:solidFill>
+                  </a:tcPr>
+                </a:tc>
+                <a:tc>
+                  <a:txBody>
+                    <a:bodyPr/>
+                    <a:lstStyle/>
+                    <a:p>
+                      <a:pPr algn="ctr"/>
+                      <a:r>
+                        <a:rPr sz="1150" b="0" i="0">
+                          <a:solidFill>
+                            <a:srgbClr val="212733"/>
+                          </a:solidFill>
+                          <a:latin typeface="맑은 고딕"/>
+                        </a:rPr>
+                        <a:t>18×18</a:t>
+                      </a:r>
+                    </a:p>
+                  </a:txBody>
+                  <a:tcPr marT="38100" marB="38100" marL="114300" marR="114300" anchor="ctr">
+                    <a:solidFill>
+                      <a:srgbClr val="FFFFFF"/>
+                    </a:solidFill>
+                  </a:tcPr>
+                </a:tc>
+                <a:tc>
+                  <a:txBody>
+                    <a:bodyPr/>
+                    <a:lstStyle/>
+                    <a:p>
+                      <a:pPr algn="ctr"/>
+                      <a:r>
+                        <a:rPr sz="1150" b="0" i="0">
+                          <a:solidFill>
+                            <a:srgbClr val="212733"/>
+                          </a:solidFill>
+                          <a:latin typeface="맑은 고딕"/>
+                        </a:rPr>
+                        <a:t>방 수 확장과 연동 (in/out 채널)</a:t>
+                      </a:r>
+                    </a:p>
+                  </a:txBody>
+                  <a:tcPr marT="38100" marB="38100" marL="114300" marR="114300" anchor="ctr">
+                    <a:solidFill>
+                      <a:srgbClr val="FFFFFF"/>
+                    </a:solidFill>
+                  </a:tcPr>
+                </a:tc>
+              </a:tr>
+              <a:tr h="420624">
+                <a:tc>
+                  <a:txBody>
+                    <a:bodyPr/>
+                    <a:lstStyle/>
+                    <a:p>
+                      <a:pPr algn="l"/>
+                      <a:r>
+                        <a:rPr sz="1150" b="1" i="0">
+                          <a:solidFill>
+                            <a:srgbClr val="212733"/>
+                          </a:solidFill>
+                          <a:latin typeface="맑은 고딕"/>
+                        </a:rPr>
+                        <a:t>조건 임베딩</a:t>
+                      </a:r>
+                    </a:p>
+                  </a:txBody>
+                  <a:tcPr marT="38100" marB="38100" marL="114300" marR="114300" anchor="ctr">
+                    <a:solidFill>
+                      <a:srgbClr val="FBFAF6"/>
+                    </a:solidFill>
+                  </a:tcPr>
+                </a:tc>
+                <a:tc>
+                  <a:txBody>
+                    <a:bodyPr/>
+                    <a:lstStyle/>
+                    <a:p>
+                      <a:pPr algn="ctr"/>
+                      <a:r>
+                        <a:rPr sz="1150" b="0" i="0">
+                          <a:solidFill>
+                            <a:srgbClr val="212733"/>
+                          </a:solidFill>
+                          <a:latin typeface="맑은 고딕"/>
+                        </a:rPr>
+                        <a:t>Linear(6),(8)</a:t>
+                      </a:r>
+                    </a:p>
+                  </a:txBody>
+                  <a:tcPr marT="38100" marB="38100" marL="114300" marR="114300" anchor="ctr">
+                    <a:solidFill>
+                      <a:srgbClr val="FBFAF6"/>
+                    </a:solidFill>
+                  </a:tcPr>
+                </a:tc>
+                <a:tc>
+                  <a:txBody>
+                    <a:bodyPr/>
+                    <a:lstStyle/>
+                    <a:p>
+                      <a:pPr algn="ctr"/>
+                      <a:r>
+                        <a:rPr sz="1150" b="0" i="0">
+                          <a:solidFill>
+                            <a:srgbClr val="212733"/>
+                          </a:solidFill>
+                          <a:latin typeface="맑은 고딕"/>
+                        </a:rPr>
+                        <a:t>Linear(13),(18)</a:t>
+                      </a:r>
+                    </a:p>
+                  </a:txBody>
+                  <a:tcPr marT="38100" marB="38100" marL="114300" marR="114300" anchor="ctr">
+                    <a:solidFill>
+                      <a:srgbClr val="FBFAF6"/>
+                    </a:solidFill>
+                  </a:tcPr>
+                </a:tc>
+                <a:tc>
+                  <a:txBody>
+                    <a:bodyPr/>
+                    <a:lstStyle/>
+                    <a:p>
+                      <a:pPr algn="ctr"/>
+                      <a:r>
+                        <a:rPr sz="1150" b="0" i="0">
+                          <a:solidFill>
+                            <a:srgbClr val="212733"/>
+                          </a:solidFill>
+                          <a:latin typeface="맑은 고딕"/>
+                        </a:rPr>
+                        <a:t>category · number 차원</a:t>
+                      </a:r>
+                    </a:p>
+                  </a:txBody>
+                  <a:tcPr marT="38100" marB="38100" marL="114300" marR="114300" anchor="ctr">
+                    <a:solidFill>
+                      <a:srgbClr val="FBFAF6"/>
+                    </a:solidFill>
+                  </a:tcPr>
+                </a:tc>
+              </a:tr>
+            </a:tbl>
+          </a:graphicData>
+        </a:graphic>
+      </p:graphicFrame>
+      <p:sp>
+        <p:nvSpPr>
+          <p:cNvPr id="12" name="TextBox 11"/>
+          <p:cNvSpPr txBox="1"/>
+          <p:nvPr/>
+        </p:nvSpPr>
+        <p:spPr>
+          <a:xfrm>
+            <a:off x="731520" y="5029200"/>
+            <a:ext cx="10698480" cy="914400"/>
+          </a:xfrm>
+          <a:prstGeom prst="rect">
+            <a:avLst/>
+          </a:prstGeom>
+          <a:noFill/>
+        </p:spPr>
+        <p:txBody>
+          <a:bodyPr wrap="square" anchor="t">
+            <a:spAutoFit/>
+          </a:bodyPr>
+          <a:lstStyle/>
+          <a:p>
+            <a:pPr algn="l">
+              <a:spcBef>
+                <a:spcPts val="0"/>
+              </a:spcBef>
+              <a:spcAft>
+                <a:spcPts val="500"/>
+              </a:spcAft>
+            </a:pPr>
+            <a:r>
+              <a:rPr sz="1250" b="0" i="0">
+                <a:solidFill>
+                  <a:srgbClr val="8C919C"/>
+                </a:solidFill>
+                <a:latin typeface="맑은 고딕"/>
+              </a:rPr>
+              <a:t>카테고리 스칼라 인코드 (cat+1)/3−1 → /(13/2)−1 · 디코드 ×6 → ×13 동기화 · 3 stage 모델 차원 검증 완료</a:t>
+            </a:r>
+          </a:p>
+        </p:txBody>
+      </p:sp>
+    </p:spTree>
+  </p:cSld>
+  <p:clrMapOvr>
+    <a:masterClrMapping/>
+  </p:clrMapOvr>
+</p:sld>
+</file>
+
+<file path=ppt/slides/slide13.xml><?xml version="1.0" encoding="utf-8"?>
+<p:sld xmlns:a="http://schemas.openxmlformats.org/drawingml/2006/main" xmlns:p="http://schemas.openxmlformats.org/presentationml/2006/main" xmlns:r="http://schemas.openxmlformats.org/officeDocument/2006/relationships">
+  <p:cSld>
+    <p:spTree>
+      <p:nvGrpSpPr>
+        <p:cNvPr id="1" name=""/>
+        <p:cNvGrpSpPr/>
+        <p:nvPr/>
+      </p:nvGrpSpPr>
+      <p:grpSpPr/>
+      <p:sp>
+        <p:nvSpPr>
+          <p:cNvPr id="2" name="Rectangle 1"/>
+          <p:cNvSpPr/>
+          <p:nvPr/>
+        </p:nvSpPr>
+        <p:spPr>
+          <a:xfrm>
+            <a:off x="0" y="0"/>
+            <a:ext cx="12191695" cy="6858000"/>
+          </a:xfrm>
+          <a:prstGeom prst="rect">
+            <a:avLst/>
+          </a:prstGeom>
+          <a:solidFill>
+            <a:srgbClr val="FBFAF6"/>
+          </a:solidFill>
+          <a:ln>
+            <a:noFill/>
+          </a:ln>
+          <a:effectLst/>
+        </p:spPr>
+        <p:style>
+          <a:lnRef idx="1">
+            <a:schemeClr val="accent1"/>
+          </a:lnRef>
+          <a:fillRef idx="3">
+            <a:schemeClr val="accent1"/>
+          </a:fillRef>
+          <a:effectRef idx="2">
+            <a:schemeClr val="accent1"/>
+          </a:effectRef>
+          <a:fontRef idx="minor">
+            <a:schemeClr val="lt1"/>
+          </a:fontRef>
+        </p:style>
+        <p:txBody>
+          <a:bodyPr rtlCol="0" anchor="ctr"/>
+          <a:lstStyle/>
+          <a:p>
+            <a:pPr algn="ctr"/>
+          </a:p>
+        </p:txBody>
+      </p:sp>
+      <p:sp>
+        <p:nvSpPr>
+          <p:cNvPr id="3" name="Rectangle 2"/>
+          <p:cNvSpPr/>
+          <p:nvPr/>
+        </p:nvSpPr>
+        <p:spPr>
+          <a:xfrm>
+            <a:off x="548640" y="566928"/>
+            <a:ext cx="41148" cy="566928"/>
+          </a:xfrm>
+          <a:prstGeom prst="rect">
+            <a:avLst/>
+          </a:prstGeom>
+          <a:solidFill>
+            <a:srgbClr val="C2A14D"/>
+          </a:solidFill>
+          <a:ln>
+            <a:noFill/>
+          </a:ln>
+          <a:effectLst/>
+        </p:spPr>
+        <p:style>
+          <a:lnRef idx="1">
+            <a:schemeClr val="accent1"/>
+          </a:lnRef>
+          <a:fillRef idx="3">
+            <a:schemeClr val="accent1"/>
+          </a:fillRef>
+          <a:effectRef idx="2">
+            <a:schemeClr val="accent1"/>
+          </a:effectRef>
+          <a:fontRef idx="minor">
+            <a:schemeClr val="lt1"/>
+          </a:fontRef>
+        </p:style>
+        <p:txBody>
+          <a:bodyPr rtlCol="0" anchor="ctr"/>
+          <a:lstStyle/>
+          <a:p>
+            <a:pPr algn="ctr"/>
+          </a:p>
+        </p:txBody>
+      </p:sp>
+      <p:sp>
+        <p:nvSpPr>
+          <p:cNvPr id="4" name="TextBox 3"/>
+          <p:cNvSpPr txBox="1"/>
+          <p:nvPr/>
+        </p:nvSpPr>
+        <p:spPr>
+          <a:xfrm>
+            <a:off x="749808" y="502920"/>
+            <a:ext cx="10058400" cy="274320"/>
+          </a:xfrm>
+          <a:prstGeom prst="rect">
+            <a:avLst/>
+          </a:prstGeom>
+          <a:noFill/>
+        </p:spPr>
+        <p:txBody>
+          <a:bodyPr wrap="square" anchor="t">
+            <a:spAutoFit/>
+          </a:bodyPr>
+          <a:lstStyle/>
+          <a:p>
+            <a:pPr algn="l">
+              <a:spcBef>
+                <a:spcPts val="0"/>
+              </a:spcBef>
+              <a:spcAft>
+                <a:spcPts val="500"/>
+              </a:spcAft>
+            </a:pPr>
+            <a:r>
+              <a:rPr sz="1100" b="1" i="0" spc="220">
+                <a:solidFill>
+                  <a:srgbClr val="C2A14D"/>
+                </a:solidFill>
+                <a:latin typeface="맑은 고딕"/>
+              </a:rPr>
+              <a:t>TRAINING</a:t>
+            </a:r>
+          </a:p>
+        </p:txBody>
+      </p:sp>
+      <p:sp>
+        <p:nvSpPr>
+          <p:cNvPr id="5" name="TextBox 4"/>
+          <p:cNvSpPr txBox="1"/>
+          <p:nvPr/>
+        </p:nvSpPr>
+        <p:spPr>
+          <a:xfrm>
+            <a:off x="731520" y="713232"/>
+            <a:ext cx="10607040" cy="548640"/>
+          </a:xfrm>
+          <a:prstGeom prst="rect">
+            <a:avLst/>
+          </a:prstGeom>
+          <a:noFill/>
+        </p:spPr>
+        <p:txBody>
+          <a:bodyPr wrap="square" anchor="t">
+            <a:spAutoFit/>
+          </a:bodyPr>
+          <a:lstStyle/>
+          <a:p>
+            <a:pPr algn="l">
+              <a:spcBef>
+                <a:spcPts val="0"/>
+              </a:spcBef>
+              <a:spcAft>
+                <a:spcPts val="500"/>
+              </a:spcAft>
+            </a:pPr>
+            <a:r>
+              <a:rPr sz="2400" b="1" i="0">
+                <a:solidFill>
+                  <a:srgbClr val="212733"/>
+                </a:solidFill>
+                <a:latin typeface="맑은 고딕"/>
+              </a:rPr>
+              <a:t>학습 방법 — 사전학습 → 파인튜닝 (전이학습)</a:t>
+            </a:r>
+          </a:p>
+        </p:txBody>
+      </p:sp>
+      <p:cxnSp>
+        <p:nvCxnSpPr>
+          <p:cNvPr id="6" name="Connector 5"/>
+          <p:cNvCxnSpPr/>
+          <p:nvPr/>
+        </p:nvCxnSpPr>
+        <p:spPr>
+          <a:xfrm>
+            <a:off x="548640" y="1389888"/>
+            <a:ext cx="11091672" cy="0"/>
+          </a:xfrm>
+          <a:prstGeom prst="bentConnector3">
+            <a:avLst/>
+          </a:prstGeom>
+          <a:ln w="12700">
+            <a:solidFill>
+              <a:srgbClr val="E7E3D8"/>
+            </a:solidFill>
+          </a:ln>
+          <a:effectLst/>
+        </p:spPr>
+        <p:style>
+          <a:lnRef idx="2">
+            <a:schemeClr val="accent1"/>
+          </a:lnRef>
+          <a:fillRef idx="0">
+            <a:schemeClr val="accent1"/>
+          </a:fillRef>
+          <a:effectRef idx="1">
+            <a:schemeClr val="accent1"/>
+          </a:effectRef>
+          <a:fontRef idx="minor">
+            <a:schemeClr val="tx1"/>
+          </a:fontRef>
+        </p:style>
+      </p:cxnSp>
+      <p:cxnSp>
+        <p:nvCxnSpPr>
+          <p:cNvPr id="7" name="Connector 6"/>
+          <p:cNvCxnSpPr/>
+          <p:nvPr/>
+        </p:nvCxnSpPr>
+        <p:spPr>
+          <a:xfrm>
+            <a:off x="548640" y="6400800"/>
+            <a:ext cx="11091672" cy="0"/>
+          </a:xfrm>
+          <a:prstGeom prst="bentConnector3">
+            <a:avLst/>
+          </a:prstGeom>
+          <a:ln w="9525">
+            <a:solidFill>
+              <a:srgbClr val="E7E3D8"/>
+            </a:solidFill>
+          </a:ln>
+          <a:effectLst/>
+        </p:spPr>
+        <p:style>
+          <a:lnRef idx="2">
+            <a:schemeClr val="accent1"/>
+          </a:lnRef>
+          <a:fillRef idx="0">
+            <a:schemeClr val="accent1"/>
+          </a:fillRef>
+          <a:effectRef idx="1">
+            <a:schemeClr val="accent1"/>
+          </a:effectRef>
+          <a:fontRef idx="minor">
+            <a:schemeClr val="tx1"/>
+          </a:fontRef>
+        </p:style>
+      </p:cxnSp>
+      <p:sp>
+        <p:nvSpPr>
+          <p:cNvPr id="8" name="TextBox 7"/>
+          <p:cNvSpPr txBox="1"/>
+          <p:nvPr/>
+        </p:nvSpPr>
+        <p:spPr>
+          <a:xfrm>
+            <a:off x="548640" y="6446520"/>
+            <a:ext cx="8229600" cy="274320"/>
+          </a:xfrm>
+          <a:prstGeom prst="rect">
+            <a:avLst/>
+          </a:prstGeom>
+          <a:noFill/>
+        </p:spPr>
+        <p:txBody>
+          <a:bodyPr wrap="square" anchor="t">
+            <a:spAutoFit/>
+          </a:bodyPr>
+          <a:lstStyle/>
+          <a:p>
+            <a:pPr algn="l">
+              <a:spcBef>
+                <a:spcPts val="0"/>
+              </a:spcBef>
+              <a:spcAft>
+                <a:spcPts val="500"/>
+              </a:spcAft>
+            </a:pPr>
+            <a:r>
+              <a:rPr sz="850" b="0" i="0" spc="60">
+                <a:solidFill>
+                  <a:srgbClr val="8C919C"/>
+                </a:solidFill>
+                <a:latin typeface="맑은 고딕"/>
+              </a:rPr>
+              <a:t>plan2graph · 한국형 소버린 평면도 생성 AI</a:t>
+            </a:r>
+          </a:p>
+        </p:txBody>
+      </p:sp>
+      <p:sp>
+        <p:nvSpPr>
+          <p:cNvPr id="9" name="TextBox 8"/>
+          <p:cNvSpPr txBox="1"/>
+          <p:nvPr/>
+        </p:nvSpPr>
+        <p:spPr>
+          <a:xfrm>
+            <a:off x="10607040" y="6446520"/>
+            <a:ext cx="1033271" cy="274320"/>
+          </a:xfrm>
+          <a:prstGeom prst="rect">
+            <a:avLst/>
+          </a:prstGeom>
+          <a:noFill/>
+        </p:spPr>
+        <p:txBody>
+          <a:bodyPr wrap="square" anchor="t">
+            <a:spAutoFit/>
+          </a:bodyPr>
+          <a:lstStyle/>
+          <a:p>
+            <a:pPr algn="r">
+              <a:spcBef>
+                <a:spcPts val="0"/>
+              </a:spcBef>
+              <a:spcAft>
+                <a:spcPts val="500"/>
+              </a:spcAft>
+            </a:pPr>
+            <a:r>
+              <a:rPr sz="850" b="1" i="0">
+                <a:solidFill>
+                  <a:srgbClr val="C2A14D"/>
+                </a:solidFill>
+                <a:latin typeface="맑은 고딕"/>
+              </a:rPr>
+              <a:t>13</a:t>
+            </a:r>
+          </a:p>
+        </p:txBody>
+      </p:sp>
+      <p:sp>
+        <p:nvSpPr>
+          <p:cNvPr id="10" name="Rounded Rectangle 9"/>
+          <p:cNvSpPr/>
+          <p:nvPr/>
+        </p:nvSpPr>
+        <p:spPr>
+          <a:xfrm>
+            <a:off x="868680" y="1737360"/>
+            <a:ext cx="1993392" cy="841248"/>
+          </a:xfrm>
+          <a:prstGeom prst="roundRect">
+            <a:avLst/>
+          </a:prstGeom>
+          <a:solidFill>
+            <a:srgbClr val="FFFFFF"/>
+          </a:solidFill>
+          <a:ln w="12700">
+            <a:solidFill>
+              <a:srgbClr val="E7E3D8"/>
+            </a:solidFill>
+          </a:ln>
+          <a:effectLst/>
+          <a:effectLst>
+            <a:outerShdw blurRad="90000" dist="38000" dir="5400000" rotWithShape="0">
+              <a:srgbClr val="0B0E14">
+                <a:alpha val="22000"/>
+              </a:srgbClr>
+            </a:outerShdw>
+          </a:effectLst>
+        </p:spPr>
+        <p:style>
+          <a:lnRef idx="1">
+            <a:schemeClr val="accent1"/>
+          </a:lnRef>
+          <a:fillRef idx="3">
+            <a:schemeClr val="accent1"/>
+          </a:fillRef>
+          <a:effectRef idx="2">
+            <a:schemeClr val="accent1"/>
+          </a:effectRef>
+          <a:fontRef idx="minor">
+            <a:schemeClr val="lt1"/>
+          </a:fontRef>
+        </p:style>
+        <p:txBody>
+          <a:bodyPr rtlCol="0" anchor="ctr" wrap="square"/>
+          <a:lstStyle/>
+          <a:p>
+            <a:pPr algn="ctr"/>
+            <a:r>
+              <a:rPr sz="1100" b="1" i="0">
+                <a:solidFill>
+                  <a:srgbClr val="212733"/>
+                </a:solidFill>
+                <a:latin typeface="맑은 고딕"/>
+              </a:rPr>
+              <a:t>통일그래프</a:t>
+            </a:r>
+          </a:p>
+          <a:p>
+            <a:pPr algn="ctr"/>
+            <a:r>
+              <a:rPr sz="1100" b="0" i="0">
+                <a:solidFill>
+                  <a:srgbClr val="8C919C"/>
+                </a:solidFill>
+                <a:latin typeface="맑은 고딕"/>
+              </a:rPr>
+              <a:t>g-0.3</a:t>
+            </a:r>
+          </a:p>
+        </p:txBody>
+      </p:sp>
+      <p:sp>
+        <p:nvSpPr>
+          <p:cNvPr id="11" name="Rectangle 10"/>
+          <p:cNvSpPr/>
+          <p:nvPr/>
+        </p:nvSpPr>
+        <p:spPr>
+          <a:xfrm>
+            <a:off x="868680" y="1737360"/>
+            <a:ext cx="1993392" cy="45720"/>
+          </a:xfrm>
+          <a:prstGeom prst="rect">
+            <a:avLst/>
+          </a:prstGeom>
+          <a:solidFill>
+            <a:srgbClr val="C2A14D"/>
+          </a:solidFill>
+          <a:ln>
+            <a:noFill/>
+          </a:ln>
+          <a:effectLst/>
+        </p:spPr>
+        <p:style>
+          <a:lnRef idx="1">
+            <a:schemeClr val="accent1"/>
+          </a:lnRef>
+          <a:fillRef idx="3">
+            <a:schemeClr val="accent1"/>
+          </a:fillRef>
+          <a:effectRef idx="2">
+            <a:schemeClr val="accent1"/>
+          </a:effectRef>
+          <a:fontRef idx="minor">
+            <a:schemeClr val="lt1"/>
+          </a:fontRef>
+        </p:style>
+        <p:txBody>
+          <a:bodyPr rtlCol="0" anchor="ctr"/>
+          <a:lstStyle/>
+          <a:p>
+            <a:pPr algn="ctr"/>
+          </a:p>
+        </p:txBody>
+      </p:sp>
+      <p:sp>
+        <p:nvSpPr>
+          <p:cNvPr id="12" name="TextBox 11"/>
+          <p:cNvSpPr txBox="1"/>
+          <p:nvPr/>
+        </p:nvSpPr>
+        <p:spPr>
+          <a:xfrm>
+            <a:off x="2862072" y="1737360"/>
+            <a:ext cx="274320" cy="841248"/>
+          </a:xfrm>
+          <a:prstGeom prst="rect">
+            <a:avLst/>
+          </a:prstGeom>
+          <a:noFill/>
+        </p:spPr>
+        <p:txBody>
+          <a:bodyPr wrap="none" anchor="ctr">
+            <a:spAutoFit/>
+          </a:bodyPr>
+          <a:lstStyle/>
+          <a:p>
+            <a:pPr algn="ctr"/>
+            <a:r>
+              <a:rPr sz="2000" b="1" i="0">
+                <a:solidFill>
+                  <a:srgbClr val="C2A14D"/>
+                </a:solidFill>
+                <a:latin typeface="맑은 고딕"/>
+              </a:rPr>
+              <a:t>›</a:t>
+            </a:r>
+          </a:p>
+        </p:txBody>
+      </p:sp>
+      <p:sp>
+        <p:nvSpPr>
+          <p:cNvPr id="13" name="Rounded Rectangle 12"/>
+          <p:cNvSpPr/>
+          <p:nvPr/>
+        </p:nvSpPr>
+        <p:spPr>
+          <a:xfrm>
+            <a:off x="3136392" y="1737360"/>
+            <a:ext cx="1993392" cy="841248"/>
+          </a:xfrm>
+          <a:prstGeom prst="roundRect">
+            <a:avLst/>
+          </a:prstGeom>
+          <a:solidFill>
+            <a:srgbClr val="FFFFFF"/>
+          </a:solidFill>
+          <a:ln w="12700">
+            <a:solidFill>
+              <a:srgbClr val="E7E3D8"/>
+            </a:solidFill>
+          </a:ln>
+          <a:effectLst/>
+          <a:effectLst>
+            <a:outerShdw blurRad="90000" dist="38000" dir="5400000" rotWithShape="0">
+              <a:srgbClr val="0B0E14">
+                <a:alpha val="22000"/>
+              </a:srgbClr>
+            </a:outerShdw>
+          </a:effectLst>
+        </p:spPr>
+        <p:style>
+          <a:lnRef idx="1">
+            <a:schemeClr val="accent1"/>
+          </a:lnRef>
+          <a:fillRef idx="3">
+            <a:schemeClr val="accent1"/>
+          </a:fillRef>
+          <a:effectRef idx="2">
+            <a:schemeClr val="accent1"/>
+          </a:effectRef>
+          <a:fontRef idx="minor">
+            <a:schemeClr val="lt1"/>
+          </a:fontRef>
+        </p:style>
+        <p:txBody>
+          <a:bodyPr rtlCol="0" anchor="ctr" wrap="square"/>
+          <a:lstStyle/>
+          <a:p>
+            <a:pPr algn="ctr"/>
+            <a:r>
+              <a:rPr sz="1100" b="1" i="0">
+                <a:solidFill>
+                  <a:srgbClr val="212733"/>
+                </a:solidFill>
+                <a:latin typeface="맑은 고딕"/>
+              </a:rPr>
+              <a:t>엔진 변환</a:t>
+            </a:r>
+          </a:p>
+          <a:p>
+            <a:pPr algn="ctr"/>
+            <a:r>
+              <a:rPr sz="1100" b="0" i="0">
+                <a:solidFill>
+                  <a:srgbClr val="8C919C"/>
+                </a:solidFill>
+                <a:latin typeface="맑은 고딕"/>
+              </a:rPr>
+              <a:t>canvas-256</a:t>
+            </a:r>
+          </a:p>
+        </p:txBody>
+      </p:sp>
+      <p:sp>
+        <p:nvSpPr>
+          <p:cNvPr id="14" name="Rectangle 13"/>
+          <p:cNvSpPr/>
+          <p:nvPr/>
+        </p:nvSpPr>
+        <p:spPr>
+          <a:xfrm>
+            <a:off x="3136392" y="1737360"/>
+            <a:ext cx="1993392" cy="45720"/>
+          </a:xfrm>
+          <a:prstGeom prst="rect">
+            <a:avLst/>
+          </a:prstGeom>
+          <a:solidFill>
+            <a:srgbClr val="C2A14D"/>
+          </a:solidFill>
+          <a:ln>
+            <a:noFill/>
+          </a:ln>
+          <a:effectLst/>
+        </p:spPr>
+        <p:style>
+          <a:lnRef idx="1">
+            <a:schemeClr val="accent1"/>
+          </a:lnRef>
+          <a:fillRef idx="3">
+            <a:schemeClr val="accent1"/>
+          </a:fillRef>
+          <a:effectRef idx="2">
+            <a:schemeClr val="accent1"/>
+          </a:effectRef>
+          <a:fontRef idx="minor">
+            <a:schemeClr val="lt1"/>
+          </a:fontRef>
+        </p:style>
+        <p:txBody>
+          <a:bodyPr rtlCol="0" anchor="ctr"/>
+          <a:lstStyle/>
+          <a:p>
+            <a:pPr algn="ctr"/>
+          </a:p>
+        </p:txBody>
+      </p:sp>
+      <p:sp>
+        <p:nvSpPr>
+          <p:cNvPr id="15" name="TextBox 14"/>
+          <p:cNvSpPr txBox="1"/>
+          <p:nvPr/>
+        </p:nvSpPr>
+        <p:spPr>
+          <a:xfrm>
+            <a:off x="5129784" y="1737360"/>
+            <a:ext cx="274320" cy="841248"/>
+          </a:xfrm>
+          <a:prstGeom prst="rect">
+            <a:avLst/>
+          </a:prstGeom>
+          <a:noFill/>
+        </p:spPr>
+        <p:txBody>
+          <a:bodyPr wrap="none" anchor="ctr">
+            <a:spAutoFit/>
+          </a:bodyPr>
+          <a:lstStyle/>
+          <a:p>
+            <a:pPr algn="ctr"/>
+            <a:r>
+              <a:rPr sz="2000" b="1" i="0">
+                <a:solidFill>
+                  <a:srgbClr val="C2A14D"/>
+                </a:solidFill>
+                <a:latin typeface="맑은 고딕"/>
+              </a:rPr>
+              <a:t>›</a:t>
+            </a:r>
+          </a:p>
+        </p:txBody>
+      </p:sp>
+      <p:sp>
+        <p:nvSpPr>
+          <p:cNvPr id="16" name="Rounded Rectangle 15"/>
+          <p:cNvSpPr/>
+          <p:nvPr/>
+        </p:nvSpPr>
+        <p:spPr>
+          <a:xfrm>
+            <a:off x="5404104" y="1737360"/>
+            <a:ext cx="1993392" cy="841248"/>
+          </a:xfrm>
+          <a:prstGeom prst="roundRect">
+            <a:avLst/>
+          </a:prstGeom>
+          <a:solidFill>
+            <a:srgbClr val="FFFFFF"/>
+          </a:solidFill>
+          <a:ln w="12700">
+            <a:solidFill>
+              <a:srgbClr val="E7E3D8"/>
+            </a:solidFill>
+          </a:ln>
+          <a:effectLst/>
+          <a:effectLst>
+            <a:outerShdw blurRad="90000" dist="38000" dir="5400000" rotWithShape="0">
+              <a:srgbClr val="0B0E14">
+                <a:alpha val="22000"/>
+              </a:srgbClr>
+            </a:outerShdw>
+          </a:effectLst>
+        </p:spPr>
+        <p:style>
+          <a:lnRef idx="1">
+            <a:schemeClr val="accent1"/>
+          </a:lnRef>
+          <a:fillRef idx="3">
+            <a:schemeClr val="accent1"/>
+          </a:fillRef>
+          <a:effectRef idx="2">
+            <a:schemeClr val="accent1"/>
+          </a:effectRef>
+          <a:fontRef idx="minor">
+            <a:schemeClr val="lt1"/>
+          </a:fontRef>
+        </p:style>
+        <p:txBody>
+          <a:bodyPr rtlCol="0" anchor="ctr" wrap="square"/>
+          <a:lstStyle/>
+          <a:p>
+            <a:pPr algn="ctr"/>
+            <a:r>
+              <a:rPr sz="1100" b="1" i="0">
+                <a:solidFill>
+                  <a:srgbClr val="212733"/>
+                </a:solidFill>
+                <a:latin typeface="맑은 고딕"/>
+              </a:rPr>
+              <a:t>RPLAN</a:t>
+            </a:r>
+          </a:p>
+          <a:p>
+            <a:pPr algn="ctr"/>
+            <a:r>
+              <a:rPr sz="1100" b="0" i="0">
+                <a:solidFill>
+                  <a:srgbClr val="8C919C"/>
+                </a:solidFill>
+                <a:latin typeface="맑은 고딕"/>
+              </a:rPr>
+              <a:t>사전학습 150k</a:t>
+            </a:r>
+          </a:p>
+        </p:txBody>
+      </p:sp>
+      <p:sp>
+        <p:nvSpPr>
+          <p:cNvPr id="17" name="Rectangle 16"/>
+          <p:cNvSpPr/>
+          <p:nvPr/>
+        </p:nvSpPr>
+        <p:spPr>
+          <a:xfrm>
+            <a:off x="5404104" y="1737360"/>
+            <a:ext cx="1993392" cy="45720"/>
+          </a:xfrm>
+          <a:prstGeom prst="rect">
+            <a:avLst/>
+          </a:prstGeom>
+          <a:solidFill>
+            <a:srgbClr val="C2A14D"/>
+          </a:solidFill>
+          <a:ln>
+            <a:noFill/>
+          </a:ln>
+          <a:effectLst/>
+        </p:spPr>
+        <p:style>
+          <a:lnRef idx="1">
+            <a:schemeClr val="accent1"/>
+          </a:lnRef>
+          <a:fillRef idx="3">
+            <a:schemeClr val="accent1"/>
+          </a:fillRef>
+          <a:effectRef idx="2">
+            <a:schemeClr val="accent1"/>
+          </a:effectRef>
+          <a:fontRef idx="minor">
+            <a:schemeClr val="lt1"/>
+          </a:fontRef>
+        </p:style>
+        <p:txBody>
+          <a:bodyPr rtlCol="0" anchor="ctr"/>
+          <a:lstStyle/>
+          <a:p>
+            <a:pPr algn="ctr"/>
+          </a:p>
+        </p:txBody>
+      </p:sp>
+      <p:sp>
+        <p:nvSpPr>
+          <p:cNvPr id="18" name="TextBox 17"/>
+          <p:cNvSpPr txBox="1"/>
+          <p:nvPr/>
+        </p:nvSpPr>
+        <p:spPr>
+          <a:xfrm>
+            <a:off x="7397496" y="1737360"/>
+            <a:ext cx="274320" cy="841248"/>
+          </a:xfrm>
+          <a:prstGeom prst="rect">
+            <a:avLst/>
+          </a:prstGeom>
+          <a:noFill/>
+        </p:spPr>
+        <p:txBody>
+          <a:bodyPr wrap="none" anchor="ctr">
+            <a:spAutoFit/>
+          </a:bodyPr>
+          <a:lstStyle/>
+          <a:p>
+            <a:pPr algn="ctr"/>
+            <a:r>
+              <a:rPr sz="2000" b="1" i="0">
+                <a:solidFill>
+                  <a:srgbClr val="C2A14D"/>
+                </a:solidFill>
+                <a:latin typeface="맑은 고딕"/>
+              </a:rPr>
+              <a:t>›</a:t>
+            </a:r>
+          </a:p>
+        </p:txBody>
+      </p:sp>
+      <p:sp>
+        <p:nvSpPr>
+          <p:cNvPr id="19" name="Rounded Rectangle 18"/>
+          <p:cNvSpPr/>
+          <p:nvPr/>
+        </p:nvSpPr>
+        <p:spPr>
+          <a:xfrm>
+            <a:off x="7671816" y="1737360"/>
+            <a:ext cx="1993392" cy="841248"/>
+          </a:xfrm>
+          <a:prstGeom prst="roundRect">
+            <a:avLst/>
+          </a:prstGeom>
+          <a:solidFill>
+            <a:srgbClr val="FFFFFF"/>
+          </a:solidFill>
+          <a:ln w="12700">
+            <a:solidFill>
+              <a:srgbClr val="E7E3D8"/>
+            </a:solidFill>
+          </a:ln>
+          <a:effectLst/>
+          <a:effectLst>
+            <a:outerShdw blurRad="90000" dist="38000" dir="5400000" rotWithShape="0">
+              <a:srgbClr val="0B0E14">
+                <a:alpha val="22000"/>
+              </a:srgbClr>
+            </a:outerShdw>
+          </a:effectLst>
+        </p:spPr>
+        <p:style>
+          <a:lnRef idx="1">
+            <a:schemeClr val="accent1"/>
+          </a:lnRef>
+          <a:fillRef idx="3">
+            <a:schemeClr val="accent1"/>
+          </a:fillRef>
+          <a:effectRef idx="2">
+            <a:schemeClr val="accent1"/>
+          </a:effectRef>
+          <a:fontRef idx="minor">
+            <a:schemeClr val="lt1"/>
+          </a:fontRef>
+        </p:style>
+        <p:txBody>
+          <a:bodyPr rtlCol="0" anchor="ctr" wrap="square"/>
+          <a:lstStyle/>
+          <a:p>
+            <a:pPr algn="ctr"/>
+            <a:r>
+              <a:rPr sz="1100" b="1" i="0">
+                <a:solidFill>
+                  <a:srgbClr val="212733"/>
+                </a:solidFill>
+                <a:latin typeface="맑은 고딕"/>
+              </a:rPr>
+              <a:t>한국</a:t>
+            </a:r>
+          </a:p>
+          <a:p>
+            <a:pPr algn="ctr"/>
+            <a:r>
+              <a:rPr sz="1100" b="0" i="0">
+                <a:solidFill>
+                  <a:srgbClr val="8C919C"/>
+                </a:solidFill>
+                <a:latin typeface="맑은 고딕"/>
+              </a:rPr>
+              <a:t>파인튜닝 40k</a:t>
+            </a:r>
+          </a:p>
+        </p:txBody>
+      </p:sp>
+      <p:sp>
+        <p:nvSpPr>
+          <p:cNvPr id="20" name="Rectangle 19"/>
+          <p:cNvSpPr/>
+          <p:nvPr/>
+        </p:nvSpPr>
+        <p:spPr>
+          <a:xfrm>
+            <a:off x="7671816" y="1737360"/>
+            <a:ext cx="1993392" cy="45720"/>
+          </a:xfrm>
+          <a:prstGeom prst="rect">
+            <a:avLst/>
+          </a:prstGeom>
+          <a:solidFill>
+            <a:srgbClr val="C2A14D"/>
+          </a:solidFill>
+          <a:ln>
+            <a:noFill/>
+          </a:ln>
+          <a:effectLst/>
+        </p:spPr>
+        <p:style>
+          <a:lnRef idx="1">
+            <a:schemeClr val="accent1"/>
+          </a:lnRef>
+          <a:fillRef idx="3">
+            <a:schemeClr val="accent1"/>
+          </a:fillRef>
+          <a:effectRef idx="2">
+            <a:schemeClr val="accent1"/>
+          </a:effectRef>
+          <a:fontRef idx="minor">
+            <a:schemeClr val="lt1"/>
+          </a:fontRef>
+        </p:style>
+        <p:txBody>
+          <a:bodyPr rtlCol="0" anchor="ctr"/>
+          <a:lstStyle/>
+          <a:p>
+            <a:pPr algn="ctr"/>
+          </a:p>
+        </p:txBody>
+      </p:sp>
+      <p:sp>
+        <p:nvSpPr>
+          <p:cNvPr id="21" name="TextBox 20"/>
+          <p:cNvSpPr txBox="1"/>
+          <p:nvPr/>
+        </p:nvSpPr>
+        <p:spPr>
+          <a:xfrm>
+            <a:off x="9665208" y="1737360"/>
+            <a:ext cx="274320" cy="841248"/>
+          </a:xfrm>
+          <a:prstGeom prst="rect">
+            <a:avLst/>
+          </a:prstGeom>
+          <a:noFill/>
+        </p:spPr>
+        <p:txBody>
+          <a:bodyPr wrap="none" anchor="ctr">
+            <a:spAutoFit/>
+          </a:bodyPr>
+          <a:lstStyle/>
+          <a:p>
+            <a:pPr algn="ctr"/>
+            <a:r>
+              <a:rPr sz="2000" b="1" i="0">
+                <a:solidFill>
+                  <a:srgbClr val="C2A14D"/>
+                </a:solidFill>
+                <a:latin typeface="맑은 고딕"/>
+              </a:rPr>
+              <a:t>›</a:t>
+            </a:r>
+          </a:p>
+        </p:txBody>
+      </p:sp>
+      <p:sp>
+        <p:nvSpPr>
+          <p:cNvPr id="22" name="Rounded Rectangle 21"/>
+          <p:cNvSpPr/>
+          <p:nvPr/>
+        </p:nvSpPr>
+        <p:spPr>
+          <a:xfrm>
+            <a:off x="9939528" y="1737360"/>
+            <a:ext cx="1993392" cy="841248"/>
+          </a:xfrm>
+          <a:prstGeom prst="roundRect">
+            <a:avLst/>
+          </a:prstGeom>
+          <a:solidFill>
+            <a:srgbClr val="FFFFFF"/>
+          </a:solidFill>
+          <a:ln w="12700">
+            <a:solidFill>
+              <a:srgbClr val="E7E3D8"/>
+            </a:solidFill>
+          </a:ln>
+          <a:effectLst/>
+          <a:effectLst>
+            <a:outerShdw blurRad="90000" dist="38000" dir="5400000" rotWithShape="0">
+              <a:srgbClr val="0B0E14">
+                <a:alpha val="22000"/>
+              </a:srgbClr>
+            </a:outerShdw>
+          </a:effectLst>
+        </p:spPr>
+        <p:style>
+          <a:lnRef idx="1">
+            <a:schemeClr val="accent1"/>
+          </a:lnRef>
+          <a:fillRef idx="3">
+            <a:schemeClr val="accent1"/>
+          </a:fillRef>
+          <a:effectRef idx="2">
+            <a:schemeClr val="accent1"/>
+          </a:effectRef>
+          <a:fontRef idx="minor">
+            <a:schemeClr val="lt1"/>
+          </a:fontRef>
+        </p:style>
+        <p:txBody>
+          <a:bodyPr rtlCol="0" anchor="ctr" wrap="square"/>
+          <a:lstStyle/>
+          <a:p>
+            <a:pPr algn="ctr"/>
+            <a:r>
+              <a:rPr sz="1100" b="1" i="0">
+                <a:solidFill>
+                  <a:srgbClr val="212733"/>
+                </a:solidFill>
+                <a:latin typeface="맑은 고딕"/>
+              </a:rPr>
+              <a:t>샘플→도면</a:t>
+            </a:r>
+          </a:p>
+          <a:p>
+            <a:pPr algn="ctr"/>
+            <a:r>
+              <a:rPr sz="1100" b="0" i="0">
+                <a:solidFill>
+                  <a:srgbClr val="8C919C"/>
+                </a:solidFill>
+                <a:latin typeface="맑은 고딕"/>
+              </a:rPr>
+              <a:t>+DXF</a:t>
+            </a:r>
+          </a:p>
+        </p:txBody>
+      </p:sp>
+      <p:sp>
+        <p:nvSpPr>
+          <p:cNvPr id="23" name="Rectangle 22"/>
+          <p:cNvSpPr/>
+          <p:nvPr/>
+        </p:nvSpPr>
+        <p:spPr>
+          <a:xfrm>
+            <a:off x="9939528" y="1737360"/>
+            <a:ext cx="1993392" cy="45720"/>
+          </a:xfrm>
+          <a:prstGeom prst="rect">
+            <a:avLst/>
+          </a:prstGeom>
+          <a:solidFill>
+            <a:srgbClr val="C2A14D"/>
+          </a:solidFill>
+          <a:ln>
+            <a:noFill/>
+          </a:ln>
+          <a:effectLst/>
+        </p:spPr>
+        <p:style>
+          <a:lnRef idx="1">
+            <a:schemeClr val="accent1"/>
+          </a:lnRef>
+          <a:fillRef idx="3">
+            <a:schemeClr val="accent1"/>
+          </a:fillRef>
+          <a:effectRef idx="2">
+            <a:schemeClr val="accent1"/>
+          </a:effectRef>
+          <a:fontRef idx="minor">
+            <a:schemeClr val="lt1"/>
+          </a:fontRef>
+        </p:style>
+        <p:txBody>
+          <a:bodyPr rtlCol="0" anchor="ctr"/>
+          <a:lstStyle/>
+          <a:p>
+            <a:pPr algn="ctr"/>
+          </a:p>
+        </p:txBody>
+      </p:sp>
+      <p:sp>
+        <p:nvSpPr>
+          <p:cNvPr id="24" name="TextBox 23"/>
+          <p:cNvSpPr txBox="1"/>
+          <p:nvPr/>
+        </p:nvSpPr>
+        <p:spPr>
+          <a:xfrm>
+            <a:off x="731520" y="3108960"/>
+            <a:ext cx="10698480" cy="2926080"/>
+          </a:xfrm>
+          <a:prstGeom prst="rect">
+            <a:avLst/>
+          </a:prstGeom>
+          <a:noFill/>
+        </p:spPr>
+        <p:txBody>
+          <a:bodyPr wrap="square" anchor="t">
+            <a:spAutoFit/>
+          </a:bodyPr>
+          <a:lstStyle/>
+          <a:p>
+            <a:pPr algn="l">
+              <a:spcBef>
+                <a:spcPts val="0"/>
+              </a:spcBef>
+              <a:spcAft>
+                <a:spcPts val="900"/>
+              </a:spcAft>
+            </a:pPr>
+            <a:r>
+              <a:rPr sz="1400" b="1" i="0" spc="100">
+                <a:solidFill>
+                  <a:srgbClr val="C2A14D"/>
+                </a:solidFill>
+                <a:latin typeface="맑은 고딕"/>
+              </a:rPr>
+              <a:t>학습 구성</a:t>
+            </a:r>
+          </a:p>
+          <a:p>
+            <a:pPr algn="l">
+              <a:spcBef>
+                <a:spcPts val="0"/>
+              </a:spcBef>
+              <a:spcAft>
+                <a:spcPts val="900"/>
+              </a:spcAft>
+            </a:pPr>
+            <a:r>
+              <a:rPr sz="1400" b="1" i="0">
+                <a:solidFill>
+                  <a:srgbClr val="C2A14D"/>
+                </a:solidFill>
+                <a:latin typeface="맑은 고딕"/>
+              </a:rPr>
+              <a:t>—  </a:t>
+            </a:r>
+            <a:r>
+              <a:rPr sz="1400" b="0" i="0">
+                <a:solidFill>
+                  <a:srgbClr val="212733"/>
+                </a:solidFill>
+                <a:latin typeface="맑은 고딕"/>
+              </a:rPr>
+              <a:t>입력 변환 — korean_to_engine: 통일그래프(g-0.3) → 엔진 record(canvas-256 정수, 13역할/18방, 온전 게이트)</a:t>
+            </a:r>
+          </a:p>
+          <a:p>
+            <a:pPr algn="l">
+              <a:spcBef>
+                <a:spcPts val="0"/>
+              </a:spcBef>
+              <a:spcAft>
+                <a:spcPts val="900"/>
+              </a:spcAft>
+            </a:pPr>
+            <a:r>
+              <a:rPr sz="1400" b="1" i="0">
+                <a:solidFill>
+                  <a:srgbClr val="C2A14D"/>
+                </a:solidFill>
+                <a:latin typeface="맑은 고딕"/>
+              </a:rPr>
+              <a:t>—  </a:t>
+            </a:r>
+            <a:r>
+              <a:rPr sz="1400" b="0" i="0">
+                <a:solidFill>
+                  <a:srgbClr val="212733"/>
+                </a:solidFill>
+                <a:latin typeface="맑은 고딕"/>
+              </a:rPr>
+              <a:t>3 stage 레시피 — node(cond "") · adjacency("ncsl") · partitioning("ncsla") · batch 512 · lr 1e-4 → 5e-5</a:t>
+            </a:r>
+          </a:p>
+          <a:p>
+            <a:pPr algn="l">
+              <a:spcBef>
+                <a:spcPts val="0"/>
+              </a:spcBef>
+              <a:spcAft>
+                <a:spcPts val="900"/>
+              </a:spcAft>
+            </a:pPr>
+            <a:r>
+              <a:rPr sz="1400" b="1" i="0">
+                <a:solidFill>
+                  <a:srgbClr val="C2A14D"/>
+                </a:solidFill>
+                <a:latin typeface="맑은 고딕"/>
+              </a:rPr>
+              <a:t>—  </a:t>
+            </a:r>
+            <a:r>
+              <a:rPr sz="1400" b="0" i="0">
+                <a:solidFill>
+                  <a:srgbClr val="212733"/>
+                </a:solidFill>
+                <a:latin typeface="맑은 고딕"/>
+              </a:rPr>
+              <a:t>비교 매트릭스 — ARM-A(RPLAN 사전학습 → 한국 파인튜닝) vs ARM-B(한국만) × 데이터 구성(dual / dual+보정)</a:t>
+            </a:r>
+          </a:p>
+          <a:p>
+            <a:pPr algn="l">
+              <a:spcBef>
+                <a:spcPts val="0"/>
+              </a:spcBef>
+              <a:spcAft>
+                <a:spcPts val="900"/>
+              </a:spcAft>
+            </a:pPr>
+            <a:r>
+              <a:rPr sz="1400" b="1" i="0">
+                <a:solidFill>
+                  <a:srgbClr val="C2A14D"/>
+                </a:solidFill>
+                <a:latin typeface="맑은 고딕"/>
+              </a:rPr>
+              <a:t>—  </a:t>
+            </a:r>
+            <a:r>
+              <a:rPr sz="1400" b="1" i="0">
+                <a:solidFill>
+                  <a:srgbClr val="212733"/>
+                </a:solidFill>
+                <a:latin typeface="맑은 고딕"/>
+              </a:rPr>
+              <a:t>평가 — 동결 test에서 FID + 법규준수율 + 완성도</a:t>
+            </a:r>
+          </a:p>
+        </p:txBody>
+      </p:sp>
+    </p:spTree>
+  </p:cSld>
+  <p:clrMapOvr>
+    <a:masterClrMapping/>
+  </p:clrMapOvr>
+</p:sld>
+</file>
+
+<file path=ppt/slides/slide14.xml><?xml version="1.0" encoding="utf-8"?>
+<p:sld xmlns:a="http://schemas.openxmlformats.org/drawingml/2006/main" xmlns:p="http://schemas.openxmlformats.org/presentationml/2006/main" xmlns:r="http://schemas.openxmlformats.org/officeDocument/2006/relationships">
+  <p:cSld>
+    <p:spTree>
+      <p:nvGrpSpPr>
+        <p:cNvPr id="1" name=""/>
+        <p:cNvGrpSpPr/>
+        <p:nvPr/>
+      </p:nvGrpSpPr>
+      <p:grpSpPr/>
+      <p:sp>
+        <p:nvSpPr>
+          <p:cNvPr id="2" name="Rectangle 1"/>
+          <p:cNvSpPr/>
+          <p:nvPr/>
+        </p:nvSpPr>
+        <p:spPr>
+          <a:xfrm>
+            <a:off x="0" y="0"/>
+            <a:ext cx="12191695" cy="6858000"/>
+          </a:xfrm>
+          <a:prstGeom prst="rect">
+            <a:avLst/>
+          </a:prstGeom>
+          <a:solidFill>
+            <a:srgbClr val="FBFAF6"/>
+          </a:solidFill>
+          <a:ln>
+            <a:noFill/>
+          </a:ln>
+          <a:effectLst/>
+        </p:spPr>
+        <p:style>
+          <a:lnRef idx="1">
+            <a:schemeClr val="accent1"/>
+          </a:lnRef>
+          <a:fillRef idx="3">
+            <a:schemeClr val="accent1"/>
+          </a:fillRef>
+          <a:effectRef idx="2">
+            <a:schemeClr val="accent1"/>
+          </a:effectRef>
+          <a:fontRef idx="minor">
+            <a:schemeClr val="lt1"/>
+          </a:fontRef>
+        </p:style>
+        <p:txBody>
+          <a:bodyPr rtlCol="0" anchor="ctr"/>
+          <a:lstStyle/>
+          <a:p>
+            <a:pPr algn="ctr"/>
+          </a:p>
+        </p:txBody>
+      </p:sp>
+      <p:sp>
+        <p:nvSpPr>
+          <p:cNvPr id="3" name="Rectangle 2"/>
+          <p:cNvSpPr/>
+          <p:nvPr/>
+        </p:nvSpPr>
+        <p:spPr>
+          <a:xfrm>
+            <a:off x="548640" y="566928"/>
+            <a:ext cx="41148" cy="566928"/>
+          </a:xfrm>
+          <a:prstGeom prst="rect">
+            <a:avLst/>
+          </a:prstGeom>
+          <a:solidFill>
+            <a:srgbClr val="C2A14D"/>
+          </a:solidFill>
+          <a:ln>
+            <a:noFill/>
+          </a:ln>
+          <a:effectLst/>
+        </p:spPr>
+        <p:style>
+          <a:lnRef idx="1">
+            <a:schemeClr val="accent1"/>
+          </a:lnRef>
+          <a:fillRef idx="3">
+            <a:schemeClr val="accent1"/>
+          </a:fillRef>
+          <a:effectRef idx="2">
+            <a:schemeClr val="accent1"/>
+          </a:effectRef>
+          <a:fontRef idx="minor">
+            <a:schemeClr val="lt1"/>
+          </a:fontRef>
+        </p:style>
+        <p:txBody>
+          <a:bodyPr rtlCol="0" anchor="ctr"/>
+          <a:lstStyle/>
+          <a:p>
+            <a:pPr algn="ctr"/>
+          </a:p>
+        </p:txBody>
+      </p:sp>
+      <p:sp>
+        <p:nvSpPr>
+          <p:cNvPr id="4" name="TextBox 3"/>
+          <p:cNvSpPr txBox="1"/>
+          <p:nvPr/>
+        </p:nvSpPr>
+        <p:spPr>
+          <a:xfrm>
+            <a:off x="749808" y="502920"/>
+            <a:ext cx="10058400" cy="274320"/>
+          </a:xfrm>
+          <a:prstGeom prst="rect">
+            <a:avLst/>
+          </a:prstGeom>
+          <a:noFill/>
+        </p:spPr>
+        <p:txBody>
+          <a:bodyPr wrap="square" anchor="t">
+            <a:spAutoFit/>
+          </a:bodyPr>
+          <a:lstStyle/>
+          <a:p>
+            <a:pPr algn="l">
+              <a:spcBef>
+                <a:spcPts val="0"/>
+              </a:spcBef>
+              <a:spcAft>
+                <a:spcPts val="500"/>
+              </a:spcAft>
+            </a:pPr>
+            <a:r>
+              <a:rPr sz="1100" b="1" i="0" spc="220">
+                <a:solidFill>
+                  <a:srgbClr val="C2A14D"/>
+                </a:solidFill>
+                <a:latin typeface="맑은 고딕"/>
+              </a:rPr>
+              <a:t>AI MODEL</a:t>
+            </a:r>
+          </a:p>
+        </p:txBody>
+      </p:sp>
+      <p:sp>
+        <p:nvSpPr>
+          <p:cNvPr id="5" name="TextBox 4"/>
+          <p:cNvSpPr txBox="1"/>
+          <p:nvPr/>
+        </p:nvSpPr>
+        <p:spPr>
+          <a:xfrm>
+            <a:off x="731520" y="713232"/>
+            <a:ext cx="10607040" cy="548640"/>
+          </a:xfrm>
+          <a:prstGeom prst="rect">
+            <a:avLst/>
+          </a:prstGeom>
+          <a:noFill/>
+        </p:spPr>
+        <p:txBody>
+          <a:bodyPr wrap="square" anchor="t">
+            <a:spAutoFit/>
+          </a:bodyPr>
+          <a:lstStyle/>
+          <a:p>
+            <a:pPr algn="l">
+              <a:spcBef>
+                <a:spcPts val="0"/>
+              </a:spcBef>
+              <a:spcAft>
+                <a:spcPts val="500"/>
+              </a:spcAft>
+            </a:pPr>
+            <a:r>
+              <a:rPr sz="2400" b="1" i="0">
+                <a:solidFill>
+                  <a:srgbClr val="212733"/>
+                </a:solidFill>
+                <a:latin typeface="맑은 고딕"/>
+              </a:rPr>
+              <a:t>AI 모델 ③ — neuro-symbolic 완성</a:t>
+            </a:r>
+          </a:p>
+        </p:txBody>
+      </p:sp>
+      <p:cxnSp>
+        <p:nvCxnSpPr>
+          <p:cNvPr id="6" name="Connector 5"/>
+          <p:cNvCxnSpPr/>
+          <p:nvPr/>
+        </p:nvCxnSpPr>
+        <p:spPr>
+          <a:xfrm>
+            <a:off x="548640" y="1389888"/>
+            <a:ext cx="11091672" cy="0"/>
+          </a:xfrm>
+          <a:prstGeom prst="bentConnector3">
+            <a:avLst/>
+          </a:prstGeom>
+          <a:ln w="12700">
+            <a:solidFill>
+              <a:srgbClr val="E7E3D8"/>
+            </a:solidFill>
+          </a:ln>
+          <a:effectLst/>
+        </p:spPr>
+        <p:style>
+          <a:lnRef idx="2">
+            <a:schemeClr val="accent1"/>
+          </a:lnRef>
+          <a:fillRef idx="0">
+            <a:schemeClr val="accent1"/>
+          </a:fillRef>
+          <a:effectRef idx="1">
+            <a:schemeClr val="accent1"/>
+          </a:effectRef>
+          <a:fontRef idx="minor">
+            <a:schemeClr val="tx1"/>
+          </a:fontRef>
+        </p:style>
+      </p:cxnSp>
+      <p:cxnSp>
+        <p:nvCxnSpPr>
+          <p:cNvPr id="7" name="Connector 6"/>
+          <p:cNvCxnSpPr/>
+          <p:nvPr/>
+        </p:nvCxnSpPr>
+        <p:spPr>
+          <a:xfrm>
+            <a:off x="548640" y="6400800"/>
+            <a:ext cx="11091672" cy="0"/>
+          </a:xfrm>
+          <a:prstGeom prst="bentConnector3">
+            <a:avLst/>
+          </a:prstGeom>
+          <a:ln w="9525">
+            <a:solidFill>
+              <a:srgbClr val="E7E3D8"/>
+            </a:solidFill>
+          </a:ln>
+          <a:effectLst/>
+        </p:spPr>
+        <p:style>
+          <a:lnRef idx="2">
+            <a:schemeClr val="accent1"/>
+          </a:lnRef>
+          <a:fillRef idx="0">
+            <a:schemeClr val="accent1"/>
+          </a:fillRef>
+          <a:effectRef idx="1">
+            <a:schemeClr val="accent1"/>
+          </a:effectRef>
+          <a:fontRef idx="minor">
+            <a:schemeClr val="tx1"/>
+          </a:fontRef>
+        </p:style>
+      </p:cxnSp>
+      <p:sp>
+        <p:nvSpPr>
+          <p:cNvPr id="8" name="TextBox 7"/>
+          <p:cNvSpPr txBox="1"/>
+          <p:nvPr/>
+        </p:nvSpPr>
+        <p:spPr>
+          <a:xfrm>
+            <a:off x="548640" y="6446520"/>
+            <a:ext cx="8229600" cy="274320"/>
+          </a:xfrm>
+          <a:prstGeom prst="rect">
+            <a:avLst/>
+          </a:prstGeom>
+          <a:noFill/>
+        </p:spPr>
+        <p:txBody>
+          <a:bodyPr wrap="square" anchor="t">
+            <a:spAutoFit/>
+          </a:bodyPr>
+          <a:lstStyle/>
+          <a:p>
+            <a:pPr algn="l">
+              <a:spcBef>
+                <a:spcPts val="0"/>
+              </a:spcBef>
+              <a:spcAft>
+                <a:spcPts val="500"/>
+              </a:spcAft>
+            </a:pPr>
+            <a:r>
+              <a:rPr sz="850" b="0" i="0" spc="60">
+                <a:solidFill>
+                  <a:srgbClr val="8C919C"/>
+                </a:solidFill>
+                <a:latin typeface="맑은 고딕"/>
+              </a:rPr>
+              <a:t>plan2graph · 한국형 소버린 평면도 생성 AI</a:t>
+            </a:r>
+          </a:p>
+        </p:txBody>
+      </p:sp>
+      <p:sp>
+        <p:nvSpPr>
+          <p:cNvPr id="9" name="TextBox 8"/>
+          <p:cNvSpPr txBox="1"/>
+          <p:nvPr/>
+        </p:nvSpPr>
+        <p:spPr>
+          <a:xfrm>
+            <a:off x="10607040" y="6446520"/>
+            <a:ext cx="1033271" cy="274320"/>
+          </a:xfrm>
+          <a:prstGeom prst="rect">
+            <a:avLst/>
+          </a:prstGeom>
+          <a:noFill/>
+        </p:spPr>
+        <p:txBody>
+          <a:bodyPr wrap="square" anchor="t">
+            <a:spAutoFit/>
+          </a:bodyPr>
+          <a:lstStyle/>
+          <a:p>
+            <a:pPr algn="r">
+              <a:spcBef>
+                <a:spcPts val="0"/>
+              </a:spcBef>
+              <a:spcAft>
+                <a:spcPts val="500"/>
+              </a:spcAft>
+            </a:pPr>
+            <a:r>
+              <a:rPr sz="850" b="1" i="0">
+                <a:solidFill>
+                  <a:srgbClr val="C2A14D"/>
+                </a:solidFill>
+                <a:latin typeface="맑은 고딕"/>
+              </a:rPr>
+              <a:t>14</a:t>
             </a:r>
           </a:p>
         </p:txBody>
@@ -6138,7 +8358,7 @@
 </p:sld>
 </file>
 
-<file path=ppt/slides/slide13.xml><?xml version="1.0" encoding="utf-8"?>
+<file path=ppt/slides/slide15.xml><?xml version="1.0" encoding="utf-8"?>
 <p:sld xmlns:a="http://schemas.openxmlformats.org/drawingml/2006/main" xmlns:p="http://schemas.openxmlformats.org/presentationml/2006/main" xmlns:r="http://schemas.openxmlformats.org/officeDocument/2006/relationships">
   <p:cSld>
     <p:spTree>
@@ -6471,7 +8691,7 @@
                 </a:solidFill>
                 <a:latin typeface="맑은 고딕"/>
               </a:rPr>
-              <a:t>13</a:t>
+              <a:t>15</a:t>
             </a:r>
           </a:p>
         </p:txBody>
@@ -6821,7 +9041,7 @@
 </p:sld>
 </file>
 
-<file path=ppt/slides/slide14.xml><?xml version="1.0" encoding="utf-8"?>
+<file path=ppt/slides/slide16.xml><?xml version="1.0" encoding="utf-8"?>
 <p:sld xmlns:a="http://schemas.openxmlformats.org/drawingml/2006/main" xmlns:p="http://schemas.openxmlformats.org/presentationml/2006/main" xmlns:r="http://schemas.openxmlformats.org/officeDocument/2006/relationships">
   <p:cSld>
     <p:spTree>
@@ -7154,7 +9374,7 @@
                 </a:solidFill>
                 <a:latin typeface="맑은 고딕"/>
               </a:rPr>
-              <a:t>14</a:t>
+              <a:t>16</a:t>
             </a:r>
           </a:p>
         </p:txBody>
@@ -8009,7 +10229,7 @@
 </p:sld>
 </file>
 
-<file path=ppt/slides/slide15.xml><?xml version="1.0" encoding="utf-8"?>
+<file path=ppt/slides/slide17.xml><?xml version="1.0" encoding="utf-8"?>
 <p:sld xmlns:a="http://schemas.openxmlformats.org/drawingml/2006/main" xmlns:p="http://schemas.openxmlformats.org/presentationml/2006/main" xmlns:r="http://schemas.openxmlformats.org/officeDocument/2006/relationships">
   <p:cSld>
     <p:spTree>
@@ -8342,7 +10562,7 @@
                 </a:solidFill>
                 <a:latin typeface="맑은 고딕"/>
               </a:rPr>
-              <a:t>15</a:t>
+              <a:t>17</a:t>
             </a:r>
           </a:p>
         </p:txBody>
@@ -8742,7 +10962,7 @@
 </p:sld>
 </file>
 
-<file path=ppt/slides/slide16.xml><?xml version="1.0" encoding="utf-8"?>
+<file path=ppt/slides/slide18.xml><?xml version="1.0" encoding="utf-8"?>
 <p:sld xmlns:a="http://schemas.openxmlformats.org/drawingml/2006/main" xmlns:p="http://schemas.openxmlformats.org/presentationml/2006/main" xmlns:r="http://schemas.openxmlformats.org/officeDocument/2006/relationships">
   <p:cSld>
     <p:spTree>
@@ -9075,7 +11295,7 @@
                 </a:solidFill>
                 <a:latin typeface="맑은 고딕"/>
               </a:rPr>
-              <a:t>16</a:t>
+              <a:t>18</a:t>
             </a:r>
           </a:p>
         </p:txBody>
@@ -9911,7 +12131,7 @@
 </p:sld>
 </file>
 
-<file path=ppt/slides/slide17.xml><?xml version="1.0" encoding="utf-8"?>
+<file path=ppt/slides/slide19.xml><?xml version="1.0" encoding="utf-8"?>
 <p:sld xmlns:a="http://schemas.openxmlformats.org/drawingml/2006/main" xmlns:p="http://schemas.openxmlformats.org/presentationml/2006/main" xmlns:r="http://schemas.openxmlformats.org/officeDocument/2006/relationships">
   <p:cSld>
     <p:spTree>
@@ -10244,7 +12464,7 @@
                 </a:solidFill>
                 <a:latin typeface="맑은 고딕"/>
               </a:rPr>
-              <a:t>17</a:t>
+              <a:t>19</a:t>
             </a:r>
           </a:p>
         </p:txBody>
@@ -10667,270 +12887,6 @@
                 <a:latin typeface="맑은 고딕"/>
               </a:rPr>
               <a:t>D · 자체 소버린 엔진(SOTA 부품 + novelty)</a:t>
-            </a:r>
-          </a:p>
-        </p:txBody>
-      </p:sp>
-    </p:spTree>
-  </p:cSld>
-  <p:clrMapOvr>
-    <a:masterClrMapping/>
-  </p:clrMapOvr>
-</p:sld>
-</file>
-
-<file path=ppt/slides/slide18.xml><?xml version="1.0" encoding="utf-8"?>
-<p:sld xmlns:a="http://schemas.openxmlformats.org/drawingml/2006/main" xmlns:p="http://schemas.openxmlformats.org/presentationml/2006/main" xmlns:r="http://schemas.openxmlformats.org/officeDocument/2006/relationships">
-  <p:cSld>
-    <p:spTree>
-      <p:nvGrpSpPr>
-        <p:cNvPr id="1" name=""/>
-        <p:cNvGrpSpPr/>
-        <p:nvPr/>
-      </p:nvGrpSpPr>
-      <p:grpSpPr/>
-      <p:sp>
-        <p:nvSpPr>
-          <p:cNvPr id="2" name="Rectangle 1"/>
-          <p:cNvSpPr/>
-          <p:nvPr/>
-        </p:nvSpPr>
-        <p:spPr>
-          <a:xfrm>
-            <a:off x="0" y="0"/>
-            <a:ext cx="12191695" cy="6858000"/>
-          </a:xfrm>
-          <a:prstGeom prst="rect">
-            <a:avLst/>
-          </a:prstGeom>
-          <a:solidFill>
-            <a:srgbClr val="10141C"/>
-          </a:solidFill>
-          <a:ln>
-            <a:noFill/>
-          </a:ln>
-          <a:effectLst/>
-        </p:spPr>
-        <p:style>
-          <a:lnRef idx="1">
-            <a:schemeClr val="accent1"/>
-          </a:lnRef>
-          <a:fillRef idx="3">
-            <a:schemeClr val="accent1"/>
-          </a:fillRef>
-          <a:effectRef idx="2">
-            <a:schemeClr val="accent1"/>
-          </a:effectRef>
-          <a:fontRef idx="minor">
-            <a:schemeClr val="lt1"/>
-          </a:fontRef>
-        </p:style>
-        <p:txBody>
-          <a:bodyPr rtlCol="0" anchor="ctr"/>
-          <a:lstStyle/>
-          <a:p>
-            <a:pPr algn="ctr"/>
-          </a:p>
-        </p:txBody>
-      </p:sp>
-      <p:sp>
-        <p:nvSpPr>
-          <p:cNvPr id="3" name="Rectangle 2"/>
-          <p:cNvSpPr/>
-          <p:nvPr/>
-        </p:nvSpPr>
-        <p:spPr>
-          <a:xfrm>
-            <a:off x="411480" y="411480"/>
-            <a:ext cx="11368735" cy="6035040"/>
-          </a:xfrm>
-          <a:prstGeom prst="rect">
-            <a:avLst/>
-          </a:prstGeom>
-          <a:noFill/>
-          <a:ln w="12700">
-            <a:solidFill>
-              <a:srgbClr val="C2A14D"/>
-            </a:solidFill>
-          </a:ln>
-          <a:effectLst/>
-        </p:spPr>
-        <p:style>
-          <a:lnRef idx="1">
-            <a:schemeClr val="accent1"/>
-          </a:lnRef>
-          <a:fillRef idx="3">
-            <a:schemeClr val="accent1"/>
-          </a:fillRef>
-          <a:effectRef idx="2">
-            <a:schemeClr val="accent1"/>
-          </a:effectRef>
-          <a:fontRef idx="minor">
-            <a:schemeClr val="lt1"/>
-          </a:fontRef>
-        </p:style>
-        <p:txBody>
-          <a:bodyPr rtlCol="0" anchor="ctr"/>
-          <a:lstStyle/>
-          <a:p>
-            <a:pPr algn="ctr"/>
-          </a:p>
-        </p:txBody>
-      </p:sp>
-      <p:cxnSp>
-        <p:nvCxnSpPr>
-          <p:cNvPr id="4" name="Connector 3"/>
-          <p:cNvCxnSpPr/>
-          <p:nvPr/>
-        </p:nvCxnSpPr>
-        <p:spPr>
-          <a:xfrm>
-            <a:off x="1033271" y="2468880"/>
-            <a:ext cx="2011680" cy="0"/>
-          </a:xfrm>
-          <a:prstGeom prst="bentConnector3">
-            <a:avLst/>
-          </a:prstGeom>
-          <a:ln w="19050">
-            <a:solidFill>
-              <a:srgbClr val="C2A14D"/>
-            </a:solidFill>
-          </a:ln>
-          <a:effectLst/>
-        </p:spPr>
-        <p:style>
-          <a:lnRef idx="2">
-            <a:schemeClr val="accent1"/>
-          </a:lnRef>
-          <a:fillRef idx="0">
-            <a:schemeClr val="accent1"/>
-          </a:fillRef>
-          <a:effectRef idx="1">
-            <a:schemeClr val="accent1"/>
-          </a:effectRef>
-          <a:fontRef idx="minor">
-            <a:schemeClr val="tx1"/>
-          </a:fontRef>
-        </p:style>
-      </p:cxnSp>
-      <p:sp>
-        <p:nvSpPr>
-          <p:cNvPr id="5" name="TextBox 4"/>
-          <p:cNvSpPr txBox="1"/>
-          <p:nvPr/>
-        </p:nvSpPr>
-        <p:spPr>
-          <a:xfrm>
-            <a:off x="1005840" y="2651760"/>
-            <a:ext cx="10241280" cy="1463040"/>
-          </a:xfrm>
-          <a:prstGeom prst="rect">
-            <a:avLst/>
-          </a:prstGeom>
-          <a:noFill/>
-        </p:spPr>
-        <p:txBody>
-          <a:bodyPr wrap="square" anchor="t">
-            <a:spAutoFit/>
-          </a:bodyPr>
-          <a:lstStyle/>
-          <a:p>
-            <a:pPr algn="l">
-              <a:spcBef>
-                <a:spcPts val="0"/>
-              </a:spcBef>
-              <a:spcAft>
-                <a:spcPts val="1200"/>
-              </a:spcAft>
-            </a:pPr>
-            <a:r>
-              <a:rPr sz="1300" b="1" i="0" spc="300">
-                <a:solidFill>
-                  <a:srgbClr val="C2A14D"/>
-                </a:solidFill>
-                <a:latin typeface="맑은 고딕"/>
-              </a:rPr>
-              <a:t>요약</a:t>
-            </a:r>
-          </a:p>
-          <a:p>
-            <a:pPr algn="l">
-              <a:spcBef>
-                <a:spcPts val="0"/>
-              </a:spcBef>
-              <a:spcAft>
-                <a:spcPts val="1200"/>
-              </a:spcAft>
-            </a:pPr>
-            <a:r>
-              <a:rPr sz="2300" b="1" i="0">
-                <a:solidFill>
-                  <a:srgbClr val="FFFFFF"/>
-                </a:solidFill>
-                <a:latin typeface="맑은 고딕"/>
-              </a:rPr>
-              <a:t>한국 데이터 129,007 → 통일 그래프 → 자체 소버린 엔진(13/18) → 완전 도면 + DXF</a:t>
-            </a:r>
-          </a:p>
-        </p:txBody>
-      </p:sp>
-      <p:sp>
-        <p:nvSpPr>
-          <p:cNvPr id="6" name="TextBox 5"/>
-          <p:cNvSpPr txBox="1"/>
-          <p:nvPr/>
-        </p:nvSpPr>
-        <p:spPr>
-          <a:xfrm>
-            <a:off x="1033271" y="4297680"/>
-            <a:ext cx="10058400" cy="1371600"/>
-          </a:xfrm>
-          <a:prstGeom prst="rect">
-            <a:avLst/>
-          </a:prstGeom>
-          <a:noFill/>
-        </p:spPr>
-        <p:txBody>
-          <a:bodyPr wrap="square" anchor="t">
-            <a:spAutoFit/>
-          </a:bodyPr>
-          <a:lstStyle/>
-          <a:p>
-            <a:pPr algn="l">
-              <a:spcBef>
-                <a:spcPts val="0"/>
-              </a:spcBef>
-              <a:spcAft>
-                <a:spcPts val="1000"/>
-              </a:spcAft>
-            </a:pPr>
-            <a:r>
-              <a:rPr sz="1400" b="0" i="0">
-                <a:solidFill>
-                  <a:srgbClr val="E6D6A6"/>
-                </a:solidFill>
-                <a:latin typeface="맑은 고딕"/>
-              </a:rPr>
-              <a:t>박스 회귀 사망 → diffusion 엔진 전환 · neuro-symbolic으로 SOTA가 안 하는 완전성 확보</a:t>
-            </a:r>
-          </a:p>
-          <a:p>
-            <a:pPr algn="l">
-              <a:spcBef>
-                <a:spcPts val="0"/>
-              </a:spcBef>
-              <a:spcAft>
-                <a:spcPts val="1000"/>
-              </a:spcAft>
-            </a:pPr>
-            <a:r>
-              <a:rPr sz="1400" b="0" i="0">
-                <a:solidFill>
-                  <a:srgbClr val="8C919C"/>
-                </a:solidFill>
-                <a:latin typeface="맑은 고딕"/>
-              </a:rPr>
-              <a:t>차별성 = 법규-인식 · 완전 도면 · 한국 소버린 — 비교 가능한 프로그램으로 검증 진행 중</a:t>
             </a:r>
           </a:p>
         </p:txBody>
@@ -12133,6 +14089,270 @@
                 <a:latin typeface="맑은 고딕"/>
               </a:rPr>
               <a:t>한국 소버린: 한국 아파트 데이터로 학습한 자체 소유 엔진(외부 모델 단순 호출 아님)</a:t>
+            </a:r>
+          </a:p>
+        </p:txBody>
+      </p:sp>
+    </p:spTree>
+  </p:cSld>
+  <p:clrMapOvr>
+    <a:masterClrMapping/>
+  </p:clrMapOvr>
+</p:sld>
+</file>
+
+<file path=ppt/slides/slide20.xml><?xml version="1.0" encoding="utf-8"?>
+<p:sld xmlns:a="http://schemas.openxmlformats.org/drawingml/2006/main" xmlns:p="http://schemas.openxmlformats.org/presentationml/2006/main" xmlns:r="http://schemas.openxmlformats.org/officeDocument/2006/relationships">
+  <p:cSld>
+    <p:spTree>
+      <p:nvGrpSpPr>
+        <p:cNvPr id="1" name=""/>
+        <p:cNvGrpSpPr/>
+        <p:nvPr/>
+      </p:nvGrpSpPr>
+      <p:grpSpPr/>
+      <p:sp>
+        <p:nvSpPr>
+          <p:cNvPr id="2" name="Rectangle 1"/>
+          <p:cNvSpPr/>
+          <p:nvPr/>
+        </p:nvSpPr>
+        <p:spPr>
+          <a:xfrm>
+            <a:off x="0" y="0"/>
+            <a:ext cx="12191695" cy="6858000"/>
+          </a:xfrm>
+          <a:prstGeom prst="rect">
+            <a:avLst/>
+          </a:prstGeom>
+          <a:solidFill>
+            <a:srgbClr val="10141C"/>
+          </a:solidFill>
+          <a:ln>
+            <a:noFill/>
+          </a:ln>
+          <a:effectLst/>
+        </p:spPr>
+        <p:style>
+          <a:lnRef idx="1">
+            <a:schemeClr val="accent1"/>
+          </a:lnRef>
+          <a:fillRef idx="3">
+            <a:schemeClr val="accent1"/>
+          </a:fillRef>
+          <a:effectRef idx="2">
+            <a:schemeClr val="accent1"/>
+          </a:effectRef>
+          <a:fontRef idx="minor">
+            <a:schemeClr val="lt1"/>
+          </a:fontRef>
+        </p:style>
+        <p:txBody>
+          <a:bodyPr rtlCol="0" anchor="ctr"/>
+          <a:lstStyle/>
+          <a:p>
+            <a:pPr algn="ctr"/>
+          </a:p>
+        </p:txBody>
+      </p:sp>
+      <p:sp>
+        <p:nvSpPr>
+          <p:cNvPr id="3" name="Rectangle 2"/>
+          <p:cNvSpPr/>
+          <p:nvPr/>
+        </p:nvSpPr>
+        <p:spPr>
+          <a:xfrm>
+            <a:off x="411480" y="411480"/>
+            <a:ext cx="11368735" cy="6035040"/>
+          </a:xfrm>
+          <a:prstGeom prst="rect">
+            <a:avLst/>
+          </a:prstGeom>
+          <a:noFill/>
+          <a:ln w="12700">
+            <a:solidFill>
+              <a:srgbClr val="C2A14D"/>
+            </a:solidFill>
+          </a:ln>
+          <a:effectLst/>
+        </p:spPr>
+        <p:style>
+          <a:lnRef idx="1">
+            <a:schemeClr val="accent1"/>
+          </a:lnRef>
+          <a:fillRef idx="3">
+            <a:schemeClr val="accent1"/>
+          </a:fillRef>
+          <a:effectRef idx="2">
+            <a:schemeClr val="accent1"/>
+          </a:effectRef>
+          <a:fontRef idx="minor">
+            <a:schemeClr val="lt1"/>
+          </a:fontRef>
+        </p:style>
+        <p:txBody>
+          <a:bodyPr rtlCol="0" anchor="ctr"/>
+          <a:lstStyle/>
+          <a:p>
+            <a:pPr algn="ctr"/>
+          </a:p>
+        </p:txBody>
+      </p:sp>
+      <p:cxnSp>
+        <p:nvCxnSpPr>
+          <p:cNvPr id="4" name="Connector 3"/>
+          <p:cNvCxnSpPr/>
+          <p:nvPr/>
+        </p:nvCxnSpPr>
+        <p:spPr>
+          <a:xfrm>
+            <a:off x="1033271" y="2468880"/>
+            <a:ext cx="2011680" cy="0"/>
+          </a:xfrm>
+          <a:prstGeom prst="bentConnector3">
+            <a:avLst/>
+          </a:prstGeom>
+          <a:ln w="19050">
+            <a:solidFill>
+              <a:srgbClr val="C2A14D"/>
+            </a:solidFill>
+          </a:ln>
+          <a:effectLst/>
+        </p:spPr>
+        <p:style>
+          <a:lnRef idx="2">
+            <a:schemeClr val="accent1"/>
+          </a:lnRef>
+          <a:fillRef idx="0">
+            <a:schemeClr val="accent1"/>
+          </a:fillRef>
+          <a:effectRef idx="1">
+            <a:schemeClr val="accent1"/>
+          </a:effectRef>
+          <a:fontRef idx="minor">
+            <a:schemeClr val="tx1"/>
+          </a:fontRef>
+        </p:style>
+      </p:cxnSp>
+      <p:sp>
+        <p:nvSpPr>
+          <p:cNvPr id="5" name="TextBox 4"/>
+          <p:cNvSpPr txBox="1"/>
+          <p:nvPr/>
+        </p:nvSpPr>
+        <p:spPr>
+          <a:xfrm>
+            <a:off x="1005840" y="2651760"/>
+            <a:ext cx="10241280" cy="1463040"/>
+          </a:xfrm>
+          <a:prstGeom prst="rect">
+            <a:avLst/>
+          </a:prstGeom>
+          <a:noFill/>
+        </p:spPr>
+        <p:txBody>
+          <a:bodyPr wrap="square" anchor="t">
+            <a:spAutoFit/>
+          </a:bodyPr>
+          <a:lstStyle/>
+          <a:p>
+            <a:pPr algn="l">
+              <a:spcBef>
+                <a:spcPts val="0"/>
+              </a:spcBef>
+              <a:spcAft>
+                <a:spcPts val="1200"/>
+              </a:spcAft>
+            </a:pPr>
+            <a:r>
+              <a:rPr sz="1300" b="1" i="0" spc="300">
+                <a:solidFill>
+                  <a:srgbClr val="C2A14D"/>
+                </a:solidFill>
+                <a:latin typeface="맑은 고딕"/>
+              </a:rPr>
+              <a:t>요약</a:t>
+            </a:r>
+          </a:p>
+          <a:p>
+            <a:pPr algn="l">
+              <a:spcBef>
+                <a:spcPts val="0"/>
+              </a:spcBef>
+              <a:spcAft>
+                <a:spcPts val="1200"/>
+              </a:spcAft>
+            </a:pPr>
+            <a:r>
+              <a:rPr sz="2300" b="1" i="0">
+                <a:solidFill>
+                  <a:srgbClr val="FFFFFF"/>
+                </a:solidFill>
+                <a:latin typeface="맑은 고딕"/>
+              </a:rPr>
+              <a:t>한국 데이터 129,007 → 통일 그래프 → 자체 소버린 엔진(13/18) → 완전 도면 + DXF</a:t>
+            </a:r>
+          </a:p>
+        </p:txBody>
+      </p:sp>
+      <p:sp>
+        <p:nvSpPr>
+          <p:cNvPr id="6" name="TextBox 5"/>
+          <p:cNvSpPr txBox="1"/>
+          <p:nvPr/>
+        </p:nvSpPr>
+        <p:spPr>
+          <a:xfrm>
+            <a:off x="1033271" y="4297680"/>
+            <a:ext cx="10058400" cy="1371600"/>
+          </a:xfrm>
+          <a:prstGeom prst="rect">
+            <a:avLst/>
+          </a:prstGeom>
+          <a:noFill/>
+        </p:spPr>
+        <p:txBody>
+          <a:bodyPr wrap="square" anchor="t">
+            <a:spAutoFit/>
+          </a:bodyPr>
+          <a:lstStyle/>
+          <a:p>
+            <a:pPr algn="l">
+              <a:spcBef>
+                <a:spcPts val="0"/>
+              </a:spcBef>
+              <a:spcAft>
+                <a:spcPts val="1000"/>
+              </a:spcAft>
+            </a:pPr>
+            <a:r>
+              <a:rPr sz="1400" b="0" i="0">
+                <a:solidFill>
+                  <a:srgbClr val="E6D6A6"/>
+                </a:solidFill>
+                <a:latin typeface="맑은 고딕"/>
+              </a:rPr>
+              <a:t>박스 회귀 사망 → diffusion 엔진 전환 · neuro-symbolic으로 SOTA가 안 하는 완전성 확보</a:t>
+            </a:r>
+          </a:p>
+          <a:p>
+            <a:pPr algn="l">
+              <a:spcBef>
+                <a:spcPts val="0"/>
+              </a:spcBef>
+              <a:spcAft>
+                <a:spcPts val="1000"/>
+              </a:spcAft>
+            </a:pPr>
+            <a:r>
+              <a:rPr sz="1400" b="0" i="0">
+                <a:solidFill>
+                  <a:srgbClr val="8C919C"/>
+                </a:solidFill>
+                <a:latin typeface="맑은 고딕"/>
+              </a:rPr>
+              <a:t>차별성 = 법규-인식 · 완전 도면 · 한국 소버린 — 비교 가능한 프로그램으로 검증 진행 중</a:t>
             </a:r>
           </a:p>
         </p:txBody>
@@ -17114,7 +19334,7 @@
                 </a:solidFill>
                 <a:latin typeface="맑은 고딕"/>
               </a:rPr>
-              <a:t>DATASET</a:t>
+              <a:t>DATASET · REPORT</a:t>
             </a:r>
           </a:p>
         </p:txBody>
@@ -17156,7 +19376,7 @@
                 </a:solidFill>
                 <a:latin typeface="맑은 고딕"/>
               </a:rPr>
-              <a:t>데이터셋 구축 ② — 회계(처분)</a:t>
+              <a:t>데이터셋 구축 ② — 카테고리별 문제 · 변환 (AI-Hub)</a:t>
             </a:r>
           </a:p>
         </p:txBody>
@@ -17325,8 +19545,8 @@
         </p:nvSpPr>
         <p:spPr>
           <a:xfrm>
-            <a:off x="731520" y="1600200"/>
-            <a:ext cx="10698480" cy="365760"/>
+            <a:off x="731520" y="1554480"/>
+            <a:ext cx="10698480" cy="320040"/>
           </a:xfrm>
           <a:prstGeom prst="rect">
             <a:avLst/>
@@ -17348,13 +19568,13 @@
               </a:spcAft>
             </a:pPr>
             <a:r>
-              <a:rPr sz="1600" b="1" i="0">
+              <a:rPr sz="1400" b="1" i="0">
                 <a:solidFill>
                   <a:srgbClr val="212733"/>
                 </a:solidFill>
                 <a:latin typeface="맑은 고딕"/>
               </a:rPr>
-              <a:t>검수 본질 = 숫자 × 카테고리(사용/보정필요/제외) × 사유 · 단일 소스</a:t>
+              <a:t>AI-Hub 43,219 도면을 추출 출처(provenance)별로 분류 — 각 카테고리의 문제와 처리 방법</a:t>
             </a:r>
           </a:p>
         </p:txBody>
@@ -17368,8 +19588,8 @@
           <p:nvPr/>
         </p:nvGraphicFramePr>
         <p:xfrm>
-          <a:off x="731520" y="2194560"/>
-          <a:ext cx="10698480" cy="2103120"/>
+          <a:off x="566928" y="2011680"/>
+          <a:ext cx="11064240" cy="3785616"/>
         </p:xfrm>
         <a:graphic>
           <a:graphicData uri="http://schemas.openxmlformats.org/drawingml/2006/table">
@@ -17378,11 +19598,10 @@
                 <a:tableStyleId>{5C22544A-7EE6-4342-B048-85BDC9FD1C3A}</a:tableStyleId>
               </a:tblPr>
               <a:tblGrid>
-                <a:gridCol w="2651760"/>
-                <a:gridCol w="2011680"/>
-                <a:gridCol w="2011680"/>
-                <a:gridCol w="2011680"/>
-                <a:gridCol w="2011680"/>
+                <a:gridCol w="2286000"/>
+                <a:gridCol w="1005840"/>
+                <a:gridCol w="1371600"/>
+                <a:gridCol w="6400800"/>
               </a:tblGrid>
               <a:tr h="420624">
                 <a:tc>
@@ -17392,13 +19611,13 @@
                     <a:p>
                       <a:pPr algn="l"/>
                       <a:r>
-                        <a:rPr sz="1250" b="1" i="0">
+                        <a:rPr sz="1150" b="1" i="0">
                           <a:solidFill>
                             <a:srgbClr val="E6D6A6"/>
                           </a:solidFill>
                           <a:latin typeface="맑은 고딕"/>
                         </a:rPr>
-                        <a:t>출처</a:t>
+                        <a:t>카테고리</a:t>
                       </a:r>
                     </a:p>
                   </a:txBody>
@@ -17415,13 +19634,13 @@
                     <a:p>
                       <a:pPr algn="ctr"/>
                       <a:r>
-                        <a:rPr sz="1250" b="1" i="0">
+                        <a:rPr sz="1150" b="1" i="0">
                           <a:solidFill>
                             <a:srgbClr val="E6D6A6"/>
                           </a:solidFill>
                           <a:latin typeface="맑은 고딕"/>
                         </a:rPr>
-                        <a:t>사용</a:t>
+                        <a:t>도면</a:t>
                       </a:r>
                     </a:p>
                   </a:txBody>
@@ -17438,13 +19657,13 @@
                     <a:p>
                       <a:pPr algn="ctr"/>
                       <a:r>
-                        <a:rPr sz="1250" b="1" i="0">
+                        <a:rPr sz="1150" b="1" i="0">
                           <a:solidFill>
                             <a:srgbClr val="E6D6A6"/>
                           </a:solidFill>
                           <a:latin typeface="맑은 고딕"/>
                         </a:rPr>
-                        <a:t>보정필요</a:t>
+                        <a:t>처분</a:t>
                       </a:r>
                     </a:p>
                   </a:txBody>
@@ -17461,36 +19680,13 @@
                     <a:p>
                       <a:pPr algn="ctr"/>
                       <a:r>
-                        <a:rPr sz="1250" b="1" i="0">
+                        <a:rPr sz="1150" b="1" i="0">
                           <a:solidFill>
                             <a:srgbClr val="E6D6A6"/>
                           </a:solidFill>
                           <a:latin typeface="맑은 고딕"/>
                         </a:rPr>
-                        <a:t>제외</a:t>
-                      </a:r>
-                    </a:p>
-                  </a:txBody>
-                  <a:tcPr marT="38100" marB="38100" marL="114300" marR="114300" anchor="ctr">
-                    <a:solidFill>
-                      <a:srgbClr val="10141C"/>
-                    </a:solidFill>
-                  </a:tcPr>
-                </a:tc>
-                <a:tc>
-                  <a:txBody>
-                    <a:bodyPr/>
-                    <a:lstStyle/>
-                    <a:p>
-                      <a:pPr algn="ctr"/>
-                      <a:r>
-                        <a:rPr sz="1250" b="1" i="0">
-                          <a:solidFill>
-                            <a:srgbClr val="E6D6A6"/>
-                          </a:solidFill>
-                          <a:latin typeface="맑은 고딕"/>
-                        </a:rPr>
-                        <a:t>합 = 다운로드</a:t>
+                        <a:t>문제 → 처리</a:t>
                       </a:r>
                     </a:p>
                   </a:txBody>
@@ -17509,1942 +19705,7 @@
                     <a:p>
                       <a:pPr algn="l"/>
                       <a:r>
-                        <a:rPr sz="1250" b="1" i="0">
-                          <a:solidFill>
-                            <a:srgbClr val="212733"/>
-                          </a:solidFill>
-                          <a:latin typeface="맑은 고딕"/>
-                        </a:rPr>
-                        <a:t>AI-Hub</a:t>
-                      </a:r>
-                    </a:p>
-                  </a:txBody>
-                  <a:tcPr marT="38100" marB="38100" marL="114300" marR="114300" anchor="ctr">
-                    <a:solidFill>
-                      <a:srgbClr val="FFFFFF"/>
-                    </a:solidFill>
-                  </a:tcPr>
-                </a:tc>
-                <a:tc>
-                  <a:txBody>
-                    <a:bodyPr/>
-                    <a:lstStyle/>
-                    <a:p>
-                      <a:pPr algn="ctr"/>
-                      <a:r>
-                        <a:rPr sz="1250" b="0" i="0">
-                          <a:solidFill>
-                            <a:srgbClr val="212733"/>
-                          </a:solidFill>
-                          <a:latin typeface="맑은 고딕"/>
-                        </a:rPr>
-                        <a:t>10,921</a:t>
-                      </a:r>
-                    </a:p>
-                  </a:txBody>
-                  <a:tcPr marT="38100" marB="38100" marL="114300" marR="114300" anchor="ctr">
-                    <a:solidFill>
-                      <a:srgbClr val="FFFFFF"/>
-                    </a:solidFill>
-                  </a:tcPr>
-                </a:tc>
-                <a:tc>
-                  <a:txBody>
-                    <a:bodyPr/>
-                    <a:lstStyle/>
-                    <a:p>
-                      <a:pPr algn="ctr"/>
-                      <a:r>
-                        <a:rPr sz="1250" b="0" i="0">
-                          <a:solidFill>
-                            <a:srgbClr val="212733"/>
-                          </a:solidFill>
-                          <a:latin typeface="맑은 고딕"/>
-                        </a:rPr>
-                        <a:t>9,412</a:t>
-                      </a:r>
-                    </a:p>
-                  </a:txBody>
-                  <a:tcPr marT="38100" marB="38100" marL="114300" marR="114300" anchor="ctr">
-                    <a:solidFill>
-                      <a:srgbClr val="FFFFFF"/>
-                    </a:solidFill>
-                  </a:tcPr>
-                </a:tc>
-                <a:tc>
-                  <a:txBody>
-                    <a:bodyPr/>
-                    <a:lstStyle/>
-                    <a:p>
-                      <a:pPr algn="ctr"/>
-                      <a:r>
-                        <a:rPr sz="1250" b="0" i="0">
-                          <a:solidFill>
-                            <a:srgbClr val="212733"/>
-                          </a:solidFill>
-                          <a:latin typeface="맑은 고딕"/>
-                        </a:rPr>
-                        <a:t>22,886</a:t>
-                      </a:r>
-                    </a:p>
-                  </a:txBody>
-                  <a:tcPr marT="38100" marB="38100" marL="114300" marR="114300" anchor="ctr">
-                    <a:solidFill>
-                      <a:srgbClr val="FFFFFF"/>
-                    </a:solidFill>
-                  </a:tcPr>
-                </a:tc>
-                <a:tc>
-                  <a:txBody>
-                    <a:bodyPr/>
-                    <a:lstStyle/>
-                    <a:p>
-                      <a:pPr algn="ctr"/>
-                      <a:r>
-                        <a:rPr sz="1250" b="0" i="0">
-                          <a:solidFill>
-                            <a:srgbClr val="212733"/>
-                          </a:solidFill>
-                          <a:latin typeface="맑은 고딕"/>
-                        </a:rPr>
-                        <a:t>43,219</a:t>
-                      </a:r>
-                    </a:p>
-                  </a:txBody>
-                  <a:tcPr marT="38100" marB="38100" marL="114300" marR="114300" anchor="ctr">
-                    <a:solidFill>
-                      <a:srgbClr val="FFFFFF"/>
-                    </a:solidFill>
-                  </a:tcPr>
-                </a:tc>
-              </a:tr>
-              <a:tr h="420624">
-                <a:tc>
-                  <a:txBody>
-                    <a:bodyPr/>
-                    <a:lstStyle/>
-                    <a:p>
-                      <a:pPr algn="l"/>
-                      <a:r>
-                        <a:rPr sz="1250" b="1" i="0">
-                          <a:solidFill>
-                            <a:srgbClr val="212733"/>
-                          </a:solidFill>
-                          <a:latin typeface="맑은 고딕"/>
-                        </a:rPr>
-                        <a:t>RPLAN</a:t>
-                      </a:r>
-                    </a:p>
-                  </a:txBody>
-                  <a:tcPr marT="38100" marB="38100" marL="114300" marR="114300" anchor="ctr">
-                    <a:solidFill>
-                      <a:srgbClr val="FBFAF6"/>
-                    </a:solidFill>
-                  </a:tcPr>
-                </a:tc>
-                <a:tc>
-                  <a:txBody>
-                    <a:bodyPr/>
-                    <a:lstStyle/>
-                    <a:p>
-                      <a:pPr algn="ctr"/>
-                      <a:r>
-                        <a:rPr sz="1250" b="0" i="0">
-                          <a:solidFill>
-                            <a:srgbClr val="212733"/>
-                          </a:solidFill>
-                          <a:latin typeface="맑은 고딕"/>
-                        </a:rPr>
-                        <a:t>80,371</a:t>
-                      </a:r>
-                    </a:p>
-                  </a:txBody>
-                  <a:tcPr marT="38100" marB="38100" marL="114300" marR="114300" anchor="ctr">
-                    <a:solidFill>
-                      <a:srgbClr val="FBFAF6"/>
-                    </a:solidFill>
-                  </a:tcPr>
-                </a:tc>
-                <a:tc>
-                  <a:txBody>
-                    <a:bodyPr/>
-                    <a:lstStyle/>
-                    <a:p>
-                      <a:pPr algn="ctr"/>
-                      <a:r>
-                        <a:rPr sz="1250" b="0" i="0">
-                          <a:solidFill>
-                            <a:srgbClr val="212733"/>
-                          </a:solidFill>
-                          <a:latin typeface="맑은 고딕"/>
-                        </a:rPr>
-                        <a:t>417</a:t>
-                      </a:r>
-                    </a:p>
-                  </a:txBody>
-                  <a:tcPr marT="38100" marB="38100" marL="114300" marR="114300" anchor="ctr">
-                    <a:solidFill>
-                      <a:srgbClr val="FBFAF6"/>
-                    </a:solidFill>
-                  </a:tcPr>
-                </a:tc>
-                <a:tc>
-                  <a:txBody>
-                    <a:bodyPr/>
-                    <a:lstStyle/>
-                    <a:p>
-                      <a:pPr algn="ctr"/>
-                      <a:r>
-                        <a:rPr sz="1250" b="0" i="0">
-                          <a:solidFill>
-                            <a:srgbClr val="212733"/>
-                          </a:solidFill>
-                          <a:latin typeface="맑은 고딕"/>
-                        </a:rPr>
-                        <a:t>0</a:t>
-                      </a:r>
-                    </a:p>
-                  </a:txBody>
-                  <a:tcPr marT="38100" marB="38100" marL="114300" marR="114300" anchor="ctr">
-                    <a:solidFill>
-                      <a:srgbClr val="FBFAF6"/>
-                    </a:solidFill>
-                  </a:tcPr>
-                </a:tc>
-                <a:tc>
-                  <a:txBody>
-                    <a:bodyPr/>
-                    <a:lstStyle/>
-                    <a:p>
-                      <a:pPr algn="ctr"/>
-                      <a:r>
-                        <a:rPr sz="1250" b="0" i="0">
-                          <a:solidFill>
-                            <a:srgbClr val="212733"/>
-                          </a:solidFill>
-                          <a:latin typeface="맑은 고딕"/>
-                        </a:rPr>
-                        <a:t>80,788</a:t>
-                      </a:r>
-                    </a:p>
-                  </a:txBody>
-                  <a:tcPr marT="38100" marB="38100" marL="114300" marR="114300" anchor="ctr">
-                    <a:solidFill>
-                      <a:srgbClr val="FBFAF6"/>
-                    </a:solidFill>
-                  </a:tcPr>
-                </a:tc>
-              </a:tr>
-              <a:tr h="420624">
-                <a:tc>
-                  <a:txBody>
-                    <a:bodyPr/>
-                    <a:lstStyle/>
-                    <a:p>
-                      <a:pPr algn="l"/>
-                      <a:r>
-                        <a:rPr sz="1250" b="1" i="0">
-                          <a:solidFill>
-                            <a:srgbClr val="212733"/>
-                          </a:solidFill>
-                          <a:latin typeface="맑은 고딕"/>
-                        </a:rPr>
-                        <a:t>CubiCasa5k</a:t>
-                      </a:r>
-                    </a:p>
-                  </a:txBody>
-                  <a:tcPr marT="38100" marB="38100" marL="114300" marR="114300" anchor="ctr">
-                    <a:solidFill>
-                      <a:srgbClr val="FFFFFF"/>
-                    </a:solidFill>
-                  </a:tcPr>
-                </a:tc>
-                <a:tc>
-                  <a:txBody>
-                    <a:bodyPr/>
-                    <a:lstStyle/>
-                    <a:p>
-                      <a:pPr algn="ctr"/>
-                      <a:r>
-                        <a:rPr sz="1250" b="0" i="0">
-                          <a:solidFill>
-                            <a:srgbClr val="212733"/>
-                          </a:solidFill>
-                          <a:latin typeface="맑은 고딕"/>
-                        </a:rPr>
-                        <a:t>3,028</a:t>
-                      </a:r>
-                    </a:p>
-                  </a:txBody>
-                  <a:tcPr marT="38100" marB="38100" marL="114300" marR="114300" anchor="ctr">
-                    <a:solidFill>
-                      <a:srgbClr val="FFFFFF"/>
-                    </a:solidFill>
-                  </a:tcPr>
-                </a:tc>
-                <a:tc>
-                  <a:txBody>
-                    <a:bodyPr/>
-                    <a:lstStyle/>
-                    <a:p>
-                      <a:pPr algn="ctr"/>
-                      <a:r>
-                        <a:rPr sz="1250" b="0" i="0">
-                          <a:solidFill>
-                            <a:srgbClr val="212733"/>
-                          </a:solidFill>
-                          <a:latin typeface="맑은 고딕"/>
-                        </a:rPr>
-                        <a:t>1,964</a:t>
-                      </a:r>
-                    </a:p>
-                  </a:txBody>
-                  <a:tcPr marT="38100" marB="38100" marL="114300" marR="114300" anchor="ctr">
-                    <a:solidFill>
-                      <a:srgbClr val="FFFFFF"/>
-                    </a:solidFill>
-                  </a:tcPr>
-                </a:tc>
-                <a:tc>
-                  <a:txBody>
-                    <a:bodyPr/>
-                    <a:lstStyle/>
-                    <a:p>
-                      <a:pPr algn="ctr"/>
-                      <a:r>
-                        <a:rPr sz="1250" b="0" i="0">
-                          <a:solidFill>
-                            <a:srgbClr val="212733"/>
-                          </a:solidFill>
-                          <a:latin typeface="맑은 고딕"/>
-                        </a:rPr>
-                        <a:t>8</a:t>
-                      </a:r>
-                    </a:p>
-                  </a:txBody>
-                  <a:tcPr marT="38100" marB="38100" marL="114300" marR="114300" anchor="ctr">
-                    <a:solidFill>
-                      <a:srgbClr val="FFFFFF"/>
-                    </a:solidFill>
-                  </a:tcPr>
-                </a:tc>
-                <a:tc>
-                  <a:txBody>
-                    <a:bodyPr/>
-                    <a:lstStyle/>
-                    <a:p>
-                      <a:pPr algn="ctr"/>
-                      <a:r>
-                        <a:rPr sz="1250" b="0" i="0">
-                          <a:solidFill>
-                            <a:srgbClr val="212733"/>
-                          </a:solidFill>
-                          <a:latin typeface="맑은 고딕"/>
-                        </a:rPr>
-                        <a:t>5,000</a:t>
-                      </a:r>
-                    </a:p>
-                  </a:txBody>
-                  <a:tcPr marT="38100" marB="38100" marL="114300" marR="114300" anchor="ctr">
-                    <a:solidFill>
-                      <a:srgbClr val="FFFFFF"/>
-                    </a:solidFill>
-                  </a:tcPr>
-                </a:tc>
-              </a:tr>
-              <a:tr h="420624">
-                <a:tc>
-                  <a:txBody>
-                    <a:bodyPr/>
-                    <a:lstStyle/>
-                    <a:p>
-                      <a:pPr algn="l"/>
-                      <a:r>
-                        <a:rPr sz="1250" b="1" i="0">
-                          <a:solidFill>
-                            <a:srgbClr val="212733"/>
-                          </a:solidFill>
-                          <a:latin typeface="맑은 고딕"/>
-                        </a:rPr>
-                        <a:t>합계</a:t>
-                      </a:r>
-                    </a:p>
-                  </a:txBody>
-                  <a:tcPr marT="38100" marB="38100" marL="114300" marR="114300" anchor="ctr">
-                    <a:solidFill>
-                      <a:srgbClr val="FBFAF6"/>
-                    </a:solidFill>
-                  </a:tcPr>
-                </a:tc>
-                <a:tc>
-                  <a:txBody>
-                    <a:bodyPr/>
-                    <a:lstStyle/>
-                    <a:p>
-                      <a:pPr algn="ctr"/>
-                      <a:r>
-                        <a:rPr sz="1250" b="0" i="0">
-                          <a:solidFill>
-                            <a:srgbClr val="212733"/>
-                          </a:solidFill>
-                          <a:latin typeface="맑은 고딕"/>
-                        </a:rPr>
-                        <a:t>94,320</a:t>
-                      </a:r>
-                    </a:p>
-                  </a:txBody>
-                  <a:tcPr marT="38100" marB="38100" marL="114300" marR="114300" anchor="ctr">
-                    <a:solidFill>
-                      <a:srgbClr val="FBFAF6"/>
-                    </a:solidFill>
-                  </a:tcPr>
-                </a:tc>
-                <a:tc>
-                  <a:txBody>
-                    <a:bodyPr/>
-                    <a:lstStyle/>
-                    <a:p>
-                      <a:pPr algn="ctr"/>
-                      <a:r>
-                        <a:rPr sz="1250" b="0" i="0">
-                          <a:solidFill>
-                            <a:srgbClr val="212733"/>
-                          </a:solidFill>
-                          <a:latin typeface="맑은 고딕"/>
-                        </a:rPr>
-                        <a:t>11,793</a:t>
-                      </a:r>
-                    </a:p>
-                  </a:txBody>
-                  <a:tcPr marT="38100" marB="38100" marL="114300" marR="114300" anchor="ctr">
-                    <a:solidFill>
-                      <a:srgbClr val="FBFAF6"/>
-                    </a:solidFill>
-                  </a:tcPr>
-                </a:tc>
-                <a:tc>
-                  <a:txBody>
-                    <a:bodyPr/>
-                    <a:lstStyle/>
-                    <a:p>
-                      <a:pPr algn="ctr"/>
-                      <a:r>
-                        <a:rPr sz="1250" b="0" i="0">
-                          <a:solidFill>
-                            <a:srgbClr val="212733"/>
-                          </a:solidFill>
-                          <a:latin typeface="맑은 고딕"/>
-                        </a:rPr>
-                        <a:t>22,894</a:t>
-                      </a:r>
-                    </a:p>
-                  </a:txBody>
-                  <a:tcPr marT="38100" marB="38100" marL="114300" marR="114300" anchor="ctr">
-                    <a:solidFill>
-                      <a:srgbClr val="FBFAF6"/>
-                    </a:solidFill>
-                  </a:tcPr>
-                </a:tc>
-                <a:tc>
-                  <a:txBody>
-                    <a:bodyPr/>
-                    <a:lstStyle/>
-                    <a:p>
-                      <a:pPr algn="ctr"/>
-                      <a:r>
-                        <a:rPr sz="1250" b="0" i="0">
-                          <a:solidFill>
-                            <a:srgbClr val="212733"/>
-                          </a:solidFill>
-                          <a:latin typeface="맑은 고딕"/>
-                        </a:rPr>
-                        <a:t>129,007</a:t>
-                      </a:r>
-                    </a:p>
-                  </a:txBody>
-                  <a:tcPr marT="38100" marB="38100" marL="114300" marR="114300" anchor="ctr">
-                    <a:solidFill>
-                      <a:srgbClr val="FBFAF6"/>
-                    </a:solidFill>
-                  </a:tcPr>
-                </a:tc>
-              </a:tr>
-            </a:tbl>
-          </a:graphicData>
-        </a:graphic>
-      </p:graphicFrame>
-      <p:sp>
-        <p:nvSpPr>
-          <p:cNvPr id="12" name="TextBox 11"/>
-          <p:cNvSpPr txBox="1"/>
-          <p:nvPr/>
-        </p:nvSpPr>
-        <p:spPr>
-          <a:xfrm>
-            <a:off x="731520" y="4846320"/>
-            <a:ext cx="10698480" cy="1463040"/>
-          </a:xfrm>
-          <a:prstGeom prst="rect">
-            <a:avLst/>
-          </a:prstGeom>
-          <a:noFill/>
-        </p:spPr>
-        <p:txBody>
-          <a:bodyPr wrap="square" anchor="t">
-            <a:spAutoFit/>
-          </a:bodyPr>
-          <a:lstStyle/>
-          <a:p>
-            <a:pPr algn="l">
-              <a:spcBef>
-                <a:spcPts val="0"/>
-              </a:spcBef>
-              <a:spcAft>
-                <a:spcPts val="700"/>
-              </a:spcAft>
-            </a:pPr>
-            <a:r>
-              <a:rPr sz="1400" b="1" i="0" spc="100">
-                <a:solidFill>
-                  <a:srgbClr val="C2A14D"/>
-                </a:solidFill>
-                <a:latin typeface="맑은 고딕"/>
-              </a:rPr>
-              <a:t>원칙</a:t>
-            </a:r>
-          </a:p>
-          <a:p>
-            <a:pPr algn="l">
-              <a:spcBef>
-                <a:spcPts val="0"/>
-              </a:spcBef>
-              <a:spcAft>
-                <a:spcPts val="700"/>
-              </a:spcAft>
-            </a:pPr>
-            <a:r>
-              <a:rPr sz="1400" b="1" i="0">
-                <a:solidFill>
-                  <a:srgbClr val="C2A14D"/>
-                </a:solidFill>
-                <a:latin typeface="맑은 고딕"/>
-              </a:rPr>
-              <a:t>—  </a:t>
-            </a:r>
-            <a:r>
-              <a:rPr sz="1400" b="0" i="0">
-                <a:solidFill>
-                  <a:srgbClr val="212733"/>
-                </a:solidFill>
-                <a:latin typeface="맑은 고딕"/>
-              </a:rPr>
-              <a:t>‘보정필요’ = 버리는 게 아니라 살릴 수 있는 데이터 — 자동 재변환 + 사람 보정으로 사용 승급</a:t>
-            </a:r>
-          </a:p>
-          <a:p>
-            <a:pPr algn="l">
-              <a:spcBef>
-                <a:spcPts val="0"/>
-              </a:spcBef>
-              <a:spcAft>
-                <a:spcPts val="700"/>
-              </a:spcAft>
-            </a:pPr>
-            <a:r>
-              <a:rPr sz="1400" b="1" i="0">
-                <a:solidFill>
-                  <a:srgbClr val="C2A14D"/>
-                </a:solidFill>
-                <a:latin typeface="맑은 고딕"/>
-              </a:rPr>
-              <a:t>—  </a:t>
-            </a:r>
-            <a:r>
-              <a:rPr sz="1400" b="0" i="0">
-                <a:solidFill>
-                  <a:srgbClr val="212733"/>
-                </a:solidFill>
-                <a:latin typeface="맑은 고딕"/>
-              </a:rPr>
-              <a:t>AI-Hub는 도면 1장 = 여러 세대 → 도면수 ≠ 세대수(세대 = 실제 추출된 그래프 수)</a:t>
-            </a:r>
-          </a:p>
-        </p:txBody>
-      </p:sp>
-    </p:spTree>
-  </p:cSld>
-  <p:clrMapOvr>
-    <a:masterClrMapping/>
-  </p:clrMapOvr>
-</p:sld>
-</file>
-
-<file path=ppt/slides/slide7.xml><?xml version="1.0" encoding="utf-8"?>
-<p:sld xmlns:a="http://schemas.openxmlformats.org/drawingml/2006/main" xmlns:p="http://schemas.openxmlformats.org/presentationml/2006/main" xmlns:r="http://schemas.openxmlformats.org/officeDocument/2006/relationships">
-  <p:cSld>
-    <p:spTree>
-      <p:nvGrpSpPr>
-        <p:cNvPr id="1" name=""/>
-        <p:cNvGrpSpPr/>
-        <p:nvPr/>
-      </p:nvGrpSpPr>
-      <p:grpSpPr/>
-      <p:sp>
-        <p:nvSpPr>
-          <p:cNvPr id="2" name="Rectangle 1"/>
-          <p:cNvSpPr/>
-          <p:nvPr/>
-        </p:nvSpPr>
-        <p:spPr>
-          <a:xfrm>
-            <a:off x="0" y="0"/>
-            <a:ext cx="12191695" cy="6858000"/>
-          </a:xfrm>
-          <a:prstGeom prst="rect">
-            <a:avLst/>
-          </a:prstGeom>
-          <a:solidFill>
-            <a:srgbClr val="FBFAF6"/>
-          </a:solidFill>
-          <a:ln>
-            <a:noFill/>
-          </a:ln>
-          <a:effectLst/>
-        </p:spPr>
-        <p:style>
-          <a:lnRef idx="1">
-            <a:schemeClr val="accent1"/>
-          </a:lnRef>
-          <a:fillRef idx="3">
-            <a:schemeClr val="accent1"/>
-          </a:fillRef>
-          <a:effectRef idx="2">
-            <a:schemeClr val="accent1"/>
-          </a:effectRef>
-          <a:fontRef idx="minor">
-            <a:schemeClr val="lt1"/>
-          </a:fontRef>
-        </p:style>
-        <p:txBody>
-          <a:bodyPr rtlCol="0" anchor="ctr"/>
-          <a:lstStyle/>
-          <a:p>
-            <a:pPr algn="ctr"/>
-          </a:p>
-        </p:txBody>
-      </p:sp>
-      <p:sp>
-        <p:nvSpPr>
-          <p:cNvPr id="3" name="Rectangle 2"/>
-          <p:cNvSpPr/>
-          <p:nvPr/>
-        </p:nvSpPr>
-        <p:spPr>
-          <a:xfrm>
-            <a:off x="548640" y="566928"/>
-            <a:ext cx="41148" cy="566928"/>
-          </a:xfrm>
-          <a:prstGeom prst="rect">
-            <a:avLst/>
-          </a:prstGeom>
-          <a:solidFill>
-            <a:srgbClr val="C2A14D"/>
-          </a:solidFill>
-          <a:ln>
-            <a:noFill/>
-          </a:ln>
-          <a:effectLst/>
-        </p:spPr>
-        <p:style>
-          <a:lnRef idx="1">
-            <a:schemeClr val="accent1"/>
-          </a:lnRef>
-          <a:fillRef idx="3">
-            <a:schemeClr val="accent1"/>
-          </a:fillRef>
-          <a:effectRef idx="2">
-            <a:schemeClr val="accent1"/>
-          </a:effectRef>
-          <a:fontRef idx="minor">
-            <a:schemeClr val="lt1"/>
-          </a:fontRef>
-        </p:style>
-        <p:txBody>
-          <a:bodyPr rtlCol="0" anchor="ctr"/>
-          <a:lstStyle/>
-          <a:p>
-            <a:pPr algn="ctr"/>
-          </a:p>
-        </p:txBody>
-      </p:sp>
-      <p:sp>
-        <p:nvSpPr>
-          <p:cNvPr id="4" name="TextBox 3"/>
-          <p:cNvSpPr txBox="1"/>
-          <p:nvPr/>
-        </p:nvSpPr>
-        <p:spPr>
-          <a:xfrm>
-            <a:off x="749808" y="502920"/>
-            <a:ext cx="10058400" cy="274320"/>
-          </a:xfrm>
-          <a:prstGeom prst="rect">
-            <a:avLst/>
-          </a:prstGeom>
-          <a:noFill/>
-        </p:spPr>
-        <p:txBody>
-          <a:bodyPr wrap="square" anchor="t">
-            <a:spAutoFit/>
-          </a:bodyPr>
-          <a:lstStyle/>
-          <a:p>
-            <a:pPr algn="l">
-              <a:spcBef>
-                <a:spcPts val="0"/>
-              </a:spcBef>
-              <a:spcAft>
-                <a:spcPts val="500"/>
-              </a:spcAft>
-            </a:pPr>
-            <a:r>
-              <a:rPr sz="1100" b="1" i="0" spc="220">
-                <a:solidFill>
-                  <a:srgbClr val="C2A14D"/>
-                </a:solidFill>
-                <a:latin typeface="맑은 고딕"/>
-              </a:rPr>
-              <a:t>DATASET</a:t>
-            </a:r>
-          </a:p>
-        </p:txBody>
-      </p:sp>
-      <p:sp>
-        <p:nvSpPr>
-          <p:cNvPr id="5" name="TextBox 4"/>
-          <p:cNvSpPr txBox="1"/>
-          <p:nvPr/>
-        </p:nvSpPr>
-        <p:spPr>
-          <a:xfrm>
-            <a:off x="731520" y="713232"/>
-            <a:ext cx="10607040" cy="548640"/>
-          </a:xfrm>
-          <a:prstGeom prst="rect">
-            <a:avLst/>
-          </a:prstGeom>
-          <a:noFill/>
-        </p:spPr>
-        <p:txBody>
-          <a:bodyPr wrap="square" anchor="t">
-            <a:spAutoFit/>
-          </a:bodyPr>
-          <a:lstStyle/>
-          <a:p>
-            <a:pPr algn="l">
-              <a:spcBef>
-                <a:spcPts val="0"/>
-              </a:spcBef>
-              <a:spcAft>
-                <a:spcPts val="500"/>
-              </a:spcAft>
-            </a:pPr>
-            <a:r>
-              <a:rPr sz="2400" b="1" i="0">
-                <a:solidFill>
-                  <a:srgbClr val="212733"/>
-                </a:solidFill>
-                <a:latin typeface="맑은 고딕"/>
-              </a:rPr>
-              <a:t>데이터셋 구축 ③ — AI-Hub 처리 파이프라인</a:t>
-            </a:r>
-          </a:p>
-        </p:txBody>
-      </p:sp>
-      <p:cxnSp>
-        <p:nvCxnSpPr>
-          <p:cNvPr id="6" name="Connector 5"/>
-          <p:cNvCxnSpPr/>
-          <p:nvPr/>
-        </p:nvCxnSpPr>
-        <p:spPr>
-          <a:xfrm>
-            <a:off x="548640" y="1389888"/>
-            <a:ext cx="11091672" cy="0"/>
-          </a:xfrm>
-          <a:prstGeom prst="bentConnector3">
-            <a:avLst/>
-          </a:prstGeom>
-          <a:ln w="12700">
-            <a:solidFill>
-              <a:srgbClr val="E7E3D8"/>
-            </a:solidFill>
-          </a:ln>
-          <a:effectLst/>
-        </p:spPr>
-        <p:style>
-          <a:lnRef idx="2">
-            <a:schemeClr val="accent1"/>
-          </a:lnRef>
-          <a:fillRef idx="0">
-            <a:schemeClr val="accent1"/>
-          </a:fillRef>
-          <a:effectRef idx="1">
-            <a:schemeClr val="accent1"/>
-          </a:effectRef>
-          <a:fontRef idx="minor">
-            <a:schemeClr val="tx1"/>
-          </a:fontRef>
-        </p:style>
-      </p:cxnSp>
-      <p:cxnSp>
-        <p:nvCxnSpPr>
-          <p:cNvPr id="7" name="Connector 6"/>
-          <p:cNvCxnSpPr/>
-          <p:nvPr/>
-        </p:nvCxnSpPr>
-        <p:spPr>
-          <a:xfrm>
-            <a:off x="548640" y="6400800"/>
-            <a:ext cx="11091672" cy="0"/>
-          </a:xfrm>
-          <a:prstGeom prst="bentConnector3">
-            <a:avLst/>
-          </a:prstGeom>
-          <a:ln w="9525">
-            <a:solidFill>
-              <a:srgbClr val="E7E3D8"/>
-            </a:solidFill>
-          </a:ln>
-          <a:effectLst/>
-        </p:spPr>
-        <p:style>
-          <a:lnRef idx="2">
-            <a:schemeClr val="accent1"/>
-          </a:lnRef>
-          <a:fillRef idx="0">
-            <a:schemeClr val="accent1"/>
-          </a:fillRef>
-          <a:effectRef idx="1">
-            <a:schemeClr val="accent1"/>
-          </a:effectRef>
-          <a:fontRef idx="minor">
-            <a:schemeClr val="tx1"/>
-          </a:fontRef>
-        </p:style>
-      </p:cxnSp>
-      <p:sp>
-        <p:nvSpPr>
-          <p:cNvPr id="8" name="TextBox 7"/>
-          <p:cNvSpPr txBox="1"/>
-          <p:nvPr/>
-        </p:nvSpPr>
-        <p:spPr>
-          <a:xfrm>
-            <a:off x="548640" y="6446520"/>
-            <a:ext cx="8229600" cy="274320"/>
-          </a:xfrm>
-          <a:prstGeom prst="rect">
-            <a:avLst/>
-          </a:prstGeom>
-          <a:noFill/>
-        </p:spPr>
-        <p:txBody>
-          <a:bodyPr wrap="square" anchor="t">
-            <a:spAutoFit/>
-          </a:bodyPr>
-          <a:lstStyle/>
-          <a:p>
-            <a:pPr algn="l">
-              <a:spcBef>
-                <a:spcPts val="0"/>
-              </a:spcBef>
-              <a:spcAft>
-                <a:spcPts val="500"/>
-              </a:spcAft>
-            </a:pPr>
-            <a:r>
-              <a:rPr sz="850" b="0" i="0" spc="60">
-                <a:solidFill>
-                  <a:srgbClr val="8C919C"/>
-                </a:solidFill>
-                <a:latin typeface="맑은 고딕"/>
-              </a:rPr>
-              <a:t>plan2graph · 한국형 소버린 평면도 생성 AI</a:t>
-            </a:r>
-          </a:p>
-        </p:txBody>
-      </p:sp>
-      <p:sp>
-        <p:nvSpPr>
-          <p:cNvPr id="9" name="TextBox 8"/>
-          <p:cNvSpPr txBox="1"/>
-          <p:nvPr/>
-        </p:nvSpPr>
-        <p:spPr>
-          <a:xfrm>
-            <a:off x="10607040" y="6446520"/>
-            <a:ext cx="1033271" cy="274320"/>
-          </a:xfrm>
-          <a:prstGeom prst="rect">
-            <a:avLst/>
-          </a:prstGeom>
-          <a:noFill/>
-        </p:spPr>
-        <p:txBody>
-          <a:bodyPr wrap="square" anchor="t">
-            <a:spAutoFit/>
-          </a:bodyPr>
-          <a:lstStyle/>
-          <a:p>
-            <a:pPr algn="r">
-              <a:spcBef>
-                <a:spcPts val="0"/>
-              </a:spcBef>
-              <a:spcAft>
-                <a:spcPts val="500"/>
-              </a:spcAft>
-            </a:pPr>
-            <a:r>
-              <a:rPr sz="850" b="1" i="0">
-                <a:solidFill>
-                  <a:srgbClr val="C2A14D"/>
-                </a:solidFill>
-                <a:latin typeface="맑은 고딕"/>
-              </a:rPr>
-              <a:t>07</a:t>
-            </a:r>
-          </a:p>
-        </p:txBody>
-      </p:sp>
-      <p:sp>
-        <p:nvSpPr>
-          <p:cNvPr id="10" name="Rounded Rectangle 9"/>
-          <p:cNvSpPr/>
-          <p:nvPr/>
-        </p:nvSpPr>
-        <p:spPr>
-          <a:xfrm>
-            <a:off x="566928" y="1737360"/>
-            <a:ext cx="1517904" cy="841248"/>
-          </a:xfrm>
-          <a:prstGeom prst="roundRect">
-            <a:avLst/>
-          </a:prstGeom>
-          <a:solidFill>
-            <a:srgbClr val="FFFFFF"/>
-          </a:solidFill>
-          <a:ln w="12700">
-            <a:solidFill>
-              <a:srgbClr val="E7E3D8"/>
-            </a:solidFill>
-          </a:ln>
-          <a:effectLst/>
-          <a:effectLst>
-            <a:outerShdw blurRad="90000" dist="38000" dir="5400000" rotWithShape="0">
-              <a:srgbClr val="0B0E14">
-                <a:alpha val="22000"/>
-              </a:srgbClr>
-            </a:outerShdw>
-          </a:effectLst>
-        </p:spPr>
-        <p:style>
-          <a:lnRef idx="1">
-            <a:schemeClr val="accent1"/>
-          </a:lnRef>
-          <a:fillRef idx="3">
-            <a:schemeClr val="accent1"/>
-          </a:fillRef>
-          <a:effectRef idx="2">
-            <a:schemeClr val="accent1"/>
-          </a:effectRef>
-          <a:fontRef idx="minor">
-            <a:schemeClr val="lt1"/>
-          </a:fontRef>
-        </p:style>
-        <p:txBody>
-          <a:bodyPr rtlCol="0" anchor="ctr" wrap="square"/>
-          <a:lstStyle/>
-          <a:p>
-            <a:pPr algn="ctr"/>
-            <a:r>
-              <a:rPr sz="1100" b="1" i="0">
-                <a:solidFill>
-                  <a:srgbClr val="212733"/>
-                </a:solidFill>
-                <a:latin typeface="맑은 고딕"/>
-              </a:rPr>
-              <a:t>원본 PNG</a:t>
-            </a:r>
-          </a:p>
-          <a:p>
-            <a:pPr algn="ctr"/>
-            <a:r>
-              <a:rPr sz="1100" b="0" i="0">
-                <a:solidFill>
-                  <a:srgbClr val="8C919C"/>
-                </a:solidFill>
-                <a:latin typeface="맑은 고딕"/>
-              </a:rPr>
-              <a:t>라벨</a:t>
-            </a:r>
-          </a:p>
-        </p:txBody>
-      </p:sp>
-      <p:sp>
-        <p:nvSpPr>
-          <p:cNvPr id="11" name="Rectangle 10"/>
-          <p:cNvSpPr/>
-          <p:nvPr/>
-        </p:nvSpPr>
-        <p:spPr>
-          <a:xfrm>
-            <a:off x="566928" y="1737360"/>
-            <a:ext cx="1517904" cy="45720"/>
-          </a:xfrm>
-          <a:prstGeom prst="rect">
-            <a:avLst/>
-          </a:prstGeom>
-          <a:solidFill>
-            <a:srgbClr val="C2A14D"/>
-          </a:solidFill>
-          <a:ln>
-            <a:noFill/>
-          </a:ln>
-          <a:effectLst/>
-        </p:spPr>
-        <p:style>
-          <a:lnRef idx="1">
-            <a:schemeClr val="accent1"/>
-          </a:lnRef>
-          <a:fillRef idx="3">
-            <a:schemeClr val="accent1"/>
-          </a:fillRef>
-          <a:effectRef idx="2">
-            <a:schemeClr val="accent1"/>
-          </a:effectRef>
-          <a:fontRef idx="minor">
-            <a:schemeClr val="lt1"/>
-          </a:fontRef>
-        </p:style>
-        <p:txBody>
-          <a:bodyPr rtlCol="0" anchor="ctr"/>
-          <a:lstStyle/>
-          <a:p>
-            <a:pPr algn="ctr"/>
-          </a:p>
-        </p:txBody>
-      </p:sp>
-      <p:sp>
-        <p:nvSpPr>
-          <p:cNvPr id="12" name="TextBox 11"/>
-          <p:cNvSpPr txBox="1"/>
-          <p:nvPr/>
-        </p:nvSpPr>
-        <p:spPr>
-          <a:xfrm>
-            <a:off x="2084832" y="1737360"/>
-            <a:ext cx="274320" cy="841248"/>
-          </a:xfrm>
-          <a:prstGeom prst="rect">
-            <a:avLst/>
-          </a:prstGeom>
-          <a:noFill/>
-        </p:spPr>
-        <p:txBody>
-          <a:bodyPr wrap="none" anchor="ctr">
-            <a:spAutoFit/>
-          </a:bodyPr>
-          <a:lstStyle/>
-          <a:p>
-            <a:pPr algn="ctr"/>
-            <a:r>
-              <a:rPr sz="2000" b="1" i="0">
-                <a:solidFill>
-                  <a:srgbClr val="C2A14D"/>
-                </a:solidFill>
-                <a:latin typeface="맑은 고딕"/>
-              </a:rPr>
-              <a:t>›</a:t>
-            </a:r>
-          </a:p>
-        </p:txBody>
-      </p:sp>
-      <p:sp>
-        <p:nvSpPr>
-          <p:cNvPr id="13" name="Rounded Rectangle 12"/>
-          <p:cNvSpPr/>
-          <p:nvPr/>
-        </p:nvSpPr>
-        <p:spPr>
-          <a:xfrm>
-            <a:off x="2359152" y="1737360"/>
-            <a:ext cx="1517904" cy="841248"/>
-          </a:xfrm>
-          <a:prstGeom prst="roundRect">
-            <a:avLst/>
-          </a:prstGeom>
-          <a:solidFill>
-            <a:srgbClr val="FFFFFF"/>
-          </a:solidFill>
-          <a:ln w="12700">
-            <a:solidFill>
-              <a:srgbClr val="E7E3D8"/>
-            </a:solidFill>
-          </a:ln>
-          <a:effectLst/>
-          <a:effectLst>
-            <a:outerShdw blurRad="90000" dist="38000" dir="5400000" rotWithShape="0">
-              <a:srgbClr val="0B0E14">
-                <a:alpha val="22000"/>
-              </a:srgbClr>
-            </a:outerShdw>
-          </a:effectLst>
-        </p:spPr>
-        <p:style>
-          <a:lnRef idx="1">
-            <a:schemeClr val="accent1"/>
-          </a:lnRef>
-          <a:fillRef idx="3">
-            <a:schemeClr val="accent1"/>
-          </a:fillRef>
-          <a:effectRef idx="2">
-            <a:schemeClr val="accent1"/>
-          </a:effectRef>
-          <a:fontRef idx="minor">
-            <a:schemeClr val="lt1"/>
-          </a:fontRef>
-        </p:style>
-        <p:txBody>
-          <a:bodyPr rtlCol="0" anchor="ctr" wrap="square"/>
-          <a:lstStyle/>
-          <a:p>
-            <a:pPr algn="ctr"/>
-            <a:r>
-              <a:rPr sz="1100" b="1" i="0">
-                <a:solidFill>
-                  <a:srgbClr val="212733"/>
-                </a:solidFill>
-                <a:latin typeface="맑은 고딕"/>
-              </a:rPr>
-              <a:t>V2V / YOLO</a:t>
-            </a:r>
-          </a:p>
-          <a:p>
-            <a:pPr algn="ctr"/>
-            <a:r>
-              <a:rPr sz="1100" b="0" i="0">
-                <a:solidFill>
-                  <a:srgbClr val="8C919C"/>
-                </a:solidFill>
-                <a:latin typeface="맑은 고딕"/>
-              </a:rPr>
-              <a:t>검출</a:t>
-            </a:r>
-          </a:p>
-        </p:txBody>
-      </p:sp>
-      <p:sp>
-        <p:nvSpPr>
-          <p:cNvPr id="14" name="Rectangle 13"/>
-          <p:cNvSpPr/>
-          <p:nvPr/>
-        </p:nvSpPr>
-        <p:spPr>
-          <a:xfrm>
-            <a:off x="2359152" y="1737360"/>
-            <a:ext cx="1517904" cy="45720"/>
-          </a:xfrm>
-          <a:prstGeom prst="rect">
-            <a:avLst/>
-          </a:prstGeom>
-          <a:solidFill>
-            <a:srgbClr val="C2A14D"/>
-          </a:solidFill>
-          <a:ln>
-            <a:noFill/>
-          </a:ln>
-          <a:effectLst/>
-        </p:spPr>
-        <p:style>
-          <a:lnRef idx="1">
-            <a:schemeClr val="accent1"/>
-          </a:lnRef>
-          <a:fillRef idx="3">
-            <a:schemeClr val="accent1"/>
-          </a:fillRef>
-          <a:effectRef idx="2">
-            <a:schemeClr val="accent1"/>
-          </a:effectRef>
-          <a:fontRef idx="minor">
-            <a:schemeClr val="lt1"/>
-          </a:fontRef>
-        </p:style>
-        <p:txBody>
-          <a:bodyPr rtlCol="0" anchor="ctr"/>
-          <a:lstStyle/>
-          <a:p>
-            <a:pPr algn="ctr"/>
-          </a:p>
-        </p:txBody>
-      </p:sp>
-      <p:sp>
-        <p:nvSpPr>
-          <p:cNvPr id="15" name="TextBox 14"/>
-          <p:cNvSpPr txBox="1"/>
-          <p:nvPr/>
-        </p:nvSpPr>
-        <p:spPr>
-          <a:xfrm>
-            <a:off x="3877056" y="1737360"/>
-            <a:ext cx="274320" cy="841248"/>
-          </a:xfrm>
-          <a:prstGeom prst="rect">
-            <a:avLst/>
-          </a:prstGeom>
-          <a:noFill/>
-        </p:spPr>
-        <p:txBody>
-          <a:bodyPr wrap="none" anchor="ctr">
-            <a:spAutoFit/>
-          </a:bodyPr>
-          <a:lstStyle/>
-          <a:p>
-            <a:pPr algn="ctr"/>
-            <a:r>
-              <a:rPr sz="2000" b="1" i="0">
-                <a:solidFill>
-                  <a:srgbClr val="C2A14D"/>
-                </a:solidFill>
-                <a:latin typeface="맑은 고딕"/>
-              </a:rPr>
-              <a:t>›</a:t>
-            </a:r>
-          </a:p>
-        </p:txBody>
-      </p:sp>
-      <p:sp>
-        <p:nvSpPr>
-          <p:cNvPr id="16" name="Rounded Rectangle 15"/>
-          <p:cNvSpPr/>
-          <p:nvPr/>
-        </p:nvSpPr>
-        <p:spPr>
-          <a:xfrm>
-            <a:off x="4151376" y="1737360"/>
-            <a:ext cx="1517904" cy="841248"/>
-          </a:xfrm>
-          <a:prstGeom prst="roundRect">
-            <a:avLst/>
-          </a:prstGeom>
-          <a:solidFill>
-            <a:srgbClr val="FFFFFF"/>
-          </a:solidFill>
-          <a:ln w="12700">
-            <a:solidFill>
-              <a:srgbClr val="E7E3D8"/>
-            </a:solidFill>
-          </a:ln>
-          <a:effectLst/>
-          <a:effectLst>
-            <a:outerShdw blurRad="90000" dist="38000" dir="5400000" rotWithShape="0">
-              <a:srgbClr val="0B0E14">
-                <a:alpha val="22000"/>
-              </a:srgbClr>
-            </a:outerShdw>
-          </a:effectLst>
-        </p:spPr>
-        <p:style>
-          <a:lnRef idx="1">
-            <a:schemeClr val="accent1"/>
-          </a:lnRef>
-          <a:fillRef idx="3">
-            <a:schemeClr val="accent1"/>
-          </a:fillRef>
-          <a:effectRef idx="2">
-            <a:schemeClr val="accent1"/>
-          </a:effectRef>
-          <a:fontRef idx="minor">
-            <a:schemeClr val="lt1"/>
-          </a:fontRef>
-        </p:style>
-        <p:txBody>
-          <a:bodyPr rtlCol="0" anchor="ctr" wrap="square"/>
-          <a:lstStyle/>
-          <a:p>
-            <a:pPr algn="ctr"/>
-            <a:r>
-              <a:rPr sz="1100" b="1" i="0">
-                <a:solidFill>
-                  <a:srgbClr val="212733"/>
-                </a:solidFill>
-                <a:latin typeface="맑은 고딕"/>
-              </a:rPr>
-              <a:t>SVG 변환</a:t>
-            </a:r>
-          </a:p>
-          <a:p>
-            <a:pPr algn="ctr"/>
-            <a:r>
-              <a:rPr sz="1100" b="0" i="0">
-                <a:solidFill>
-                  <a:srgbClr val="8C919C"/>
-                </a:solidFill>
-                <a:latin typeface="맑은 고딕"/>
-              </a:rPr>
-              <a:t>완전기하</a:t>
-            </a:r>
-          </a:p>
-        </p:txBody>
-      </p:sp>
-      <p:sp>
-        <p:nvSpPr>
-          <p:cNvPr id="17" name="Rectangle 16"/>
-          <p:cNvSpPr/>
-          <p:nvPr/>
-        </p:nvSpPr>
-        <p:spPr>
-          <a:xfrm>
-            <a:off x="4151376" y="1737360"/>
-            <a:ext cx="1517904" cy="45720"/>
-          </a:xfrm>
-          <a:prstGeom prst="rect">
-            <a:avLst/>
-          </a:prstGeom>
-          <a:solidFill>
-            <a:srgbClr val="C2A14D"/>
-          </a:solidFill>
-          <a:ln>
-            <a:noFill/>
-          </a:ln>
-          <a:effectLst/>
-        </p:spPr>
-        <p:style>
-          <a:lnRef idx="1">
-            <a:schemeClr val="accent1"/>
-          </a:lnRef>
-          <a:fillRef idx="3">
-            <a:schemeClr val="accent1"/>
-          </a:fillRef>
-          <a:effectRef idx="2">
-            <a:schemeClr val="accent1"/>
-          </a:effectRef>
-          <a:fontRef idx="minor">
-            <a:schemeClr val="lt1"/>
-          </a:fontRef>
-        </p:style>
-        <p:txBody>
-          <a:bodyPr rtlCol="0" anchor="ctr"/>
-          <a:lstStyle/>
-          <a:p>
-            <a:pPr algn="ctr"/>
-          </a:p>
-        </p:txBody>
-      </p:sp>
-      <p:sp>
-        <p:nvSpPr>
-          <p:cNvPr id="18" name="TextBox 17"/>
-          <p:cNvSpPr txBox="1"/>
-          <p:nvPr/>
-        </p:nvSpPr>
-        <p:spPr>
-          <a:xfrm>
-            <a:off x="5669280" y="1737360"/>
-            <a:ext cx="274320" cy="841248"/>
-          </a:xfrm>
-          <a:prstGeom prst="rect">
-            <a:avLst/>
-          </a:prstGeom>
-          <a:noFill/>
-        </p:spPr>
-        <p:txBody>
-          <a:bodyPr wrap="none" anchor="ctr">
-            <a:spAutoFit/>
-          </a:bodyPr>
-          <a:lstStyle/>
-          <a:p>
-            <a:pPr algn="ctr"/>
-            <a:r>
-              <a:rPr sz="2000" b="1" i="0">
-                <a:solidFill>
-                  <a:srgbClr val="C2A14D"/>
-                </a:solidFill>
-                <a:latin typeface="맑은 고딕"/>
-              </a:rPr>
-              <a:t>›</a:t>
-            </a:r>
-          </a:p>
-        </p:txBody>
-      </p:sp>
-      <p:sp>
-        <p:nvSpPr>
-          <p:cNvPr id="19" name="Rounded Rectangle 18"/>
-          <p:cNvSpPr/>
-          <p:nvPr/>
-        </p:nvSpPr>
-        <p:spPr>
-          <a:xfrm>
-            <a:off x="5943600" y="1737360"/>
-            <a:ext cx="1517904" cy="841248"/>
-          </a:xfrm>
-          <a:prstGeom prst="roundRect">
-            <a:avLst/>
-          </a:prstGeom>
-          <a:solidFill>
-            <a:srgbClr val="FFFFFF"/>
-          </a:solidFill>
-          <a:ln w="12700">
-            <a:solidFill>
-              <a:srgbClr val="E7E3D8"/>
-            </a:solidFill>
-          </a:ln>
-          <a:effectLst/>
-          <a:effectLst>
-            <a:outerShdw blurRad="90000" dist="38000" dir="5400000" rotWithShape="0">
-              <a:srgbClr val="0B0E14">
-                <a:alpha val="22000"/>
-              </a:srgbClr>
-            </a:outerShdw>
-          </a:effectLst>
-        </p:spPr>
-        <p:style>
-          <a:lnRef idx="1">
-            <a:schemeClr val="accent1"/>
-          </a:lnRef>
-          <a:fillRef idx="3">
-            <a:schemeClr val="accent1"/>
-          </a:fillRef>
-          <a:effectRef idx="2">
-            <a:schemeClr val="accent1"/>
-          </a:effectRef>
-          <a:fontRef idx="minor">
-            <a:schemeClr val="lt1"/>
-          </a:fontRef>
-        </p:style>
-        <p:txBody>
-          <a:bodyPr rtlCol="0" anchor="ctr" wrap="square"/>
-          <a:lstStyle/>
-          <a:p>
-            <a:pPr algn="ctr"/>
-            <a:r>
-              <a:rPr sz="1100" b="1" i="0">
-                <a:solidFill>
-                  <a:srgbClr val="212733"/>
-                </a:solidFill>
-                <a:latin typeface="맑은 고딕"/>
-              </a:rPr>
-              <a:t>사람 보정</a:t>
-            </a:r>
-          </a:p>
-          <a:p>
-            <a:pPr algn="ctr"/>
-            <a:r>
-              <a:rPr sz="1100" b="0" i="0">
-                <a:solidFill>
-                  <a:srgbClr val="8C919C"/>
-                </a:solidFill>
-                <a:latin typeface="맑은 고딕"/>
-              </a:rPr>
-              <a:t>알바</a:t>
-            </a:r>
-          </a:p>
-        </p:txBody>
-      </p:sp>
-      <p:sp>
-        <p:nvSpPr>
-          <p:cNvPr id="20" name="Rectangle 19"/>
-          <p:cNvSpPr/>
-          <p:nvPr/>
-        </p:nvSpPr>
-        <p:spPr>
-          <a:xfrm>
-            <a:off x="5943600" y="1737360"/>
-            <a:ext cx="1517904" cy="45720"/>
-          </a:xfrm>
-          <a:prstGeom prst="rect">
-            <a:avLst/>
-          </a:prstGeom>
-          <a:solidFill>
-            <a:srgbClr val="C2A14D"/>
-          </a:solidFill>
-          <a:ln>
-            <a:noFill/>
-          </a:ln>
-          <a:effectLst/>
-        </p:spPr>
-        <p:style>
-          <a:lnRef idx="1">
-            <a:schemeClr val="accent1"/>
-          </a:lnRef>
-          <a:fillRef idx="3">
-            <a:schemeClr val="accent1"/>
-          </a:fillRef>
-          <a:effectRef idx="2">
-            <a:schemeClr val="accent1"/>
-          </a:effectRef>
-          <a:fontRef idx="minor">
-            <a:schemeClr val="lt1"/>
-          </a:fontRef>
-        </p:style>
-        <p:txBody>
-          <a:bodyPr rtlCol="0" anchor="ctr"/>
-          <a:lstStyle/>
-          <a:p>
-            <a:pPr algn="ctr"/>
-          </a:p>
-        </p:txBody>
-      </p:sp>
-      <p:sp>
-        <p:nvSpPr>
-          <p:cNvPr id="21" name="TextBox 20"/>
-          <p:cNvSpPr txBox="1"/>
-          <p:nvPr/>
-        </p:nvSpPr>
-        <p:spPr>
-          <a:xfrm>
-            <a:off x="7461504" y="1737360"/>
-            <a:ext cx="274320" cy="841248"/>
-          </a:xfrm>
-          <a:prstGeom prst="rect">
-            <a:avLst/>
-          </a:prstGeom>
-          <a:noFill/>
-        </p:spPr>
-        <p:txBody>
-          <a:bodyPr wrap="none" anchor="ctr">
-            <a:spAutoFit/>
-          </a:bodyPr>
-          <a:lstStyle/>
-          <a:p>
-            <a:pPr algn="ctr"/>
-            <a:r>
-              <a:rPr sz="2000" b="1" i="0">
-                <a:solidFill>
-                  <a:srgbClr val="C2A14D"/>
-                </a:solidFill>
-                <a:latin typeface="맑은 고딕"/>
-              </a:rPr>
-              <a:t>›</a:t>
-            </a:r>
-          </a:p>
-        </p:txBody>
-      </p:sp>
-      <p:sp>
-        <p:nvSpPr>
-          <p:cNvPr id="22" name="Rounded Rectangle 21"/>
-          <p:cNvSpPr/>
-          <p:nvPr/>
-        </p:nvSpPr>
-        <p:spPr>
-          <a:xfrm>
-            <a:off x="7735824" y="1737360"/>
-            <a:ext cx="1517904" cy="841248"/>
-          </a:xfrm>
-          <a:prstGeom prst="roundRect">
-            <a:avLst/>
-          </a:prstGeom>
-          <a:solidFill>
-            <a:srgbClr val="FFFFFF"/>
-          </a:solidFill>
-          <a:ln w="12700">
-            <a:solidFill>
-              <a:srgbClr val="E7E3D8"/>
-            </a:solidFill>
-          </a:ln>
-          <a:effectLst/>
-          <a:effectLst>
-            <a:outerShdw blurRad="90000" dist="38000" dir="5400000" rotWithShape="0">
-              <a:srgbClr val="0B0E14">
-                <a:alpha val="22000"/>
-              </a:srgbClr>
-            </a:outerShdw>
-          </a:effectLst>
-        </p:spPr>
-        <p:style>
-          <a:lnRef idx="1">
-            <a:schemeClr val="accent1"/>
-          </a:lnRef>
-          <a:fillRef idx="3">
-            <a:schemeClr val="accent1"/>
-          </a:fillRef>
-          <a:effectRef idx="2">
-            <a:schemeClr val="accent1"/>
-          </a:effectRef>
-          <a:fontRef idx="minor">
-            <a:schemeClr val="lt1"/>
-          </a:fontRef>
-        </p:style>
-        <p:txBody>
-          <a:bodyPr rtlCol="0" anchor="ctr" wrap="square"/>
-          <a:lstStyle/>
-          <a:p>
-            <a:pPr algn="ctr"/>
-            <a:r>
-              <a:rPr sz="1100" b="1" i="0">
-                <a:solidFill>
-                  <a:srgbClr val="212733"/>
-                </a:solidFill>
-                <a:latin typeface="맑은 고딕"/>
-              </a:rPr>
-              <a:t>build</a:t>
-            </a:r>
-          </a:p>
-          <a:p>
-            <a:pPr algn="ctr"/>
-            <a:r>
-              <a:rPr sz="1100" b="0" i="0">
-                <a:solidFill>
-                  <a:srgbClr val="8C919C"/>
-                </a:solidFill>
-                <a:latin typeface="맑은 고딕"/>
-              </a:rPr>
-              <a:t>통일그래프</a:t>
-            </a:r>
-          </a:p>
-        </p:txBody>
-      </p:sp>
-      <p:sp>
-        <p:nvSpPr>
-          <p:cNvPr id="23" name="Rectangle 22"/>
-          <p:cNvSpPr/>
-          <p:nvPr/>
-        </p:nvSpPr>
-        <p:spPr>
-          <a:xfrm>
-            <a:off x="7735824" y="1737360"/>
-            <a:ext cx="1517904" cy="45720"/>
-          </a:xfrm>
-          <a:prstGeom prst="rect">
-            <a:avLst/>
-          </a:prstGeom>
-          <a:solidFill>
-            <a:srgbClr val="C2A14D"/>
-          </a:solidFill>
-          <a:ln>
-            <a:noFill/>
-          </a:ln>
-          <a:effectLst/>
-        </p:spPr>
-        <p:style>
-          <a:lnRef idx="1">
-            <a:schemeClr val="accent1"/>
-          </a:lnRef>
-          <a:fillRef idx="3">
-            <a:schemeClr val="accent1"/>
-          </a:fillRef>
-          <a:effectRef idx="2">
-            <a:schemeClr val="accent1"/>
-          </a:effectRef>
-          <a:fontRef idx="minor">
-            <a:schemeClr val="lt1"/>
-          </a:fontRef>
-        </p:style>
-        <p:txBody>
-          <a:bodyPr rtlCol="0" anchor="ctr"/>
-          <a:lstStyle/>
-          <a:p>
-            <a:pPr algn="ctr"/>
-          </a:p>
-        </p:txBody>
-      </p:sp>
-      <p:sp>
-        <p:nvSpPr>
-          <p:cNvPr id="24" name="TextBox 23"/>
-          <p:cNvSpPr txBox="1"/>
-          <p:nvPr/>
-        </p:nvSpPr>
-        <p:spPr>
-          <a:xfrm>
-            <a:off x="9253728" y="1737360"/>
-            <a:ext cx="274320" cy="841248"/>
-          </a:xfrm>
-          <a:prstGeom prst="rect">
-            <a:avLst/>
-          </a:prstGeom>
-          <a:noFill/>
-        </p:spPr>
-        <p:txBody>
-          <a:bodyPr wrap="none" anchor="ctr">
-            <a:spAutoFit/>
-          </a:bodyPr>
-          <a:lstStyle/>
-          <a:p>
-            <a:pPr algn="ctr"/>
-            <a:r>
-              <a:rPr sz="2000" b="1" i="0">
-                <a:solidFill>
-                  <a:srgbClr val="C2A14D"/>
-                </a:solidFill>
-                <a:latin typeface="맑은 고딕"/>
-              </a:rPr>
-              <a:t>›</a:t>
-            </a:r>
-          </a:p>
-        </p:txBody>
-      </p:sp>
-      <p:sp>
-        <p:nvSpPr>
-          <p:cNvPr id="25" name="Rounded Rectangle 24"/>
-          <p:cNvSpPr/>
-          <p:nvPr/>
-        </p:nvSpPr>
-        <p:spPr>
-          <a:xfrm>
-            <a:off x="9528048" y="1737360"/>
-            <a:ext cx="1517904" cy="841248"/>
-          </a:xfrm>
-          <a:prstGeom prst="roundRect">
-            <a:avLst/>
-          </a:prstGeom>
-          <a:solidFill>
-            <a:srgbClr val="FFFFFF"/>
-          </a:solidFill>
-          <a:ln w="12700">
-            <a:solidFill>
-              <a:srgbClr val="E7E3D8"/>
-            </a:solidFill>
-          </a:ln>
-          <a:effectLst/>
-          <a:effectLst>
-            <a:outerShdw blurRad="90000" dist="38000" dir="5400000" rotWithShape="0">
-              <a:srgbClr val="0B0E14">
-                <a:alpha val="22000"/>
-              </a:srgbClr>
-            </a:outerShdw>
-          </a:effectLst>
-        </p:spPr>
-        <p:style>
-          <a:lnRef idx="1">
-            <a:schemeClr val="accent1"/>
-          </a:lnRef>
-          <a:fillRef idx="3">
-            <a:schemeClr val="accent1"/>
-          </a:fillRef>
-          <a:effectRef idx="2">
-            <a:schemeClr val="accent1"/>
-          </a:effectRef>
-          <a:fontRef idx="minor">
-            <a:schemeClr val="lt1"/>
-          </a:fontRef>
-        </p:style>
-        <p:txBody>
-          <a:bodyPr rtlCol="0" anchor="ctr" wrap="square"/>
-          <a:lstStyle/>
-          <a:p>
-            <a:pPr algn="ctr"/>
-            <a:r>
-              <a:rPr sz="1100" b="1" i="0">
-                <a:solidFill>
-                  <a:srgbClr val="212733"/>
-                </a:solidFill>
-                <a:latin typeface="맑은 고딕"/>
-              </a:rPr>
-              <a:t>검증</a:t>
-            </a:r>
-          </a:p>
-          <a:p>
-            <a:pPr algn="ctr"/>
-            <a:r>
-              <a:rPr sz="1100" b="0" i="0">
-                <a:solidFill>
-                  <a:srgbClr val="8C919C"/>
-                </a:solidFill>
-                <a:latin typeface="맑은 고딕"/>
-              </a:rPr>
-              <a:t>위상·역할</a:t>
-            </a:r>
-          </a:p>
-        </p:txBody>
-      </p:sp>
-      <p:sp>
-        <p:nvSpPr>
-          <p:cNvPr id="26" name="Rectangle 25"/>
-          <p:cNvSpPr/>
-          <p:nvPr/>
-        </p:nvSpPr>
-        <p:spPr>
-          <a:xfrm>
-            <a:off x="9528048" y="1737360"/>
-            <a:ext cx="1517904" cy="45720"/>
-          </a:xfrm>
-          <a:prstGeom prst="rect">
-            <a:avLst/>
-          </a:prstGeom>
-          <a:solidFill>
-            <a:srgbClr val="C2A14D"/>
-          </a:solidFill>
-          <a:ln>
-            <a:noFill/>
-          </a:ln>
-          <a:effectLst/>
-        </p:spPr>
-        <p:style>
-          <a:lnRef idx="1">
-            <a:schemeClr val="accent1"/>
-          </a:lnRef>
-          <a:fillRef idx="3">
-            <a:schemeClr val="accent1"/>
-          </a:fillRef>
-          <a:effectRef idx="2">
-            <a:schemeClr val="accent1"/>
-          </a:effectRef>
-          <a:fontRef idx="minor">
-            <a:schemeClr val="lt1"/>
-          </a:fontRef>
-        </p:style>
-        <p:txBody>
-          <a:bodyPr rtlCol="0" anchor="ctr"/>
-          <a:lstStyle/>
-          <a:p>
-            <a:pPr algn="ctr"/>
-          </a:p>
-        </p:txBody>
-      </p:sp>
-      <p:sp>
-        <p:nvSpPr>
-          <p:cNvPr id="27" name="TextBox 26"/>
-          <p:cNvSpPr txBox="1"/>
-          <p:nvPr/>
-        </p:nvSpPr>
-        <p:spPr>
-          <a:xfrm>
-            <a:off x="731520" y="2926080"/>
-            <a:ext cx="10698480" cy="365760"/>
-          </a:xfrm>
-          <a:prstGeom prst="rect">
-            <a:avLst/>
-          </a:prstGeom>
-          <a:noFill/>
-        </p:spPr>
-        <p:txBody>
-          <a:bodyPr wrap="square" anchor="t">
-            <a:spAutoFit/>
-          </a:bodyPr>
-          <a:lstStyle/>
-          <a:p>
-            <a:pPr algn="l">
-              <a:spcBef>
-                <a:spcPts val="0"/>
-              </a:spcBef>
-              <a:spcAft>
-                <a:spcPts val="500"/>
-              </a:spcAft>
-            </a:pPr>
-            <a:r>
-              <a:rPr sz="1400" b="1" i="0">
-                <a:solidFill>
-                  <a:srgbClr val="C2A14D"/>
-                </a:solidFill>
-                <a:latin typeface="맑은 고딕"/>
-              </a:rPr>
-              <a:t>provenance(추출 출처)로 데이터 특성·신뢰도 구분 — 선언적 필터로 구성 분리</a:t>
-            </a:r>
-          </a:p>
-        </p:txBody>
-      </p:sp>
-      <p:graphicFrame>
-        <p:nvGraphicFramePr>
-          <p:cNvPr id="28" name="Table 27"/>
-          <p:cNvGraphicFramePr>
-            <a:graphicFrameLocks noGrp="1"/>
-          </p:cNvGraphicFramePr>
-          <p:nvPr/>
-        </p:nvGraphicFramePr>
-        <p:xfrm>
-          <a:off x="731520" y="3474720"/>
-          <a:ext cx="10698480" cy="1682496"/>
-        </p:xfrm>
-        <a:graphic>
-          <a:graphicData uri="http://schemas.openxmlformats.org/drawingml/2006/table">
-            <a:tbl>
-              <a:tblPr>
-                <a:tableStyleId>{5C22544A-7EE6-4342-B048-85BDC9FD1C3A}</a:tableStyleId>
-              </a:tblPr>
-              <a:tblGrid>
-                <a:gridCol w="2651760"/>
-                <a:gridCol w="5669280"/>
-                <a:gridCol w="2377440"/>
-              </a:tblGrid>
-              <a:tr h="420624">
-                <a:tc>
-                  <a:txBody>
-                    <a:bodyPr/>
-                    <a:lstStyle/>
-                    <a:p>
-                      <a:pPr algn="l"/>
-                      <a:r>
-                        <a:rPr sz="1250" b="1" i="0">
-                          <a:solidFill>
-                            <a:srgbClr val="E6D6A6"/>
-                          </a:solidFill>
-                          <a:latin typeface="맑은 고딕"/>
-                        </a:rPr>
-                        <a:t>provenance</a:t>
-                      </a:r>
-                    </a:p>
-                  </a:txBody>
-                  <a:tcPr marT="38100" marB="38100" marL="114300" marR="114300" anchor="ctr">
-                    <a:solidFill>
-                      <a:srgbClr val="10141C"/>
-                    </a:solidFill>
-                  </a:tcPr>
-                </a:tc>
-                <a:tc>
-                  <a:txBody>
-                    <a:bodyPr/>
-                    <a:lstStyle/>
-                    <a:p>
-                      <a:pPr algn="ctr"/>
-                      <a:r>
-                        <a:rPr sz="1250" b="1" i="0">
-                          <a:solidFill>
-                            <a:srgbClr val="E6D6A6"/>
-                          </a:solidFill>
-                          <a:latin typeface="맑은 고딕"/>
-                        </a:rPr>
-                        <a:t>의미</a:t>
-                      </a:r>
-                    </a:p>
-                  </a:txBody>
-                  <a:tcPr marT="38100" marB="38100" marL="114300" marR="114300" anchor="ctr">
-                    <a:solidFill>
-                      <a:srgbClr val="10141C"/>
-                    </a:solidFill>
-                  </a:tcPr>
-                </a:tc>
-                <a:tc>
-                  <a:txBody>
-                    <a:bodyPr/>
-                    <a:lstStyle/>
-                    <a:p>
-                      <a:pPr algn="ctr"/>
-                      <a:r>
-                        <a:rPr sz="1250" b="1" i="0">
-                          <a:solidFill>
-                            <a:srgbClr val="E6D6A6"/>
-                          </a:solidFill>
-                          <a:latin typeface="맑은 고딕"/>
-                        </a:rPr>
-                        <a:t>처분</a:t>
-                      </a:r>
-                    </a:p>
-                  </a:txBody>
-                  <a:tcPr marT="38100" marB="38100" marL="114300" marR="114300" anchor="ctr">
-                    <a:solidFill>
-                      <a:srgbClr val="10141C"/>
-                    </a:solidFill>
-                  </a:tcPr>
-                </a:tc>
-              </a:tr>
-              <a:tr h="420624">
-                <a:tc>
-                  <a:txBody>
-                    <a:bodyPr/>
-                    <a:lstStyle/>
-                    <a:p>
-                      <a:pPr algn="l"/>
-                      <a:r>
-                        <a:rPr sz="1250" b="1" i="0">
+                        <a:rPr sz="1150" b="1" i="0">
                           <a:solidFill>
                             <a:srgbClr val="212733"/>
                           </a:solidFill>
@@ -19467,13 +19728,13 @@
                     <a:p>
                       <a:pPr algn="ctr"/>
                       <a:r>
-                        <a:rPr sz="1250" b="0" i="0">
+                        <a:rPr sz="1150" b="0" i="0">
                           <a:solidFill>
                             <a:srgbClr val="212733"/>
                           </a:solidFill>
                           <a:latin typeface="맑은 고딕"/>
                         </a:rPr>
-                        <a:t>방(SPA)+구조(STR) 둘 다 라벨 — 직접 변환</a:t>
+                        <a:t>3,576</a:t>
                       </a:r>
                     </a:p>
                   </a:txBody>
@@ -19490,13 +19751,36 @@
                     <a:p>
                       <a:pPr algn="ctr"/>
                       <a:r>
-                        <a:rPr sz="1250" b="0" i="0">
+                        <a:rPr sz="1150" b="0" i="0">
                           <a:solidFill>
                             <a:srgbClr val="212733"/>
                           </a:solidFill>
                           <a:latin typeface="맑은 고딕"/>
                         </a:rPr>
-                        <a:t>사용 (최고품질)</a:t>
+                        <a:t>사용</a:t>
+                      </a:r>
+                    </a:p>
+                  </a:txBody>
+                  <a:tcPr marT="38100" marB="38100" marL="114300" marR="114300" anchor="ctr">
+                    <a:solidFill>
+                      <a:srgbClr val="FFFFFF"/>
+                    </a:solidFill>
+                  </a:tcPr>
+                </a:tc>
+                <a:tc>
+                  <a:txBody>
+                    <a:bodyPr/>
+                    <a:lstStyle/>
+                    <a:p>
+                      <a:pPr algn="ctr"/>
+                      <a:r>
+                        <a:rPr sz="1150" b="0" i="0">
+                          <a:solidFill>
+                            <a:srgbClr val="212733"/>
+                          </a:solidFill>
+                          <a:latin typeface="맑은 고딕"/>
+                        </a:rPr>
+                        <a:t>방(SPA)+구조(STR) 라벨 정상 → SVG 직접 변환</a:t>
                       </a:r>
                     </a:p>
                   </a:txBody>
@@ -19515,13 +19799,13 @@
                     <a:p>
                       <a:pPr algn="l"/>
                       <a:r>
-                        <a:rPr sz="1250" b="1" i="0">
+                        <a:rPr sz="1150" b="1" i="0">
                           <a:solidFill>
                             <a:srgbClr val="212733"/>
                           </a:solidFill>
                           <a:latin typeface="맑은 고딕"/>
                         </a:rPr>
-                        <a:t>spa_only / str_only</a:t>
+                        <a:t>spa_only → V2V</a:t>
                       </a:r>
                     </a:p>
                   </a:txBody>
@@ -19538,13 +19822,13 @@
                     <a:p>
                       <a:pPr algn="ctr"/>
                       <a:r>
-                        <a:rPr sz="1250" b="0" i="0">
+                        <a:rPr sz="1150" b="0" i="0">
                           <a:solidFill>
                             <a:srgbClr val="212733"/>
                           </a:solidFill>
                           <a:latin typeface="맑은 고딕"/>
                         </a:rPr>
-                        <a:t>한쪽만 → V2V(YOLO)로 나머지 복구</a:t>
+                        <a:t>3,292</a:t>
                       </a:r>
                     </a:p>
                   </a:txBody>
@@ -19561,13 +19845,36 @@
                     <a:p>
                       <a:pPr algn="ctr"/>
                       <a:r>
-                        <a:rPr sz="1250" b="0" i="0">
+                        <a:rPr sz="1150" b="0" i="0">
                           <a:solidFill>
                             <a:srgbClr val="212733"/>
                           </a:solidFill>
                           <a:latin typeface="맑은 고딕"/>
                         </a:rPr>
-                        <a:t>사용 (복구)</a:t>
+                        <a:t>사용</a:t>
+                      </a:r>
+                    </a:p>
+                  </a:txBody>
+                  <a:tcPr marT="38100" marB="38100" marL="114300" marR="114300" anchor="ctr">
+                    <a:solidFill>
+                      <a:srgbClr val="FBFAF6"/>
+                    </a:solidFill>
+                  </a:tcPr>
+                </a:tc>
+                <a:tc>
+                  <a:txBody>
+                    <a:bodyPr/>
+                    <a:lstStyle/>
+                    <a:p>
+                      <a:pPr algn="ctr"/>
+                      <a:r>
+                        <a:rPr sz="1150" b="0" i="0">
+                          <a:solidFill>
+                            <a:srgbClr val="212733"/>
+                          </a:solidFill>
+                          <a:latin typeface="맑은 고딕"/>
+                        </a:rPr>
+                        <a:t>구조(벽) 라벨 없음 → YOLO V2V로 STR 복구</a:t>
                       </a:r>
                     </a:p>
                   </a:txBody>
@@ -19586,13 +19893,13 @@
                     <a:p>
                       <a:pPr algn="l"/>
                       <a:r>
-                        <a:rPr sz="1250" b="1" i="0">
+                        <a:rPr sz="1150" b="1" i="0">
                           <a:solidFill>
                             <a:srgbClr val="212733"/>
                           </a:solidFill>
                           <a:latin typeface="맑은 고딕"/>
                         </a:rPr>
-                        <a:t>objocr</a:t>
+                        <a:t>str_only → V2V</a:t>
                       </a:r>
                     </a:p>
                   </a:txBody>
@@ -19609,13 +19916,13 @@
                     <a:p>
                       <a:pPr algn="ctr"/>
                       <a:r>
-                        <a:rPr sz="1250" b="0" i="0">
+                        <a:rPr sz="1150" b="0" i="0">
                           <a:solidFill>
                             <a:srgbClr val="212733"/>
                           </a:solidFill>
                           <a:latin typeface="맑은 고딕"/>
                         </a:rPr>
-                        <a:t>OBJ/OCR만(공간 라벨 없음) — 이미지 직접 검출</a:t>
+                        <a:t>4,053</a:t>
                       </a:r>
                     </a:p>
                   </a:txBody>
@@ -19632,7 +19939,195 @@
                     <a:p>
                       <a:pPr algn="ctr"/>
                       <a:r>
-                        <a:rPr sz="1250" b="0" i="0">
+                        <a:rPr sz="1150" b="0" i="0">
+                          <a:solidFill>
+                            <a:srgbClr val="212733"/>
+                          </a:solidFill>
+                          <a:latin typeface="맑은 고딕"/>
+                        </a:rPr>
+                        <a:t>사용</a:t>
+                      </a:r>
+                    </a:p>
+                  </a:txBody>
+                  <a:tcPr marT="38100" marB="38100" marL="114300" marR="114300" anchor="ctr">
+                    <a:solidFill>
+                      <a:srgbClr val="FFFFFF"/>
+                    </a:solidFill>
+                  </a:tcPr>
+                </a:tc>
+                <a:tc>
+                  <a:txBody>
+                    <a:bodyPr/>
+                    <a:lstStyle/>
+                    <a:p>
+                      <a:pPr algn="ctr"/>
+                      <a:r>
+                        <a:rPr sz="1150" b="0" i="0">
+                          <a:solidFill>
+                            <a:srgbClr val="212733"/>
+                          </a:solidFill>
+                          <a:latin typeface="맑은 고딕"/>
+                        </a:rPr>
+                        <a:t>방 라벨 없음 → YOLO V2V로 SPA 복구</a:t>
+                      </a:r>
+                    </a:p>
+                  </a:txBody>
+                  <a:tcPr marT="38100" marB="38100" marL="114300" marR="114300" anchor="ctr">
+                    <a:solidFill>
+                      <a:srgbClr val="FFFFFF"/>
+                    </a:solidFill>
+                  </a:tcPr>
+                </a:tc>
+              </a:tr>
+              <a:tr h="420624">
+                <a:tc>
+                  <a:txBody>
+                    <a:bodyPr/>
+                    <a:lstStyle/>
+                    <a:p>
+                      <a:pPr algn="l"/>
+                      <a:r>
+                        <a:rPr sz="1150" b="1" i="0">
+                          <a:solidFill>
+                            <a:srgbClr val="212733"/>
+                          </a:solidFill>
+                          <a:latin typeface="맑은 고딕"/>
+                        </a:rPr>
+                        <a:t>objocr</a:t>
+                      </a:r>
+                    </a:p>
+                  </a:txBody>
+                  <a:tcPr marT="38100" marB="38100" marL="114300" marR="114300" anchor="ctr">
+                    <a:solidFill>
+                      <a:srgbClr val="FBFAF6"/>
+                    </a:solidFill>
+                  </a:tcPr>
+                </a:tc>
+                <a:tc>
+                  <a:txBody>
+                    <a:bodyPr/>
+                    <a:lstStyle/>
+                    <a:p>
+                      <a:pPr algn="ctr"/>
+                      <a:r>
+                        <a:rPr sz="1150" b="0" i="0">
+                          <a:solidFill>
+                            <a:srgbClr val="212733"/>
+                          </a:solidFill>
+                          <a:latin typeface="맑은 고딕"/>
+                        </a:rPr>
+                        <a:t>6,146</a:t>
+                      </a:r>
+                    </a:p>
+                  </a:txBody>
+                  <a:tcPr marT="38100" marB="38100" marL="114300" marR="114300" anchor="ctr">
+                    <a:solidFill>
+                      <a:srgbClr val="FBFAF6"/>
+                    </a:solidFill>
+                  </a:tcPr>
+                </a:tc>
+                <a:tc>
+                  <a:txBody>
+                    <a:bodyPr/>
+                    <a:lstStyle/>
+                    <a:p>
+                      <a:pPr algn="ctr"/>
+                      <a:r>
+                        <a:rPr sz="1150" b="0" i="0">
+                          <a:solidFill>
+                            <a:srgbClr val="212733"/>
+                          </a:solidFill>
+                          <a:latin typeface="맑은 고딕"/>
+                        </a:rPr>
+                        <a:t>보정필요</a:t>
+                      </a:r>
+                    </a:p>
+                  </a:txBody>
+                  <a:tcPr marT="38100" marB="38100" marL="114300" marR="114300" anchor="ctr">
+                    <a:solidFill>
+                      <a:srgbClr val="FBFAF6"/>
+                    </a:solidFill>
+                  </a:tcPr>
+                </a:tc>
+                <a:tc>
+                  <a:txBody>
+                    <a:bodyPr/>
+                    <a:lstStyle/>
+                    <a:p>
+                      <a:pPr algn="ctr"/>
+                      <a:r>
+                        <a:rPr sz="1150" b="0" i="0">
+                          <a:solidFill>
+                            <a:srgbClr val="212733"/>
+                          </a:solidFill>
+                          <a:latin typeface="맑은 고딕"/>
+                        </a:rPr>
+                        <a:t>공간 라벨 전무(기구/문자만) → 2-패스 세대크롭 재검출</a:t>
+                      </a:r>
+                    </a:p>
+                  </a:txBody>
+                  <a:tcPr marT="38100" marB="38100" marL="114300" marR="114300" anchor="ctr">
+                    <a:solidFill>
+                      <a:srgbClr val="FBFAF6"/>
+                    </a:solidFill>
+                  </a:tcPr>
+                </a:tc>
+              </a:tr>
+              <a:tr h="420624">
+                <a:tc>
+                  <a:txBody>
+                    <a:bodyPr/>
+                    <a:lstStyle/>
+                    <a:p>
+                      <a:pPr algn="l"/>
+                      <a:r>
+                        <a:rPr sz="1150" b="1" i="0">
+                          <a:solidFill>
+                            <a:srgbClr val="212733"/>
+                          </a:solidFill>
+                          <a:latin typeface="맑은 고딕"/>
+                        </a:rPr>
+                        <a:t>spa/str_only 대기</a:t>
+                      </a:r>
+                    </a:p>
+                  </a:txBody>
+                  <a:tcPr marT="38100" marB="38100" marL="114300" marR="114300" anchor="ctr">
+                    <a:solidFill>
+                      <a:srgbClr val="FFFFFF"/>
+                    </a:solidFill>
+                  </a:tcPr>
+                </a:tc>
+                <a:tc>
+                  <a:txBody>
+                    <a:bodyPr/>
+                    <a:lstStyle/>
+                    <a:p>
+                      <a:pPr algn="ctr"/>
+                      <a:r>
+                        <a:rPr sz="1150" b="0" i="0">
+                          <a:solidFill>
+                            <a:srgbClr val="212733"/>
+                          </a:solidFill>
+                          <a:latin typeface="맑은 고딕"/>
+                        </a:rPr>
+                        <a:t>2,046</a:t>
+                      </a:r>
+                    </a:p>
+                  </a:txBody>
+                  <a:tcPr marT="38100" marB="38100" marL="114300" marR="114300" anchor="ctr">
+                    <a:solidFill>
+                      <a:srgbClr val="FFFFFF"/>
+                    </a:solidFill>
+                  </a:tcPr>
+                </a:tc>
+                <a:tc>
+                  <a:txBody>
+                    <a:bodyPr/>
+                    <a:lstStyle/>
+                    <a:p>
+                      <a:pPr algn="ctr"/>
+                      <a:r>
+                        <a:rPr sz="1150" b="0" i="0">
                           <a:solidFill>
                             <a:srgbClr val="212733"/>
                           </a:solidFill>
@@ -19648,6 +20143,311 @@
                     </a:solidFill>
                   </a:tcPr>
                 </a:tc>
+                <a:tc>
+                  <a:txBody>
+                    <a:bodyPr/>
+                    <a:lstStyle/>
+                    <a:p>
+                      <a:pPr algn="ctr"/>
+                      <a:r>
+                        <a:rPr sz="1150" b="0" i="0">
+                          <a:solidFill>
+                            <a:srgbClr val="212733"/>
+                          </a:solidFill>
+                          <a:latin typeface="맑은 고딕"/>
+                        </a:rPr>
+                        <a:t>V2V 미적용 → 적용 대기</a:t>
+                      </a:r>
+                    </a:p>
+                  </a:txBody>
+                  <a:tcPr marT="38100" marB="38100" marL="114300" marR="114300" anchor="ctr">
+                    <a:solidFill>
+                      <a:srgbClr val="FFFFFF"/>
+                    </a:solidFill>
+                  </a:tcPr>
+                </a:tc>
+              </a:tr>
+              <a:tr h="420624">
+                <a:tc>
+                  <a:txBody>
+                    <a:bodyPr/>
+                    <a:lstStyle/>
+                    <a:p>
+                      <a:pPr algn="l"/>
+                      <a:r>
+                        <a:rPr sz="1150" b="1" i="0">
+                          <a:solidFill>
+                            <a:srgbClr val="212733"/>
+                          </a:solidFill>
+                          <a:latin typeface="맑은 고딕"/>
+                        </a:rPr>
+                        <a:t>convert_failed</a:t>
+                      </a:r>
+                    </a:p>
+                  </a:txBody>
+                  <a:tcPr marT="38100" marB="38100" marL="114300" marR="114300" anchor="ctr">
+                    <a:solidFill>
+                      <a:srgbClr val="FBFAF6"/>
+                    </a:solidFill>
+                  </a:tcPr>
+                </a:tc>
+                <a:tc>
+                  <a:txBody>
+                    <a:bodyPr/>
+                    <a:lstStyle/>
+                    <a:p>
+                      <a:pPr algn="ctr"/>
+                      <a:r>
+                        <a:rPr sz="1150" b="0" i="0">
+                          <a:solidFill>
+                            <a:srgbClr val="212733"/>
+                          </a:solidFill>
+                          <a:latin typeface="맑은 고딕"/>
+                        </a:rPr>
+                        <a:t>1,220</a:t>
+                      </a:r>
+                    </a:p>
+                  </a:txBody>
+                  <a:tcPr marT="38100" marB="38100" marL="114300" marR="114300" anchor="ctr">
+                    <a:solidFill>
+                      <a:srgbClr val="FBFAF6"/>
+                    </a:solidFill>
+                  </a:tcPr>
+                </a:tc>
+                <a:tc>
+                  <a:txBody>
+                    <a:bodyPr/>
+                    <a:lstStyle/>
+                    <a:p>
+                      <a:pPr algn="ctr"/>
+                      <a:r>
+                        <a:rPr sz="1150" b="0" i="0">
+                          <a:solidFill>
+                            <a:srgbClr val="212733"/>
+                          </a:solidFill>
+                          <a:latin typeface="맑은 고딕"/>
+                        </a:rPr>
+                        <a:t>보정필요</a:t>
+                      </a:r>
+                    </a:p>
+                  </a:txBody>
+                  <a:tcPr marT="38100" marB="38100" marL="114300" marR="114300" anchor="ctr">
+                    <a:solidFill>
+                      <a:srgbClr val="FBFAF6"/>
+                    </a:solidFill>
+                  </a:tcPr>
+                </a:tc>
+                <a:tc>
+                  <a:txBody>
+                    <a:bodyPr/>
+                    <a:lstStyle/>
+                    <a:p>
+                      <a:pPr algn="ctr"/>
+                      <a:r>
+                        <a:rPr sz="1150" b="0" i="0">
+                          <a:solidFill>
+                            <a:srgbClr val="212733"/>
+                          </a:solidFill>
+                          <a:latin typeface="맑은 고딕"/>
+                        </a:rPr>
+                        <a:t>SVG 변환 실패 → 라벨 합집합 재변환(231 복구)</a:t>
+                      </a:r>
+                    </a:p>
+                  </a:txBody>
+                  <a:tcPr marT="38100" marB="38100" marL="114300" marR="114300" anchor="ctr">
+                    <a:solidFill>
+                      <a:srgbClr val="FBFAF6"/>
+                    </a:solidFill>
+                  </a:tcPr>
+                </a:tc>
+              </a:tr>
+              <a:tr h="420624">
+                <a:tc>
+                  <a:txBody>
+                    <a:bodyPr/>
+                    <a:lstStyle/>
+                    <a:p>
+                      <a:pPr algn="l"/>
+                      <a:r>
+                        <a:rPr sz="1150" b="1" i="0">
+                          <a:solidFill>
+                            <a:srgbClr val="212733"/>
+                          </a:solidFill>
+                          <a:latin typeface="맑은 고딕"/>
+                        </a:rPr>
+                        <a:t>duplicate</a:t>
+                      </a:r>
+                    </a:p>
+                  </a:txBody>
+                  <a:tcPr marT="38100" marB="38100" marL="114300" marR="114300" anchor="ctr">
+                    <a:solidFill>
+                      <a:srgbClr val="FFFFFF"/>
+                    </a:solidFill>
+                  </a:tcPr>
+                </a:tc>
+                <a:tc>
+                  <a:txBody>
+                    <a:bodyPr/>
+                    <a:lstStyle/>
+                    <a:p>
+                      <a:pPr algn="ctr"/>
+                      <a:r>
+                        <a:rPr sz="1150" b="0" i="0">
+                          <a:solidFill>
+                            <a:srgbClr val="212733"/>
+                          </a:solidFill>
+                          <a:latin typeface="맑은 고딕"/>
+                        </a:rPr>
+                        <a:t>18,231</a:t>
+                      </a:r>
+                    </a:p>
+                  </a:txBody>
+                  <a:tcPr marT="38100" marB="38100" marL="114300" marR="114300" anchor="ctr">
+                    <a:solidFill>
+                      <a:srgbClr val="FFFFFF"/>
+                    </a:solidFill>
+                  </a:tcPr>
+                </a:tc>
+                <a:tc>
+                  <a:txBody>
+                    <a:bodyPr/>
+                    <a:lstStyle/>
+                    <a:p>
+                      <a:pPr algn="ctr"/>
+                      <a:r>
+                        <a:rPr sz="1150" b="0" i="0">
+                          <a:solidFill>
+                            <a:srgbClr val="212733"/>
+                          </a:solidFill>
+                          <a:latin typeface="맑은 고딕"/>
+                        </a:rPr>
+                        <a:t>제외</a:t>
+                      </a:r>
+                    </a:p>
+                  </a:txBody>
+                  <a:tcPr marT="38100" marB="38100" marL="114300" marR="114300" anchor="ctr">
+                    <a:solidFill>
+                      <a:srgbClr val="FFFFFF"/>
+                    </a:solidFill>
+                  </a:tcPr>
+                </a:tc>
+                <a:tc>
+                  <a:txBody>
+                    <a:bodyPr/>
+                    <a:lstStyle/>
+                    <a:p>
+                      <a:pPr algn="ctr"/>
+                      <a:r>
+                        <a:rPr sz="1150" b="0" i="0">
+                          <a:solidFill>
+                            <a:srgbClr val="212733"/>
+                          </a:solidFill>
+                          <a:latin typeface="맑은 고딕"/>
+                        </a:rPr>
+                        <a:t>동일 PNG 다른 키로 중복배포 → CRC32+크기 지문 dedup</a:t>
+                      </a:r>
+                    </a:p>
+                  </a:txBody>
+                  <a:tcPr marT="38100" marB="38100" marL="114300" marR="114300" anchor="ctr">
+                    <a:solidFill>
+                      <a:srgbClr val="FFFFFF"/>
+                    </a:solidFill>
+                  </a:tcPr>
+                </a:tc>
+              </a:tr>
+              <a:tr h="420624">
+                <a:tc>
+                  <a:txBody>
+                    <a:bodyPr/>
+                    <a:lstStyle/>
+                    <a:p>
+                      <a:pPr algn="l"/>
+                      <a:r>
+                        <a:rPr sz="1150" b="1" i="0">
+                          <a:solidFill>
+                            <a:srgbClr val="212733"/>
+                          </a:solidFill>
+                          <a:latin typeface="맑은 고딕"/>
+                        </a:rPr>
+                        <a:t>nonfp</a:t>
+                      </a:r>
+                    </a:p>
+                  </a:txBody>
+                  <a:tcPr marT="38100" marB="38100" marL="114300" marR="114300" anchor="ctr">
+                    <a:solidFill>
+                      <a:srgbClr val="FBFAF6"/>
+                    </a:solidFill>
+                  </a:tcPr>
+                </a:tc>
+                <a:tc>
+                  <a:txBody>
+                    <a:bodyPr/>
+                    <a:lstStyle/>
+                    <a:p>
+                      <a:pPr algn="ctr"/>
+                      <a:r>
+                        <a:rPr sz="1150" b="0" i="0">
+                          <a:solidFill>
+                            <a:srgbClr val="212733"/>
+                          </a:solidFill>
+                          <a:latin typeface="맑은 고딕"/>
+                        </a:rPr>
+                        <a:t>4,655</a:t>
+                      </a:r>
+                    </a:p>
+                  </a:txBody>
+                  <a:tcPr marT="38100" marB="38100" marL="114300" marR="114300" anchor="ctr">
+                    <a:solidFill>
+                      <a:srgbClr val="FBFAF6"/>
+                    </a:solidFill>
+                  </a:tcPr>
+                </a:tc>
+                <a:tc>
+                  <a:txBody>
+                    <a:bodyPr/>
+                    <a:lstStyle/>
+                    <a:p>
+                      <a:pPr algn="ctr"/>
+                      <a:r>
+                        <a:rPr sz="1150" b="0" i="0">
+                          <a:solidFill>
+                            <a:srgbClr val="212733"/>
+                          </a:solidFill>
+                          <a:latin typeface="맑은 고딕"/>
+                        </a:rPr>
+                        <a:t>제외</a:t>
+                      </a:r>
+                    </a:p>
+                  </a:txBody>
+                  <a:tcPr marT="38100" marB="38100" marL="114300" marR="114300" anchor="ctr">
+                    <a:solidFill>
+                      <a:srgbClr val="FBFAF6"/>
+                    </a:solidFill>
+                  </a:tcPr>
+                </a:tc>
+                <a:tc>
+                  <a:txBody>
+                    <a:bodyPr/>
+                    <a:lstStyle/>
+                    <a:p>
+                      <a:pPr algn="ctr"/>
+                      <a:r>
+                        <a:rPr sz="1150" b="0" i="0">
+                          <a:solidFill>
+                            <a:srgbClr val="212733"/>
+                          </a:solidFill>
+                          <a:latin typeface="맑은 고딕"/>
+                        </a:rPr>
+                        <a:t>평면도 아님 → 비전 분류로 제외</a:t>
+                      </a:r>
+                    </a:p>
+                  </a:txBody>
+                  <a:tcPr marT="38100" marB="38100" marL="114300" marR="114300" anchor="ctr">
+                    <a:solidFill>
+                      <a:srgbClr val="FBFAF6"/>
+                    </a:solidFill>
+                  </a:tcPr>
+                </a:tc>
               </a:tr>
             </a:tbl>
           </a:graphicData>
@@ -19655,14 +20455,14 @@
       </p:graphicFrame>
       <p:sp>
         <p:nvSpPr>
-          <p:cNvPr id="29" name="TextBox 28"/>
+          <p:cNvPr id="12" name="TextBox 11"/>
           <p:cNvSpPr txBox="1"/>
           <p:nvPr/>
         </p:nvSpPr>
         <p:spPr>
           <a:xfrm>
-            <a:off x="731520" y="5532120"/>
-            <a:ext cx="10698480" cy="731520"/>
+            <a:off x="566928" y="5897880"/>
+            <a:ext cx="11064240" cy="457200"/>
           </a:xfrm>
           <a:prstGeom prst="rect">
             <a:avLst/>
@@ -19684,13 +20484,1271 @@
               </a:spcAft>
             </a:pPr>
             <a:r>
-              <a:rPr sz="1200" b="0" i="0">
+              <a:rPr sz="1150" b="0" i="0">
                 <a:solidFill>
                   <a:srgbClr val="8C919C"/>
                 </a:solidFill>
                 <a:latin typeface="맑은 고딕"/>
               </a:rPr>
-              <a:t>V2V(vector→vector) YOLO: SPA mAP 0.90+ · 게이트 통과율로 평가 · G-라인 빌드 18,503 도면 / 40,495 세대</a:t>
+              <a:t>합: 사용 10,921 · 보정필요 9,412 · 제외 22,886 = 43,219 (= 다운로드). 세대 = 실제 추출 그래프 수(도면 1장 = 여러 세대)</a:t>
+            </a:r>
+          </a:p>
+        </p:txBody>
+      </p:sp>
+    </p:spTree>
+  </p:cSld>
+  <p:clrMapOvr>
+    <a:masterClrMapping/>
+  </p:clrMapOvr>
+</p:sld>
+</file>
+
+<file path=ppt/slides/slide7.xml><?xml version="1.0" encoding="utf-8"?>
+<p:sld xmlns:a="http://schemas.openxmlformats.org/drawingml/2006/main" xmlns:p="http://schemas.openxmlformats.org/presentationml/2006/main" xmlns:r="http://schemas.openxmlformats.org/officeDocument/2006/relationships">
+  <p:cSld>
+    <p:spTree>
+      <p:nvGrpSpPr>
+        <p:cNvPr id="1" name=""/>
+        <p:cNvGrpSpPr/>
+        <p:nvPr/>
+      </p:nvGrpSpPr>
+      <p:grpSpPr/>
+      <p:sp>
+        <p:nvSpPr>
+          <p:cNvPr id="2" name="Rectangle 1"/>
+          <p:cNvSpPr/>
+          <p:nvPr/>
+        </p:nvSpPr>
+        <p:spPr>
+          <a:xfrm>
+            <a:off x="0" y="0"/>
+            <a:ext cx="12191695" cy="6858000"/>
+          </a:xfrm>
+          <a:prstGeom prst="rect">
+            <a:avLst/>
+          </a:prstGeom>
+          <a:solidFill>
+            <a:srgbClr val="FBFAF6"/>
+          </a:solidFill>
+          <a:ln>
+            <a:noFill/>
+          </a:ln>
+          <a:effectLst/>
+        </p:spPr>
+        <p:style>
+          <a:lnRef idx="1">
+            <a:schemeClr val="accent1"/>
+          </a:lnRef>
+          <a:fillRef idx="3">
+            <a:schemeClr val="accent1"/>
+          </a:fillRef>
+          <a:effectRef idx="2">
+            <a:schemeClr val="accent1"/>
+          </a:effectRef>
+          <a:fontRef idx="minor">
+            <a:schemeClr val="lt1"/>
+          </a:fontRef>
+        </p:style>
+        <p:txBody>
+          <a:bodyPr rtlCol="0" anchor="ctr"/>
+          <a:lstStyle/>
+          <a:p>
+            <a:pPr algn="ctr"/>
+          </a:p>
+        </p:txBody>
+      </p:sp>
+      <p:sp>
+        <p:nvSpPr>
+          <p:cNvPr id="3" name="Rectangle 2"/>
+          <p:cNvSpPr/>
+          <p:nvPr/>
+        </p:nvSpPr>
+        <p:spPr>
+          <a:xfrm>
+            <a:off x="548640" y="566928"/>
+            <a:ext cx="41148" cy="566928"/>
+          </a:xfrm>
+          <a:prstGeom prst="rect">
+            <a:avLst/>
+          </a:prstGeom>
+          <a:solidFill>
+            <a:srgbClr val="C2A14D"/>
+          </a:solidFill>
+          <a:ln>
+            <a:noFill/>
+          </a:ln>
+          <a:effectLst/>
+        </p:spPr>
+        <p:style>
+          <a:lnRef idx="1">
+            <a:schemeClr val="accent1"/>
+          </a:lnRef>
+          <a:fillRef idx="3">
+            <a:schemeClr val="accent1"/>
+          </a:fillRef>
+          <a:effectRef idx="2">
+            <a:schemeClr val="accent1"/>
+          </a:effectRef>
+          <a:fontRef idx="minor">
+            <a:schemeClr val="lt1"/>
+          </a:fontRef>
+        </p:style>
+        <p:txBody>
+          <a:bodyPr rtlCol="0" anchor="ctr"/>
+          <a:lstStyle/>
+          <a:p>
+            <a:pPr algn="ctr"/>
+          </a:p>
+        </p:txBody>
+      </p:sp>
+      <p:sp>
+        <p:nvSpPr>
+          <p:cNvPr id="4" name="TextBox 3"/>
+          <p:cNvSpPr txBox="1"/>
+          <p:nvPr/>
+        </p:nvSpPr>
+        <p:spPr>
+          <a:xfrm>
+            <a:off x="749808" y="502920"/>
+            <a:ext cx="10058400" cy="274320"/>
+          </a:xfrm>
+          <a:prstGeom prst="rect">
+            <a:avLst/>
+          </a:prstGeom>
+          <a:noFill/>
+        </p:spPr>
+        <p:txBody>
+          <a:bodyPr wrap="square" anchor="t">
+            <a:spAutoFit/>
+          </a:bodyPr>
+          <a:lstStyle/>
+          <a:p>
+            <a:pPr algn="l">
+              <a:spcBef>
+                <a:spcPts val="0"/>
+              </a:spcBef>
+              <a:spcAft>
+                <a:spcPts val="500"/>
+              </a:spcAft>
+            </a:pPr>
+            <a:r>
+              <a:rPr sz="1100" b="1" i="0" spc="220">
+                <a:solidFill>
+                  <a:srgbClr val="C2A14D"/>
+                </a:solidFill>
+                <a:latin typeface="맑은 고딕"/>
+              </a:rPr>
+              <a:t>DATASET · METHOD</a:t>
+            </a:r>
+          </a:p>
+        </p:txBody>
+      </p:sp>
+      <p:sp>
+        <p:nvSpPr>
+          <p:cNvPr id="5" name="TextBox 4"/>
+          <p:cNvSpPr txBox="1"/>
+          <p:nvPr/>
+        </p:nvSpPr>
+        <p:spPr>
+          <a:xfrm>
+            <a:off x="731520" y="713232"/>
+            <a:ext cx="10607040" cy="548640"/>
+          </a:xfrm>
+          <a:prstGeom prst="rect">
+            <a:avLst/>
+          </a:prstGeom>
+          <a:noFill/>
+        </p:spPr>
+        <p:txBody>
+          <a:bodyPr wrap="square" anchor="t">
+            <a:spAutoFit/>
+          </a:bodyPr>
+          <a:lstStyle/>
+          <a:p>
+            <a:pPr algn="l">
+              <a:spcBef>
+                <a:spcPts val="0"/>
+              </a:spcBef>
+              <a:spcAft>
+                <a:spcPts val="500"/>
+              </a:spcAft>
+            </a:pPr>
+            <a:r>
+              <a:rPr sz="2400" b="1" i="0">
+                <a:solidFill>
+                  <a:srgbClr val="212733"/>
+                </a:solidFill>
+                <a:latin typeface="맑은 고딕"/>
+              </a:rPr>
+              <a:t>데이터셋 구축 ③ — 추출 방법 (비전 → 그래프)</a:t>
+            </a:r>
+          </a:p>
+        </p:txBody>
+      </p:sp>
+      <p:cxnSp>
+        <p:nvCxnSpPr>
+          <p:cNvPr id="6" name="Connector 5"/>
+          <p:cNvCxnSpPr/>
+          <p:nvPr/>
+        </p:nvCxnSpPr>
+        <p:spPr>
+          <a:xfrm>
+            <a:off x="548640" y="1389888"/>
+            <a:ext cx="11091672" cy="0"/>
+          </a:xfrm>
+          <a:prstGeom prst="bentConnector3">
+            <a:avLst/>
+          </a:prstGeom>
+          <a:ln w="12700">
+            <a:solidFill>
+              <a:srgbClr val="E7E3D8"/>
+            </a:solidFill>
+          </a:ln>
+          <a:effectLst/>
+        </p:spPr>
+        <p:style>
+          <a:lnRef idx="2">
+            <a:schemeClr val="accent1"/>
+          </a:lnRef>
+          <a:fillRef idx="0">
+            <a:schemeClr val="accent1"/>
+          </a:fillRef>
+          <a:effectRef idx="1">
+            <a:schemeClr val="accent1"/>
+          </a:effectRef>
+          <a:fontRef idx="minor">
+            <a:schemeClr val="tx1"/>
+          </a:fontRef>
+        </p:style>
+      </p:cxnSp>
+      <p:cxnSp>
+        <p:nvCxnSpPr>
+          <p:cNvPr id="7" name="Connector 6"/>
+          <p:cNvCxnSpPr/>
+          <p:nvPr/>
+        </p:nvCxnSpPr>
+        <p:spPr>
+          <a:xfrm>
+            <a:off x="548640" y="6400800"/>
+            <a:ext cx="11091672" cy="0"/>
+          </a:xfrm>
+          <a:prstGeom prst="bentConnector3">
+            <a:avLst/>
+          </a:prstGeom>
+          <a:ln w="9525">
+            <a:solidFill>
+              <a:srgbClr val="E7E3D8"/>
+            </a:solidFill>
+          </a:ln>
+          <a:effectLst/>
+        </p:spPr>
+        <p:style>
+          <a:lnRef idx="2">
+            <a:schemeClr val="accent1"/>
+          </a:lnRef>
+          <a:fillRef idx="0">
+            <a:schemeClr val="accent1"/>
+          </a:fillRef>
+          <a:effectRef idx="1">
+            <a:schemeClr val="accent1"/>
+          </a:effectRef>
+          <a:fontRef idx="minor">
+            <a:schemeClr val="tx1"/>
+          </a:fontRef>
+        </p:style>
+      </p:cxnSp>
+      <p:sp>
+        <p:nvSpPr>
+          <p:cNvPr id="8" name="TextBox 7"/>
+          <p:cNvSpPr txBox="1"/>
+          <p:nvPr/>
+        </p:nvSpPr>
+        <p:spPr>
+          <a:xfrm>
+            <a:off x="548640" y="6446520"/>
+            <a:ext cx="8229600" cy="274320"/>
+          </a:xfrm>
+          <a:prstGeom prst="rect">
+            <a:avLst/>
+          </a:prstGeom>
+          <a:noFill/>
+        </p:spPr>
+        <p:txBody>
+          <a:bodyPr wrap="square" anchor="t">
+            <a:spAutoFit/>
+          </a:bodyPr>
+          <a:lstStyle/>
+          <a:p>
+            <a:pPr algn="l">
+              <a:spcBef>
+                <a:spcPts val="0"/>
+              </a:spcBef>
+              <a:spcAft>
+                <a:spcPts val="500"/>
+              </a:spcAft>
+            </a:pPr>
+            <a:r>
+              <a:rPr sz="850" b="0" i="0" spc="60">
+                <a:solidFill>
+                  <a:srgbClr val="8C919C"/>
+                </a:solidFill>
+                <a:latin typeface="맑은 고딕"/>
+              </a:rPr>
+              <a:t>plan2graph · 한국형 소버린 평면도 생성 AI</a:t>
+            </a:r>
+          </a:p>
+        </p:txBody>
+      </p:sp>
+      <p:sp>
+        <p:nvSpPr>
+          <p:cNvPr id="9" name="TextBox 8"/>
+          <p:cNvSpPr txBox="1"/>
+          <p:nvPr/>
+        </p:nvSpPr>
+        <p:spPr>
+          <a:xfrm>
+            <a:off x="10607040" y="6446520"/>
+            <a:ext cx="1033271" cy="274320"/>
+          </a:xfrm>
+          <a:prstGeom prst="rect">
+            <a:avLst/>
+          </a:prstGeom>
+          <a:noFill/>
+        </p:spPr>
+        <p:txBody>
+          <a:bodyPr wrap="square" anchor="t">
+            <a:spAutoFit/>
+          </a:bodyPr>
+          <a:lstStyle/>
+          <a:p>
+            <a:pPr algn="r">
+              <a:spcBef>
+                <a:spcPts val="0"/>
+              </a:spcBef>
+              <a:spcAft>
+                <a:spcPts val="500"/>
+              </a:spcAft>
+            </a:pPr>
+            <a:r>
+              <a:rPr sz="850" b="1" i="0">
+                <a:solidFill>
+                  <a:srgbClr val="C2A14D"/>
+                </a:solidFill>
+                <a:latin typeface="맑은 고딕"/>
+              </a:rPr>
+              <a:t>07</a:t>
+            </a:r>
+          </a:p>
+        </p:txBody>
+      </p:sp>
+      <p:sp>
+        <p:nvSpPr>
+          <p:cNvPr id="10" name="Rounded Rectangle 9"/>
+          <p:cNvSpPr/>
+          <p:nvPr/>
+        </p:nvSpPr>
+        <p:spPr>
+          <a:xfrm>
+            <a:off x="868680" y="1691640"/>
+            <a:ext cx="1993392" cy="841248"/>
+          </a:xfrm>
+          <a:prstGeom prst="roundRect">
+            <a:avLst/>
+          </a:prstGeom>
+          <a:solidFill>
+            <a:srgbClr val="FFFFFF"/>
+          </a:solidFill>
+          <a:ln w="12700">
+            <a:solidFill>
+              <a:srgbClr val="E7E3D8"/>
+            </a:solidFill>
+          </a:ln>
+          <a:effectLst/>
+          <a:effectLst>
+            <a:outerShdw blurRad="90000" dist="38000" dir="5400000" rotWithShape="0">
+              <a:srgbClr val="0B0E14">
+                <a:alpha val="22000"/>
+              </a:srgbClr>
+            </a:outerShdw>
+          </a:effectLst>
+        </p:spPr>
+        <p:style>
+          <a:lnRef idx="1">
+            <a:schemeClr val="accent1"/>
+          </a:lnRef>
+          <a:fillRef idx="3">
+            <a:schemeClr val="accent1"/>
+          </a:fillRef>
+          <a:effectRef idx="2">
+            <a:schemeClr val="accent1"/>
+          </a:effectRef>
+          <a:fontRef idx="minor">
+            <a:schemeClr val="lt1"/>
+          </a:fontRef>
+        </p:style>
+        <p:txBody>
+          <a:bodyPr rtlCol="0" anchor="ctr" wrap="square"/>
+          <a:lstStyle/>
+          <a:p>
+            <a:pPr algn="ctr"/>
+            <a:r>
+              <a:rPr sz="1100" b="1" i="0">
+                <a:solidFill>
+                  <a:srgbClr val="212733"/>
+                </a:solidFill>
+                <a:latin typeface="맑은 고딕"/>
+              </a:rPr>
+              <a:t>원본 PNG</a:t>
+            </a:r>
+          </a:p>
+          <a:p>
+            <a:pPr algn="ctr"/>
+            <a:r>
+              <a:rPr sz="1100" b="0" i="0">
+                <a:solidFill>
+                  <a:srgbClr val="8C919C"/>
+                </a:solidFill>
+                <a:latin typeface="맑은 고딕"/>
+              </a:rPr>
+              <a:t>라벨</a:t>
+            </a:r>
+          </a:p>
+        </p:txBody>
+      </p:sp>
+      <p:sp>
+        <p:nvSpPr>
+          <p:cNvPr id="11" name="Rectangle 10"/>
+          <p:cNvSpPr/>
+          <p:nvPr/>
+        </p:nvSpPr>
+        <p:spPr>
+          <a:xfrm>
+            <a:off x="868680" y="1691640"/>
+            <a:ext cx="1993392" cy="45720"/>
+          </a:xfrm>
+          <a:prstGeom prst="rect">
+            <a:avLst/>
+          </a:prstGeom>
+          <a:solidFill>
+            <a:srgbClr val="C2A14D"/>
+          </a:solidFill>
+          <a:ln>
+            <a:noFill/>
+          </a:ln>
+          <a:effectLst/>
+        </p:spPr>
+        <p:style>
+          <a:lnRef idx="1">
+            <a:schemeClr val="accent1"/>
+          </a:lnRef>
+          <a:fillRef idx="3">
+            <a:schemeClr val="accent1"/>
+          </a:fillRef>
+          <a:effectRef idx="2">
+            <a:schemeClr val="accent1"/>
+          </a:effectRef>
+          <a:fontRef idx="minor">
+            <a:schemeClr val="lt1"/>
+          </a:fontRef>
+        </p:style>
+        <p:txBody>
+          <a:bodyPr rtlCol="0" anchor="ctr"/>
+          <a:lstStyle/>
+          <a:p>
+            <a:pPr algn="ctr"/>
+          </a:p>
+        </p:txBody>
+      </p:sp>
+      <p:sp>
+        <p:nvSpPr>
+          <p:cNvPr id="12" name="TextBox 11"/>
+          <p:cNvSpPr txBox="1"/>
+          <p:nvPr/>
+        </p:nvSpPr>
+        <p:spPr>
+          <a:xfrm>
+            <a:off x="2862072" y="1691640"/>
+            <a:ext cx="274320" cy="841248"/>
+          </a:xfrm>
+          <a:prstGeom prst="rect">
+            <a:avLst/>
+          </a:prstGeom>
+          <a:noFill/>
+        </p:spPr>
+        <p:txBody>
+          <a:bodyPr wrap="none" anchor="ctr">
+            <a:spAutoFit/>
+          </a:bodyPr>
+          <a:lstStyle/>
+          <a:p>
+            <a:pPr algn="ctr"/>
+            <a:r>
+              <a:rPr sz="2000" b="1" i="0">
+                <a:solidFill>
+                  <a:srgbClr val="C2A14D"/>
+                </a:solidFill>
+                <a:latin typeface="맑은 고딕"/>
+              </a:rPr>
+              <a:t>›</a:t>
+            </a:r>
+          </a:p>
+        </p:txBody>
+      </p:sp>
+      <p:sp>
+        <p:nvSpPr>
+          <p:cNvPr id="13" name="Rounded Rectangle 12"/>
+          <p:cNvSpPr/>
+          <p:nvPr/>
+        </p:nvSpPr>
+        <p:spPr>
+          <a:xfrm>
+            <a:off x="3136392" y="1691640"/>
+            <a:ext cx="1993392" cy="841248"/>
+          </a:xfrm>
+          <a:prstGeom prst="roundRect">
+            <a:avLst/>
+          </a:prstGeom>
+          <a:solidFill>
+            <a:srgbClr val="FFFFFF"/>
+          </a:solidFill>
+          <a:ln w="12700">
+            <a:solidFill>
+              <a:srgbClr val="E7E3D8"/>
+            </a:solidFill>
+          </a:ln>
+          <a:effectLst/>
+          <a:effectLst>
+            <a:outerShdw blurRad="90000" dist="38000" dir="5400000" rotWithShape="0">
+              <a:srgbClr val="0B0E14">
+                <a:alpha val="22000"/>
+              </a:srgbClr>
+            </a:outerShdw>
+          </a:effectLst>
+        </p:spPr>
+        <p:style>
+          <a:lnRef idx="1">
+            <a:schemeClr val="accent1"/>
+          </a:lnRef>
+          <a:fillRef idx="3">
+            <a:schemeClr val="accent1"/>
+          </a:fillRef>
+          <a:effectRef idx="2">
+            <a:schemeClr val="accent1"/>
+          </a:effectRef>
+          <a:fontRef idx="minor">
+            <a:schemeClr val="lt1"/>
+          </a:fontRef>
+        </p:style>
+        <p:txBody>
+          <a:bodyPr rtlCol="0" anchor="ctr" wrap="square"/>
+          <a:lstStyle/>
+          <a:p>
+            <a:pPr algn="ctr"/>
+            <a:r>
+              <a:rPr sz="1100" b="1" i="0">
+                <a:solidFill>
+                  <a:srgbClr val="212733"/>
+                </a:solidFill>
+                <a:latin typeface="맑은 고딕"/>
+              </a:rPr>
+              <a:t>V2V / YOLO</a:t>
+            </a:r>
+          </a:p>
+          <a:p>
+            <a:pPr algn="ctr"/>
+            <a:r>
+              <a:rPr sz="1100" b="0" i="0">
+                <a:solidFill>
+                  <a:srgbClr val="8C919C"/>
+                </a:solidFill>
+                <a:latin typeface="맑은 고딕"/>
+              </a:rPr>
+              <a:t>검출</a:t>
+            </a:r>
+          </a:p>
+        </p:txBody>
+      </p:sp>
+      <p:sp>
+        <p:nvSpPr>
+          <p:cNvPr id="14" name="Rectangle 13"/>
+          <p:cNvSpPr/>
+          <p:nvPr/>
+        </p:nvSpPr>
+        <p:spPr>
+          <a:xfrm>
+            <a:off x="3136392" y="1691640"/>
+            <a:ext cx="1993392" cy="45720"/>
+          </a:xfrm>
+          <a:prstGeom prst="rect">
+            <a:avLst/>
+          </a:prstGeom>
+          <a:solidFill>
+            <a:srgbClr val="C2A14D"/>
+          </a:solidFill>
+          <a:ln>
+            <a:noFill/>
+          </a:ln>
+          <a:effectLst/>
+        </p:spPr>
+        <p:style>
+          <a:lnRef idx="1">
+            <a:schemeClr val="accent1"/>
+          </a:lnRef>
+          <a:fillRef idx="3">
+            <a:schemeClr val="accent1"/>
+          </a:fillRef>
+          <a:effectRef idx="2">
+            <a:schemeClr val="accent1"/>
+          </a:effectRef>
+          <a:fontRef idx="minor">
+            <a:schemeClr val="lt1"/>
+          </a:fontRef>
+        </p:style>
+        <p:txBody>
+          <a:bodyPr rtlCol="0" anchor="ctr"/>
+          <a:lstStyle/>
+          <a:p>
+            <a:pPr algn="ctr"/>
+          </a:p>
+        </p:txBody>
+      </p:sp>
+      <p:sp>
+        <p:nvSpPr>
+          <p:cNvPr id="15" name="TextBox 14"/>
+          <p:cNvSpPr txBox="1"/>
+          <p:nvPr/>
+        </p:nvSpPr>
+        <p:spPr>
+          <a:xfrm>
+            <a:off x="5129784" y="1691640"/>
+            <a:ext cx="274320" cy="841248"/>
+          </a:xfrm>
+          <a:prstGeom prst="rect">
+            <a:avLst/>
+          </a:prstGeom>
+          <a:noFill/>
+        </p:spPr>
+        <p:txBody>
+          <a:bodyPr wrap="none" anchor="ctr">
+            <a:spAutoFit/>
+          </a:bodyPr>
+          <a:lstStyle/>
+          <a:p>
+            <a:pPr algn="ctr"/>
+            <a:r>
+              <a:rPr sz="2000" b="1" i="0">
+                <a:solidFill>
+                  <a:srgbClr val="C2A14D"/>
+                </a:solidFill>
+                <a:latin typeface="맑은 고딕"/>
+              </a:rPr>
+              <a:t>›</a:t>
+            </a:r>
+          </a:p>
+        </p:txBody>
+      </p:sp>
+      <p:sp>
+        <p:nvSpPr>
+          <p:cNvPr id="16" name="Rounded Rectangle 15"/>
+          <p:cNvSpPr/>
+          <p:nvPr/>
+        </p:nvSpPr>
+        <p:spPr>
+          <a:xfrm>
+            <a:off x="5404104" y="1691640"/>
+            <a:ext cx="1993392" cy="841248"/>
+          </a:xfrm>
+          <a:prstGeom prst="roundRect">
+            <a:avLst/>
+          </a:prstGeom>
+          <a:solidFill>
+            <a:srgbClr val="FFFFFF"/>
+          </a:solidFill>
+          <a:ln w="12700">
+            <a:solidFill>
+              <a:srgbClr val="E7E3D8"/>
+            </a:solidFill>
+          </a:ln>
+          <a:effectLst/>
+          <a:effectLst>
+            <a:outerShdw blurRad="90000" dist="38000" dir="5400000" rotWithShape="0">
+              <a:srgbClr val="0B0E14">
+                <a:alpha val="22000"/>
+              </a:srgbClr>
+            </a:outerShdw>
+          </a:effectLst>
+        </p:spPr>
+        <p:style>
+          <a:lnRef idx="1">
+            <a:schemeClr val="accent1"/>
+          </a:lnRef>
+          <a:fillRef idx="3">
+            <a:schemeClr val="accent1"/>
+          </a:fillRef>
+          <a:effectRef idx="2">
+            <a:schemeClr val="accent1"/>
+          </a:effectRef>
+          <a:fontRef idx="minor">
+            <a:schemeClr val="lt1"/>
+          </a:fontRef>
+        </p:style>
+        <p:txBody>
+          <a:bodyPr rtlCol="0" anchor="ctr" wrap="square"/>
+          <a:lstStyle/>
+          <a:p>
+            <a:pPr algn="ctr"/>
+            <a:r>
+              <a:rPr sz="1100" b="1" i="0">
+                <a:solidFill>
+                  <a:srgbClr val="212733"/>
+                </a:solidFill>
+                <a:latin typeface="맑은 고딕"/>
+              </a:rPr>
+              <a:t>SVG</a:t>
+            </a:r>
+          </a:p>
+          <a:p>
+            <a:pPr algn="ctr"/>
+            <a:r>
+              <a:rPr sz="1100" b="0" i="0">
+                <a:solidFill>
+                  <a:srgbClr val="8C919C"/>
+                </a:solidFill>
+                <a:latin typeface="맑은 고딕"/>
+              </a:rPr>
+              <a:t>완전기하</a:t>
+            </a:r>
+          </a:p>
+        </p:txBody>
+      </p:sp>
+      <p:sp>
+        <p:nvSpPr>
+          <p:cNvPr id="17" name="Rectangle 16"/>
+          <p:cNvSpPr/>
+          <p:nvPr/>
+        </p:nvSpPr>
+        <p:spPr>
+          <a:xfrm>
+            <a:off x="5404104" y="1691640"/>
+            <a:ext cx="1993392" cy="45720"/>
+          </a:xfrm>
+          <a:prstGeom prst="rect">
+            <a:avLst/>
+          </a:prstGeom>
+          <a:solidFill>
+            <a:srgbClr val="C2A14D"/>
+          </a:solidFill>
+          <a:ln>
+            <a:noFill/>
+          </a:ln>
+          <a:effectLst/>
+        </p:spPr>
+        <p:style>
+          <a:lnRef idx="1">
+            <a:schemeClr val="accent1"/>
+          </a:lnRef>
+          <a:fillRef idx="3">
+            <a:schemeClr val="accent1"/>
+          </a:fillRef>
+          <a:effectRef idx="2">
+            <a:schemeClr val="accent1"/>
+          </a:effectRef>
+          <a:fontRef idx="minor">
+            <a:schemeClr val="lt1"/>
+          </a:fontRef>
+        </p:style>
+        <p:txBody>
+          <a:bodyPr rtlCol="0" anchor="ctr"/>
+          <a:lstStyle/>
+          <a:p>
+            <a:pPr algn="ctr"/>
+          </a:p>
+        </p:txBody>
+      </p:sp>
+      <p:sp>
+        <p:nvSpPr>
+          <p:cNvPr id="18" name="TextBox 17"/>
+          <p:cNvSpPr txBox="1"/>
+          <p:nvPr/>
+        </p:nvSpPr>
+        <p:spPr>
+          <a:xfrm>
+            <a:off x="7397496" y="1691640"/>
+            <a:ext cx="274320" cy="841248"/>
+          </a:xfrm>
+          <a:prstGeom prst="rect">
+            <a:avLst/>
+          </a:prstGeom>
+          <a:noFill/>
+        </p:spPr>
+        <p:txBody>
+          <a:bodyPr wrap="none" anchor="ctr">
+            <a:spAutoFit/>
+          </a:bodyPr>
+          <a:lstStyle/>
+          <a:p>
+            <a:pPr algn="ctr"/>
+            <a:r>
+              <a:rPr sz="2000" b="1" i="0">
+                <a:solidFill>
+                  <a:srgbClr val="C2A14D"/>
+                </a:solidFill>
+                <a:latin typeface="맑은 고딕"/>
+              </a:rPr>
+              <a:t>›</a:t>
+            </a:r>
+          </a:p>
+        </p:txBody>
+      </p:sp>
+      <p:sp>
+        <p:nvSpPr>
+          <p:cNvPr id="19" name="Rounded Rectangle 18"/>
+          <p:cNvSpPr/>
+          <p:nvPr/>
+        </p:nvSpPr>
+        <p:spPr>
+          <a:xfrm>
+            <a:off x="7671816" y="1691640"/>
+            <a:ext cx="1993392" cy="841248"/>
+          </a:xfrm>
+          <a:prstGeom prst="roundRect">
+            <a:avLst/>
+          </a:prstGeom>
+          <a:solidFill>
+            <a:srgbClr val="FFFFFF"/>
+          </a:solidFill>
+          <a:ln w="12700">
+            <a:solidFill>
+              <a:srgbClr val="E7E3D8"/>
+            </a:solidFill>
+          </a:ln>
+          <a:effectLst/>
+          <a:effectLst>
+            <a:outerShdw blurRad="90000" dist="38000" dir="5400000" rotWithShape="0">
+              <a:srgbClr val="0B0E14">
+                <a:alpha val="22000"/>
+              </a:srgbClr>
+            </a:outerShdw>
+          </a:effectLst>
+        </p:spPr>
+        <p:style>
+          <a:lnRef idx="1">
+            <a:schemeClr val="accent1"/>
+          </a:lnRef>
+          <a:fillRef idx="3">
+            <a:schemeClr val="accent1"/>
+          </a:fillRef>
+          <a:effectRef idx="2">
+            <a:schemeClr val="accent1"/>
+          </a:effectRef>
+          <a:fontRef idx="minor">
+            <a:schemeClr val="lt1"/>
+          </a:fontRef>
+        </p:style>
+        <p:txBody>
+          <a:bodyPr rtlCol="0" anchor="ctr" wrap="square"/>
+          <a:lstStyle/>
+          <a:p>
+            <a:pPr algn="ctr"/>
+            <a:r>
+              <a:rPr sz="1100" b="1" i="0">
+                <a:solidFill>
+                  <a:srgbClr val="212733"/>
+                </a:solidFill>
+                <a:latin typeface="맑은 고딕"/>
+              </a:rPr>
+              <a:t>build</a:t>
+            </a:r>
+          </a:p>
+          <a:p>
+            <a:pPr algn="ctr"/>
+            <a:r>
+              <a:rPr sz="1100" b="0" i="0">
+                <a:solidFill>
+                  <a:srgbClr val="8C919C"/>
+                </a:solidFill>
+                <a:latin typeface="맑은 고딕"/>
+              </a:rPr>
+              <a:t>g-0.3</a:t>
+            </a:r>
+          </a:p>
+        </p:txBody>
+      </p:sp>
+      <p:sp>
+        <p:nvSpPr>
+          <p:cNvPr id="20" name="Rectangle 19"/>
+          <p:cNvSpPr/>
+          <p:nvPr/>
+        </p:nvSpPr>
+        <p:spPr>
+          <a:xfrm>
+            <a:off x="7671816" y="1691640"/>
+            <a:ext cx="1993392" cy="45720"/>
+          </a:xfrm>
+          <a:prstGeom prst="rect">
+            <a:avLst/>
+          </a:prstGeom>
+          <a:solidFill>
+            <a:srgbClr val="C2A14D"/>
+          </a:solidFill>
+          <a:ln>
+            <a:noFill/>
+          </a:ln>
+          <a:effectLst/>
+        </p:spPr>
+        <p:style>
+          <a:lnRef idx="1">
+            <a:schemeClr val="accent1"/>
+          </a:lnRef>
+          <a:fillRef idx="3">
+            <a:schemeClr val="accent1"/>
+          </a:fillRef>
+          <a:effectRef idx="2">
+            <a:schemeClr val="accent1"/>
+          </a:effectRef>
+          <a:fontRef idx="minor">
+            <a:schemeClr val="lt1"/>
+          </a:fontRef>
+        </p:style>
+        <p:txBody>
+          <a:bodyPr rtlCol="0" anchor="ctr"/>
+          <a:lstStyle/>
+          <a:p>
+            <a:pPr algn="ctr"/>
+          </a:p>
+        </p:txBody>
+      </p:sp>
+      <p:sp>
+        <p:nvSpPr>
+          <p:cNvPr id="21" name="TextBox 20"/>
+          <p:cNvSpPr txBox="1"/>
+          <p:nvPr/>
+        </p:nvSpPr>
+        <p:spPr>
+          <a:xfrm>
+            <a:off x="9665208" y="1691640"/>
+            <a:ext cx="274320" cy="841248"/>
+          </a:xfrm>
+          <a:prstGeom prst="rect">
+            <a:avLst/>
+          </a:prstGeom>
+          <a:noFill/>
+        </p:spPr>
+        <p:txBody>
+          <a:bodyPr wrap="none" anchor="ctr">
+            <a:spAutoFit/>
+          </a:bodyPr>
+          <a:lstStyle/>
+          <a:p>
+            <a:pPr algn="ctr"/>
+            <a:r>
+              <a:rPr sz="2000" b="1" i="0">
+                <a:solidFill>
+                  <a:srgbClr val="C2A14D"/>
+                </a:solidFill>
+                <a:latin typeface="맑은 고딕"/>
+              </a:rPr>
+              <a:t>›</a:t>
+            </a:r>
+          </a:p>
+        </p:txBody>
+      </p:sp>
+      <p:sp>
+        <p:nvSpPr>
+          <p:cNvPr id="22" name="Rounded Rectangle 21"/>
+          <p:cNvSpPr/>
+          <p:nvPr/>
+        </p:nvSpPr>
+        <p:spPr>
+          <a:xfrm>
+            <a:off x="9939528" y="1691640"/>
+            <a:ext cx="1993392" cy="841248"/>
+          </a:xfrm>
+          <a:prstGeom prst="roundRect">
+            <a:avLst/>
+          </a:prstGeom>
+          <a:solidFill>
+            <a:srgbClr val="FFFFFF"/>
+          </a:solidFill>
+          <a:ln w="12700">
+            <a:solidFill>
+              <a:srgbClr val="E7E3D8"/>
+            </a:solidFill>
+          </a:ln>
+          <a:effectLst/>
+          <a:effectLst>
+            <a:outerShdw blurRad="90000" dist="38000" dir="5400000" rotWithShape="0">
+              <a:srgbClr val="0B0E14">
+                <a:alpha val="22000"/>
+              </a:srgbClr>
+            </a:outerShdw>
+          </a:effectLst>
+        </p:spPr>
+        <p:style>
+          <a:lnRef idx="1">
+            <a:schemeClr val="accent1"/>
+          </a:lnRef>
+          <a:fillRef idx="3">
+            <a:schemeClr val="accent1"/>
+          </a:fillRef>
+          <a:effectRef idx="2">
+            <a:schemeClr val="accent1"/>
+          </a:effectRef>
+          <a:fontRef idx="minor">
+            <a:schemeClr val="lt1"/>
+          </a:fontRef>
+        </p:style>
+        <p:txBody>
+          <a:bodyPr rtlCol="0" anchor="ctr" wrap="square"/>
+          <a:lstStyle/>
+          <a:p>
+            <a:pPr algn="ctr"/>
+            <a:r>
+              <a:rPr sz="1100" b="1" i="0">
+                <a:solidFill>
+                  <a:srgbClr val="212733"/>
+                </a:solidFill>
+                <a:latin typeface="맑은 고딕"/>
+              </a:rPr>
+              <a:t>통일 그래프</a:t>
+            </a:r>
+          </a:p>
+          <a:p>
+            <a:pPr algn="ctr"/>
+            <a:r>
+              <a:rPr sz="1100" b="0" i="0">
+                <a:solidFill>
+                  <a:srgbClr val="8C919C"/>
+                </a:solidFill>
+                <a:latin typeface="맑은 고딕"/>
+              </a:rPr>
+              <a:t>검증</a:t>
+            </a:r>
+          </a:p>
+        </p:txBody>
+      </p:sp>
+      <p:sp>
+        <p:nvSpPr>
+          <p:cNvPr id="23" name="Rectangle 22"/>
+          <p:cNvSpPr/>
+          <p:nvPr/>
+        </p:nvSpPr>
+        <p:spPr>
+          <a:xfrm>
+            <a:off x="9939528" y="1691640"/>
+            <a:ext cx="1993392" cy="45720"/>
+          </a:xfrm>
+          <a:prstGeom prst="rect">
+            <a:avLst/>
+          </a:prstGeom>
+          <a:solidFill>
+            <a:srgbClr val="C2A14D"/>
+          </a:solidFill>
+          <a:ln>
+            <a:noFill/>
+          </a:ln>
+          <a:effectLst/>
+        </p:spPr>
+        <p:style>
+          <a:lnRef idx="1">
+            <a:schemeClr val="accent1"/>
+          </a:lnRef>
+          <a:fillRef idx="3">
+            <a:schemeClr val="accent1"/>
+          </a:fillRef>
+          <a:effectRef idx="2">
+            <a:schemeClr val="accent1"/>
+          </a:effectRef>
+          <a:fontRef idx="minor">
+            <a:schemeClr val="lt1"/>
+          </a:fontRef>
+        </p:style>
+        <p:txBody>
+          <a:bodyPr rtlCol="0" anchor="ctr"/>
+          <a:lstStyle/>
+          <a:p>
+            <a:pPr algn="ctr"/>
+          </a:p>
+        </p:txBody>
+      </p:sp>
+      <p:sp>
+        <p:nvSpPr>
+          <p:cNvPr id="24" name="TextBox 23"/>
+          <p:cNvSpPr txBox="1"/>
+          <p:nvPr/>
+        </p:nvSpPr>
+        <p:spPr>
+          <a:xfrm>
+            <a:off x="731520" y="3017520"/>
+            <a:ext cx="10698480" cy="3108960"/>
+          </a:xfrm>
+          <a:prstGeom prst="rect">
+            <a:avLst/>
+          </a:prstGeom>
+          <a:noFill/>
+        </p:spPr>
+        <p:txBody>
+          <a:bodyPr wrap="square" anchor="t">
+            <a:spAutoFit/>
+          </a:bodyPr>
+          <a:lstStyle/>
+          <a:p>
+            <a:pPr algn="l">
+              <a:spcBef>
+                <a:spcPts val="0"/>
+              </a:spcBef>
+              <a:spcAft>
+                <a:spcPts val="900"/>
+              </a:spcAft>
+            </a:pPr>
+            <a:r>
+              <a:rPr sz="1400" b="1" i="0" spc="100">
+                <a:solidFill>
+                  <a:srgbClr val="C2A14D"/>
+                </a:solidFill>
+                <a:latin typeface="맑은 고딕"/>
+              </a:rPr>
+              <a:t>추출 핵심 기법</a:t>
+            </a:r>
+          </a:p>
+          <a:p>
+            <a:pPr algn="l">
+              <a:spcBef>
+                <a:spcPts val="0"/>
+              </a:spcBef>
+              <a:spcAft>
+                <a:spcPts val="900"/>
+              </a:spcAft>
+            </a:pPr>
+            <a:r>
+              <a:rPr sz="1350" b="1" i="0">
+                <a:solidFill>
+                  <a:srgbClr val="C2A14D"/>
+                </a:solidFill>
+                <a:latin typeface="맑은 고딕"/>
+              </a:rPr>
+              <a:t>—  </a:t>
+            </a:r>
+            <a:r>
+              <a:rPr sz="1350" b="0" i="0">
+                <a:solidFill>
+                  <a:srgbClr val="212733"/>
+                </a:solidFill>
+                <a:latin typeface="맑은 고딕"/>
+              </a:rPr>
+              <a:t>V2V(vector→vector) YOLO 검출 — 방(SPA) mAP 0.90→0.964(5→100 epoch) · 벽(STR)은 약함(용량·해상도 레버)</a:t>
+            </a:r>
+          </a:p>
+          <a:p>
+            <a:pPr algn="l">
+              <a:spcBef>
+                <a:spcPts val="0"/>
+              </a:spcBef>
+              <a:spcAft>
+                <a:spcPts val="900"/>
+              </a:spcAft>
+            </a:pPr>
+            <a:r>
+              <a:rPr sz="1350" b="1" i="0">
+                <a:solidFill>
+                  <a:srgbClr val="C2A14D"/>
+                </a:solidFill>
+                <a:latin typeface="맑은 고딕"/>
+              </a:rPr>
+              <a:t>—  </a:t>
+            </a:r>
+            <a:r>
+              <a:rPr sz="1350" b="0" i="0">
+                <a:solidFill>
+                  <a:srgbClr val="212733"/>
+                </a:solidFill>
+                <a:latin typeface="맑은 고딕"/>
+              </a:rPr>
+              <a:t>objocr 2-패스 세대크롭 — ① 전체 시트 SPA로 방 위치 → 세대 군집(union-find)  ② 세대별 크롭 → SPA(768)·STR(1024) 재검출 → 시트좌표 역오프셋</a:t>
+            </a:r>
+          </a:p>
+          <a:p>
+            <a:pPr algn="l">
+              <a:spcBef>
+                <a:spcPts val="0"/>
+              </a:spcBef>
+              <a:spcAft>
+                <a:spcPts val="900"/>
+              </a:spcAft>
+            </a:pPr>
+            <a:r>
+              <a:rPr sz="1350" b="1" i="0">
+                <a:solidFill>
+                  <a:srgbClr val="C2A14D"/>
+                </a:solidFill>
+                <a:latin typeface="맑은 고딕"/>
+              </a:rPr>
+              <a:t>—  </a:t>
+            </a:r>
+            <a:r>
+              <a:rPr sz="1350" b="0" i="0">
+                <a:solidFill>
+                  <a:srgbClr val="212733"/>
+                </a:solidFill>
+                <a:latin typeface="맑은 고딕"/>
+              </a:rPr>
+              <a:t>중복 제거 — 동일 PNG를 라벨 종류별 다른 키로 중복배포 → CRC32+크기 지문 dedup (0 충돌 증명, 231 복구)</a:t>
+            </a:r>
+          </a:p>
+          <a:p>
+            <a:pPr algn="l">
+              <a:spcBef>
+                <a:spcPts val="0"/>
+              </a:spcBef>
+              <a:spcAft>
+                <a:spcPts val="900"/>
+              </a:spcAft>
+            </a:pPr>
+            <a:r>
+              <a:rPr sz="1350" b="1" i="0">
+                <a:solidFill>
+                  <a:srgbClr val="C2A14D"/>
+                </a:solidFill>
+                <a:latin typeface="맑은 고딕"/>
+              </a:rPr>
+              <a:t>—  </a:t>
+            </a:r>
+            <a:r>
+              <a:rPr sz="1350" b="0" i="0">
+                <a:solidFill>
+                  <a:srgbClr val="212733"/>
+                </a:solidFill>
+                <a:latin typeface="맑은 고딕"/>
+              </a:rPr>
+              <a:t>통일 그래프(g-0.3) — SPA(방)+STR(벽)+OBJ(기구 ~9k) 지문 병합 → 연결공간 복원 · 문 재배정 · 개방연결</a:t>
+            </a:r>
+          </a:p>
+          <a:p>
+            <a:pPr algn="l">
+              <a:spcBef>
+                <a:spcPts val="0"/>
+              </a:spcBef>
+              <a:spcAft>
+                <a:spcPts val="900"/>
+              </a:spcAft>
+            </a:pPr>
+            <a:r>
+              <a:rPr sz="1350" b="1" i="0">
+                <a:solidFill>
+                  <a:srgbClr val="C2A14D"/>
+                </a:solidFill>
+                <a:latin typeface="맑은 고딕"/>
+              </a:rPr>
+              <a:t>—  </a:t>
+            </a:r>
+            <a:r>
+              <a:rPr sz="1350" b="1" i="0">
+                <a:solidFill>
+                  <a:srgbClr val="212733"/>
+                </a:solidFill>
+                <a:latin typeface="맑은 고딕"/>
+              </a:rPr>
+              <a:t>산출: G-라인 빌드 18,503 도면 / 40,495 세대 (provenance: dual·spa·str·objocr)</a:t>
             </a:r>
           </a:p>
         </p:txBody>
@@ -20049,8 +22107,8 @@
         </p:nvSpPr>
         <p:spPr>
           <a:xfrm>
-            <a:off x="731520" y="1600200"/>
-            <a:ext cx="10698480" cy="365760"/>
+            <a:off x="731520" y="1572768"/>
+            <a:ext cx="10698480" cy="320040"/>
           </a:xfrm>
           <a:prstGeom prst="rect">
             <a:avLst/>
@@ -20072,13 +22130,13 @@
               </a:spcAft>
             </a:pPr>
             <a:r>
-              <a:rPr sz="1600" b="1" i="0">
+              <a:rPr sz="1400" b="1" i="0">
                 <a:solidFill>
                   <a:srgbClr val="212733"/>
                 </a:solidFill>
                 <a:latin typeface="맑은 고딕"/>
               </a:rPr>
-              <a:t>‘온전한 데이터만 학습’ — 구성 기반 자동 분류기(좌표 불필요, 검수·학습 단일 소스)</a:t>
+              <a:t>‘온전한 데이터만 학습’ — 구성 기반 자동 분류기(좌표 불필요) · AI-Hub APT 38,203</a:t>
             </a:r>
           </a:p>
         </p:txBody>
@@ -20091,8 +22149,8 @@
         </p:nvSpPr>
         <p:spPr>
           <a:xfrm>
-            <a:off x="731520" y="2240280"/>
-            <a:ext cx="5257800" cy="1325880"/>
+            <a:off x="731520" y="2057400"/>
+            <a:ext cx="3383280" cy="1325880"/>
           </a:xfrm>
           <a:prstGeom prst="rect">
             <a:avLst/>
@@ -20144,8 +22202,8 @@
         </p:nvSpPr>
         <p:spPr>
           <a:xfrm>
-            <a:off x="731520" y="2240280"/>
-            <a:ext cx="5257800" cy="45720"/>
+            <a:off x="731520" y="2057400"/>
+            <a:ext cx="3383280" cy="45720"/>
           </a:xfrm>
           <a:prstGeom prst="rect">
             <a:avLst/>
@@ -20188,8 +22246,8 @@
         </p:nvSpPr>
         <p:spPr>
           <a:xfrm>
-            <a:off x="987552" y="2423160"/>
-            <a:ext cx="4800600" cy="320040"/>
+            <a:off x="987552" y="2240280"/>
+            <a:ext cx="2926080" cy="320040"/>
           </a:xfrm>
           <a:prstGeom prst="rect">
             <a:avLst/>
@@ -20217,7 +22275,7 @@
                 </a:solidFill>
                 <a:latin typeface="맑은 고딕"/>
               </a:rPr>
-              <a:t>온전 (사용) · AI-HUB APT 38,203 중</a:t>
+              <a:t>온전 (사용)</a:t>
             </a:r>
           </a:p>
         </p:txBody>
@@ -20230,8 +22288,8 @@
         </p:nvSpPr>
         <p:spPr>
           <a:xfrm>
-            <a:off x="969264" y="2715768"/>
-            <a:ext cx="4892040" cy="548640"/>
+            <a:off x="969264" y="2532888"/>
+            <a:ext cx="3017520" cy="548640"/>
           </a:xfrm>
           <a:prstGeom prst="rect">
             <a:avLst/>
@@ -20272,8 +22330,8 @@
         </p:nvSpPr>
         <p:spPr>
           <a:xfrm>
-            <a:off x="987552" y="3218688"/>
-            <a:ext cx="4800600" cy="274320"/>
+            <a:off x="987552" y="3035808"/>
+            <a:ext cx="2926080" cy="274320"/>
           </a:xfrm>
           <a:prstGeom prst="rect">
             <a:avLst/>
@@ -20306,16 +22364,540 @@
           </a:p>
         </p:txBody>
       </p:sp>
-      <p:sp>
-        <p:nvSpPr>
-          <p:cNvPr id="16" name="Rectangle 15"/>
+      <p:graphicFrame>
+        <p:nvGraphicFramePr>
+          <p:cNvPr id="16" name="Table 15"/>
+          <p:cNvGraphicFramePr>
+            <a:graphicFrameLocks noGrp="1"/>
+          </p:cNvGraphicFramePr>
+          <p:nvPr/>
+        </p:nvGraphicFramePr>
+        <p:xfrm>
+          <a:off x="4434840" y="2057400"/>
+          <a:ext cx="7205472" cy="2944368"/>
+        </p:xfrm>
+        <a:graphic>
+          <a:graphicData uri="http://schemas.openxmlformats.org/drawingml/2006/table">
+            <a:tbl>
+              <a:tblPr>
+                <a:tableStyleId>{5C22544A-7EE6-4342-B048-85BDC9FD1C3A}</a:tableStyleId>
+              </a:tblPr>
+              <a:tblGrid>
+                <a:gridCol w="2011680"/>
+                <a:gridCol w="1097280"/>
+                <a:gridCol w="4096512"/>
+              </a:tblGrid>
+              <a:tr h="420624">
+                <a:tc>
+                  <a:txBody>
+                    <a:bodyPr/>
+                    <a:lstStyle/>
+                    <a:p>
+                      <a:pPr algn="l"/>
+                      <a:r>
+                        <a:rPr sz="1150" b="1" i="0">
+                          <a:solidFill>
+                            <a:srgbClr val="E6D6A6"/>
+                          </a:solidFill>
+                          <a:latin typeface="맑은 고딕"/>
+                        </a:rPr>
+                        <a:t>보정필요 사유</a:t>
+                      </a:r>
+                    </a:p>
+                  </a:txBody>
+                  <a:tcPr marT="38100" marB="38100" marL="114300" marR="114300" anchor="ctr">
+                    <a:solidFill>
+                      <a:srgbClr val="10141C"/>
+                    </a:solidFill>
+                  </a:tcPr>
+                </a:tc>
+                <a:tc>
+                  <a:txBody>
+                    <a:bodyPr/>
+                    <a:lstStyle/>
+                    <a:p>
+                      <a:pPr algn="ctr"/>
+                      <a:r>
+                        <a:rPr sz="1150" b="1" i="0">
+                          <a:solidFill>
+                            <a:srgbClr val="E6D6A6"/>
+                          </a:solidFill>
+                          <a:latin typeface="맑은 고딕"/>
+                        </a:rPr>
+                        <a:t>건수</a:t>
+                      </a:r>
+                    </a:p>
+                  </a:txBody>
+                  <a:tcPr marT="38100" marB="38100" marL="114300" marR="114300" anchor="ctr">
+                    <a:solidFill>
+                      <a:srgbClr val="10141C"/>
+                    </a:solidFill>
+                  </a:tcPr>
+                </a:tc>
+                <a:tc>
+                  <a:txBody>
+                    <a:bodyPr/>
+                    <a:lstStyle/>
+                    <a:p>
+                      <a:pPr algn="ctr"/>
+                      <a:r>
+                        <a:rPr sz="1150" b="1" i="0">
+                          <a:solidFill>
+                            <a:srgbClr val="E6D6A6"/>
+                          </a:solidFill>
+                          <a:latin typeface="맑은 고딕"/>
+                        </a:rPr>
+                        <a:t>원인</a:t>
+                      </a:r>
+                    </a:p>
+                  </a:txBody>
+                  <a:tcPr marT="38100" marB="38100" marL="114300" marR="114300" anchor="ctr">
+                    <a:solidFill>
+                      <a:srgbClr val="10141C"/>
+                    </a:solidFill>
+                  </a:tcPr>
+                </a:tc>
+              </a:tr>
+              <a:tr h="420624">
+                <a:tc>
+                  <a:txBody>
+                    <a:bodyPr/>
+                    <a:lstStyle/>
+                    <a:p>
+                      <a:pPr algn="l"/>
+                      <a:r>
+                        <a:rPr sz="1150" b="1" i="0">
+                          <a:solidFill>
+                            <a:srgbClr val="212733"/>
+                          </a:solidFill>
+                          <a:latin typeface="맑은 고딕"/>
+                        </a:rPr>
+                        <a:t>현관 ≠ 1</a:t>
+                      </a:r>
+                    </a:p>
+                  </a:txBody>
+                  <a:tcPr marT="38100" marB="38100" marL="114300" marR="114300" anchor="ctr">
+                    <a:solidFill>
+                      <a:srgbClr val="FFFFFF"/>
+                    </a:solidFill>
+                  </a:tcPr>
+                </a:tc>
+                <a:tc>
+                  <a:txBody>
+                    <a:bodyPr/>
+                    <a:lstStyle/>
+                    <a:p>
+                      <a:pPr algn="ctr"/>
+                      <a:r>
+                        <a:rPr sz="1150" b="0" i="0">
+                          <a:solidFill>
+                            <a:srgbClr val="212733"/>
+                          </a:solidFill>
+                          <a:latin typeface="맑은 고딕"/>
+                        </a:rPr>
+                        <a:t>5,142</a:t>
+                      </a:r>
+                    </a:p>
+                  </a:txBody>
+                  <a:tcPr marT="38100" marB="38100" marL="114300" marR="114300" anchor="ctr">
+                    <a:solidFill>
+                      <a:srgbClr val="FFFFFF"/>
+                    </a:solidFill>
+                  </a:tcPr>
+                </a:tc>
+                <a:tc>
+                  <a:txBody>
+                    <a:bodyPr/>
+                    <a:lstStyle/>
+                    <a:p>
+                      <a:pPr algn="ctr"/>
+                      <a:r>
+                        <a:rPr sz="1150" b="0" i="0">
+                          <a:solidFill>
+                            <a:srgbClr val="212733"/>
+                          </a:solidFill>
+                          <a:latin typeface="맑은 고딕"/>
+                        </a:rPr>
+                        <a:t>도면 1장에 다세대 병합 — 세대 분할 필요</a:t>
+                      </a:r>
+                    </a:p>
+                  </a:txBody>
+                  <a:tcPr marT="38100" marB="38100" marL="114300" marR="114300" anchor="ctr">
+                    <a:solidFill>
+                      <a:srgbClr val="FFFFFF"/>
+                    </a:solidFill>
+                  </a:tcPr>
+                </a:tc>
+              </a:tr>
+              <a:tr h="420624">
+                <a:tc>
+                  <a:txBody>
+                    <a:bodyPr/>
+                    <a:lstStyle/>
+                    <a:p>
+                      <a:pPr algn="l"/>
+                      <a:r>
+                        <a:rPr sz="1150" b="1" i="0">
+                          <a:solidFill>
+                            <a:srgbClr val="212733"/>
+                          </a:solidFill>
+                          <a:latin typeface="맑은 고딕"/>
+                        </a:rPr>
+                        <a:t>발코니 과다(&gt;4)</a:t>
+                      </a:r>
+                    </a:p>
+                  </a:txBody>
+                  <a:tcPr marT="38100" marB="38100" marL="114300" marR="114300" anchor="ctr">
+                    <a:solidFill>
+                      <a:srgbClr val="FBFAF6"/>
+                    </a:solidFill>
+                  </a:tcPr>
+                </a:tc>
+                <a:tc>
+                  <a:txBody>
+                    <a:bodyPr/>
+                    <a:lstStyle/>
+                    <a:p>
+                      <a:pPr algn="ctr"/>
+                      <a:r>
+                        <a:rPr sz="1150" b="0" i="0">
+                          <a:solidFill>
+                            <a:srgbClr val="212733"/>
+                          </a:solidFill>
+                          <a:latin typeface="맑은 고딕"/>
+                        </a:rPr>
+                        <a:t>4,904</a:t>
+                      </a:r>
+                    </a:p>
+                  </a:txBody>
+                  <a:tcPr marT="38100" marB="38100" marL="114300" marR="114300" anchor="ctr">
+                    <a:solidFill>
+                      <a:srgbClr val="FBFAF6"/>
+                    </a:solidFill>
+                  </a:tcPr>
+                </a:tc>
+                <a:tc>
+                  <a:txBody>
+                    <a:bodyPr/>
+                    <a:lstStyle/>
+                    <a:p>
+                      <a:pPr algn="ctr"/>
+                      <a:r>
+                        <a:rPr sz="1150" b="0" i="0">
+                          <a:solidFill>
+                            <a:srgbClr val="212733"/>
+                          </a:solidFill>
+                          <a:latin typeface="맑은 고딕"/>
+                        </a:rPr>
+                        <a:t>확장발코니 옛 벽선이 방으로 오검출</a:t>
+                      </a:r>
+                    </a:p>
+                  </a:txBody>
+                  <a:tcPr marT="38100" marB="38100" marL="114300" marR="114300" anchor="ctr">
+                    <a:solidFill>
+                      <a:srgbClr val="FBFAF6"/>
+                    </a:solidFill>
+                  </a:tcPr>
+                </a:tc>
+              </a:tr>
+              <a:tr h="420624">
+                <a:tc>
+                  <a:txBody>
+                    <a:bodyPr/>
+                    <a:lstStyle/>
+                    <a:p>
+                      <a:pPr algn="l"/>
+                      <a:r>
+                        <a:rPr sz="1150" b="1" i="0">
+                          <a:solidFill>
+                            <a:srgbClr val="212733"/>
+                          </a:solidFill>
+                          <a:latin typeface="맑은 고딕"/>
+                        </a:rPr>
+                        <a:t>거실 ≠ 1</a:t>
+                      </a:r>
+                    </a:p>
+                  </a:txBody>
+                  <a:tcPr marT="38100" marB="38100" marL="114300" marR="114300" anchor="ctr">
+                    <a:solidFill>
+                      <a:srgbClr val="FFFFFF"/>
+                    </a:solidFill>
+                  </a:tcPr>
+                </a:tc>
+                <a:tc>
+                  <a:txBody>
+                    <a:bodyPr/>
+                    <a:lstStyle/>
+                    <a:p>
+                      <a:pPr algn="ctr"/>
+                      <a:r>
+                        <a:rPr sz="1150" b="0" i="0">
+                          <a:solidFill>
+                            <a:srgbClr val="212733"/>
+                          </a:solidFill>
+                          <a:latin typeface="맑은 고딕"/>
+                        </a:rPr>
+                        <a:t>4,521</a:t>
+                      </a:r>
+                    </a:p>
+                  </a:txBody>
+                  <a:tcPr marT="38100" marB="38100" marL="114300" marR="114300" anchor="ctr">
+                    <a:solidFill>
+                      <a:srgbClr val="FFFFFF"/>
+                    </a:solidFill>
+                  </a:tcPr>
+                </a:tc>
+                <a:tc>
+                  <a:txBody>
+                    <a:bodyPr/>
+                    <a:lstStyle/>
+                    <a:p>
+                      <a:pPr algn="ctr"/>
+                      <a:r>
+                        <a:rPr sz="1150" b="0" i="0">
+                          <a:solidFill>
+                            <a:srgbClr val="212733"/>
+                          </a:solidFill>
+                          <a:latin typeface="맑은 고딕"/>
+                        </a:rPr>
+                        <a:t>거실 누락 또는 중복</a:t>
+                      </a:r>
+                    </a:p>
+                  </a:txBody>
+                  <a:tcPr marT="38100" marB="38100" marL="114300" marR="114300" anchor="ctr">
+                    <a:solidFill>
+                      <a:srgbClr val="FFFFFF"/>
+                    </a:solidFill>
+                  </a:tcPr>
+                </a:tc>
+              </a:tr>
+              <a:tr h="420624">
+                <a:tc>
+                  <a:txBody>
+                    <a:bodyPr/>
+                    <a:lstStyle/>
+                    <a:p>
+                      <a:pPr algn="l"/>
+                      <a:r>
+                        <a:rPr sz="1150" b="1" i="0">
+                          <a:solidFill>
+                            <a:srgbClr val="212733"/>
+                          </a:solidFill>
+                          <a:latin typeface="맑은 고딕"/>
+                        </a:rPr>
+                        <a:t>침실 &lt; 화장실</a:t>
+                      </a:r>
+                    </a:p>
+                  </a:txBody>
+                  <a:tcPr marT="38100" marB="38100" marL="114300" marR="114300" anchor="ctr">
+                    <a:solidFill>
+                      <a:srgbClr val="FBFAF6"/>
+                    </a:solidFill>
+                  </a:tcPr>
+                </a:tc>
+                <a:tc>
+                  <a:txBody>
+                    <a:bodyPr/>
+                    <a:lstStyle/>
+                    <a:p>
+                      <a:pPr algn="ctr"/>
+                      <a:r>
+                        <a:rPr sz="1150" b="0" i="0">
+                          <a:solidFill>
+                            <a:srgbClr val="212733"/>
+                          </a:solidFill>
+                          <a:latin typeface="맑은 고딕"/>
+                        </a:rPr>
+                        <a:t>3,060</a:t>
+                      </a:r>
+                    </a:p>
+                  </a:txBody>
+                  <a:tcPr marT="38100" marB="38100" marL="114300" marR="114300" anchor="ctr">
+                    <a:solidFill>
+                      <a:srgbClr val="FBFAF6"/>
+                    </a:solidFill>
+                  </a:tcPr>
+                </a:tc>
+                <a:tc>
+                  <a:txBody>
+                    <a:bodyPr/>
+                    <a:lstStyle/>
+                    <a:p>
+                      <a:pPr algn="ctr"/>
+                      <a:r>
+                        <a:rPr sz="1150" b="0" i="0">
+                          <a:solidFill>
+                            <a:srgbClr val="212733"/>
+                          </a:solidFill>
+                          <a:latin typeface="맑은 고딕"/>
+                        </a:rPr>
+                        <a:t>면적 모순 — 검출/라벨 오류</a:t>
+                      </a:r>
+                    </a:p>
+                  </a:txBody>
+                  <a:tcPr marT="38100" marB="38100" marL="114300" marR="114300" anchor="ctr">
+                    <a:solidFill>
+                      <a:srgbClr val="FBFAF6"/>
+                    </a:solidFill>
+                  </a:tcPr>
+                </a:tc>
+              </a:tr>
+              <a:tr h="420624">
+                <a:tc>
+                  <a:txBody>
+                    <a:bodyPr/>
+                    <a:lstStyle/>
+                    <a:p>
+                      <a:pPr algn="l"/>
+                      <a:r>
+                        <a:rPr sz="1150" b="1" i="0">
+                          <a:solidFill>
+                            <a:srgbClr val="212733"/>
+                          </a:solidFill>
+                          <a:latin typeface="맑은 고딕"/>
+                        </a:rPr>
+                        <a:t>거실 오라벨</a:t>
+                      </a:r>
+                    </a:p>
+                  </a:txBody>
+                  <a:tcPr marT="38100" marB="38100" marL="114300" marR="114300" anchor="ctr">
+                    <a:solidFill>
+                      <a:srgbClr val="FFFFFF"/>
+                    </a:solidFill>
+                  </a:tcPr>
+                </a:tc>
+                <a:tc>
+                  <a:txBody>
+                    <a:bodyPr/>
+                    <a:lstStyle/>
+                    <a:p>
+                      <a:pPr algn="ctr"/>
+                      <a:r>
+                        <a:rPr sz="1150" b="0" i="0">
+                          <a:solidFill>
+                            <a:srgbClr val="212733"/>
+                          </a:solidFill>
+                          <a:latin typeface="맑은 고딕"/>
+                        </a:rPr>
+                        <a:t>634</a:t>
+                      </a:r>
+                    </a:p>
+                  </a:txBody>
+                  <a:tcPr marT="38100" marB="38100" marL="114300" marR="114300" anchor="ctr">
+                    <a:solidFill>
+                      <a:srgbClr val="FFFFFF"/>
+                    </a:solidFill>
+                  </a:tcPr>
+                </a:tc>
+                <a:tc>
+                  <a:txBody>
+                    <a:bodyPr/>
+                    <a:lstStyle/>
+                    <a:p>
+                      <a:pPr algn="ctr"/>
+                      <a:r>
+                        <a:rPr sz="1150" b="0" i="0">
+                          <a:solidFill>
+                            <a:srgbClr val="212733"/>
+                          </a:solidFill>
+                          <a:latin typeface="맑은 고딕"/>
+                        </a:rPr>
+                        <a:t>거실이 최대 거주공간 아님</a:t>
+                      </a:r>
+                    </a:p>
+                  </a:txBody>
+                  <a:tcPr marT="38100" marB="38100" marL="114300" marR="114300" anchor="ctr">
+                    <a:solidFill>
+                      <a:srgbClr val="FFFFFF"/>
+                    </a:solidFill>
+                  </a:tcPr>
+                </a:tc>
+              </a:tr>
+              <a:tr h="420624">
+                <a:tc>
+                  <a:txBody>
+                    <a:bodyPr/>
+                    <a:lstStyle/>
+                    <a:p>
+                      <a:pPr algn="l"/>
+                      <a:r>
+                        <a:rPr sz="1150" b="1" i="0">
+                          <a:solidFill>
+                            <a:srgbClr val="212733"/>
+                          </a:solidFill>
+                          <a:latin typeface="맑은 고딕"/>
+                        </a:rPr>
+                        <a:t>기타 과다</a:t>
+                      </a:r>
+                    </a:p>
+                  </a:txBody>
+                  <a:tcPr marT="38100" marB="38100" marL="114300" marR="114300" anchor="ctr">
+                    <a:solidFill>
+                      <a:srgbClr val="FBFAF6"/>
+                    </a:solidFill>
+                  </a:tcPr>
+                </a:tc>
+                <a:tc>
+                  <a:txBody>
+                    <a:bodyPr/>
+                    <a:lstStyle/>
+                    <a:p>
+                      <a:pPr algn="ctr"/>
+                      <a:r>
+                        <a:rPr sz="1150" b="0" i="0">
+                          <a:solidFill>
+                            <a:srgbClr val="212733"/>
+                          </a:solidFill>
+                          <a:latin typeface="맑은 고딕"/>
+                        </a:rPr>
+                        <a:t>527</a:t>
+                      </a:r>
+                    </a:p>
+                  </a:txBody>
+                  <a:tcPr marT="38100" marB="38100" marL="114300" marR="114300" anchor="ctr">
+                    <a:solidFill>
+                      <a:srgbClr val="FBFAF6"/>
+                    </a:solidFill>
+                  </a:tcPr>
+                </a:tc>
+                <a:tc>
+                  <a:txBody>
+                    <a:bodyPr/>
+                    <a:lstStyle/>
+                    <a:p>
+                      <a:pPr algn="ctr"/>
+                      <a:r>
+                        <a:rPr sz="1150" b="0" i="0">
+                          <a:solidFill>
+                            <a:srgbClr val="212733"/>
+                          </a:solidFill>
+                          <a:latin typeface="맑은 고딕"/>
+                        </a:rPr>
+                        <a:t>fragment·노이즈 누적</a:t>
+                      </a:r>
+                    </a:p>
+                  </a:txBody>
+                  <a:tcPr marT="38100" marB="38100" marL="114300" marR="114300" anchor="ctr">
+                    <a:solidFill>
+                      <a:srgbClr val="FBFAF6"/>
+                    </a:solidFill>
+                  </a:tcPr>
+                </a:tc>
+              </a:tr>
+            </a:tbl>
+          </a:graphicData>
+        </a:graphic>
+      </p:graphicFrame>
+      <p:sp>
+        <p:nvSpPr>
+          <p:cNvPr id="17" name="Rectangle 16"/>
           <p:cNvSpPr/>
           <p:nvPr/>
         </p:nvSpPr>
         <p:spPr>
           <a:xfrm>
-            <a:off x="6199632" y="2240280"/>
-            <a:ext cx="5257800" cy="1325880"/>
+            <a:off x="731520" y="3703320"/>
+            <a:ext cx="3383280" cy="1325880"/>
           </a:xfrm>
           <a:prstGeom prst="rect">
             <a:avLst/>
@@ -20361,14 +22943,14 @@
       </p:sp>
       <p:sp>
         <p:nvSpPr>
-          <p:cNvPr id="17" name="Rectangle 16"/>
+          <p:cNvPr id="18" name="Rectangle 17"/>
           <p:cNvSpPr/>
           <p:nvPr/>
         </p:nvSpPr>
         <p:spPr>
           <a:xfrm>
-            <a:off x="6199632" y="2240280"/>
-            <a:ext cx="5257800" cy="45720"/>
+            <a:off x="731520" y="3703320"/>
+            <a:ext cx="3383280" cy="45720"/>
           </a:xfrm>
           <a:prstGeom prst="rect">
             <a:avLst/>
@@ -20405,14 +22987,14 @@
       </p:sp>
       <p:sp>
         <p:nvSpPr>
-          <p:cNvPr id="18" name="TextBox 17"/>
+          <p:cNvPr id="19" name="TextBox 18"/>
           <p:cNvSpPr txBox="1"/>
           <p:nvPr/>
         </p:nvSpPr>
         <p:spPr>
           <a:xfrm>
-            <a:off x="6455664" y="2423160"/>
-            <a:ext cx="4800600" cy="320040"/>
+            <a:off x="987552" y="3886200"/>
+            <a:ext cx="2926080" cy="320040"/>
           </a:xfrm>
           <a:prstGeom prst="rect">
             <a:avLst/>
@@ -20447,14 +23029,14 @@
       </p:sp>
       <p:sp>
         <p:nvSpPr>
-          <p:cNvPr id="19" name="TextBox 18"/>
+          <p:cNvPr id="20" name="TextBox 19"/>
           <p:cNvSpPr txBox="1"/>
           <p:nvPr/>
         </p:nvSpPr>
         <p:spPr>
           <a:xfrm>
-            <a:off x="6437376" y="2715768"/>
-            <a:ext cx="4892040" cy="548640"/>
+            <a:off x="969264" y="4178808"/>
+            <a:ext cx="3017520" cy="548640"/>
           </a:xfrm>
           <a:prstGeom prst="rect">
             <a:avLst/>
@@ -20489,14 +23071,14 @@
       </p:sp>
       <p:sp>
         <p:nvSpPr>
-          <p:cNvPr id="20" name="TextBox 19"/>
+          <p:cNvPr id="21" name="TextBox 20"/>
           <p:cNvSpPr txBox="1"/>
           <p:nvPr/>
         </p:nvSpPr>
         <p:spPr>
           <a:xfrm>
-            <a:off x="6455664" y="3218688"/>
-            <a:ext cx="4800600" cy="274320"/>
+            <a:off x="987552" y="4681728"/>
+            <a:ext cx="2926080" cy="274320"/>
           </a:xfrm>
           <a:prstGeom prst="rect">
             <a:avLst/>
@@ -20531,14 +23113,14 @@
       </p:sp>
       <p:sp>
         <p:nvSpPr>
-          <p:cNvPr id="21" name="TextBox 20"/>
+          <p:cNvPr id="22" name="TextBox 21"/>
           <p:cNvSpPr txBox="1"/>
           <p:nvPr/>
         </p:nvSpPr>
         <p:spPr>
           <a:xfrm>
-            <a:off x="731520" y="3840480"/>
-            <a:ext cx="10698480" cy="2377440"/>
+            <a:off x="731520" y="5257800"/>
+            <a:ext cx="10881360" cy="914400"/>
           </a:xfrm>
           <a:prstGeom prst="rect">
             <a:avLst/>
@@ -20556,120 +23138,17 @@
                 <a:spcPts val="0"/>
               </a:spcBef>
               <a:spcAft>
-                <a:spcPts val="800"/>
+                <a:spcPts val="600"/>
               </a:spcAft>
             </a:pPr>
             <a:r>
-              <a:rPr sz="1400" b="1" i="0" spc="100">
-                <a:solidFill>
-                  <a:srgbClr val="C2A14D"/>
-                </a:solidFill>
-                <a:latin typeface="맑은 고딕"/>
-              </a:rPr>
-              <a:t>보정필요 판정 규칙 · 사유 분포 (실측)</a:t>
-            </a:r>
-          </a:p>
-          <a:p>
-            <a:pPr algn="l">
-              <a:spcBef>
-                <a:spcPts val="0"/>
-              </a:spcBef>
-              <a:spcAft>
-                <a:spcPts val="800"/>
-              </a:spcAft>
-            </a:pPr>
-            <a:r>
-              <a:rPr sz="1400" b="1" i="0">
-                <a:solidFill>
-                  <a:srgbClr val="C2A14D"/>
-                </a:solidFill>
-                <a:latin typeface="맑은 고딕"/>
-              </a:rPr>
-              <a:t>—  </a:t>
-            </a:r>
-            <a:r>
-              <a:rPr sz="1400" b="0" i="0">
+              <a:rPr sz="1300" b="1" i="0">
                 <a:solidFill>
                   <a:srgbClr val="212733"/>
                 </a:solidFill>
                 <a:latin typeface="맑은 고딕"/>
               </a:rPr>
-              <a:t>현관 ≠ 1 (다세대 병합/누락) — 5,142</a:t>
-            </a:r>
-          </a:p>
-          <a:p>
-            <a:pPr algn="l">
-              <a:spcBef>
-                <a:spcPts val="0"/>
-              </a:spcBef>
-              <a:spcAft>
-                <a:spcPts val="800"/>
-              </a:spcAft>
-            </a:pPr>
-            <a:r>
-              <a:rPr sz="1400" b="1" i="0">
-                <a:solidFill>
-                  <a:srgbClr val="C2A14D"/>
-                </a:solidFill>
-                <a:latin typeface="맑은 고딕"/>
-              </a:rPr>
-              <a:t>—  </a:t>
-            </a:r>
-            <a:r>
-              <a:rPr sz="1400" b="0" i="0">
-                <a:solidFill>
-                  <a:srgbClr val="212733"/>
-                </a:solidFill>
-                <a:latin typeface="맑은 고딕"/>
-              </a:rPr>
-              <a:t>발코니 과다(&gt;4) — 4,904   ·   거실 ≠ 1 — 4,521</a:t>
-            </a:r>
-          </a:p>
-          <a:p>
-            <a:pPr algn="l">
-              <a:spcBef>
-                <a:spcPts val="0"/>
-              </a:spcBef>
-              <a:spcAft>
-                <a:spcPts val="800"/>
-              </a:spcAft>
-            </a:pPr>
-            <a:r>
-              <a:rPr sz="1400" b="1" i="0">
-                <a:solidFill>
-                  <a:srgbClr val="C2A14D"/>
-                </a:solidFill>
-                <a:latin typeface="맑은 고딕"/>
-              </a:rPr>
-              <a:t>—  </a:t>
-            </a:r>
-            <a:r>
-              <a:rPr sz="1400" b="0" i="0">
-                <a:solidFill>
-                  <a:srgbClr val="212733"/>
-                </a:solidFill>
-                <a:latin typeface="맑은 고딕"/>
-              </a:rPr>
-              <a:t>침실 &lt; 화장실(면적 모순) — 3,060   ·   거실 오라벨 — 634   ·   기타 과다 — 527</a:t>
-            </a:r>
-          </a:p>
-          <a:p>
-            <a:pPr algn="l">
-              <a:spcBef>
-                <a:spcPts val="0"/>
-              </a:spcBef>
-              <a:spcAft>
-                <a:spcPts val="800"/>
-              </a:spcAft>
-            </a:pPr>
-            <a:r>
-              <a:rPr sz="1400" b="1" i="0">
-                <a:solidFill>
-                  <a:srgbClr val="212733"/>
-                </a:solidFill>
-                <a:latin typeface="맑은 고딕"/>
-              </a:rPr>
-              <a:t>온전 데이터 방 수: 중앙값 14 · p95 17 → 엔진 방 수용량 18로 결정</a:t>
+              <a:t>온전 데이터 방 수: 중앙값 14 · p95 17 → 엔진 방 수용량을 18로 결정 (RPLAN 8 한도는 한국 부적합)</a:t>
             </a:r>
           </a:p>
         </p:txBody>
